--- a/PS12SportAdventurousSlides.pptx
+++ b/PS12SportAdventurousSlides.pptx
@@ -16,9 +16,11 @@
     <p:sldId id="264" r:id="rId10"/>
     <p:sldId id="265" r:id="rId11"/>
     <p:sldId id="266" r:id="rId12"/>
+    <p:sldId id="267" r:id="rId13"/>
+    <p:sldId id="268" r:id="rId14"/>
   </p:sldIdLst>
   <p:notesMasterIdLst>
-    <p:notesMasterId r:id="rId13"/>
+    <p:notesMasterId r:id="rId15"/>
   </p:notesMasterIdLst>
   <p:sldSz cx="12192000" cy="6858000"/>
   <p:notesSz cx="6858000" cy="12192000"/>
@@ -712,6 +714,182 @@
             <a:fld id="{F7021451-1387-4CA6-816F-3879F97B5CBC}" type="slidenum">
               <a:rPr lang="en-US"/>
               <a:t>11</a:t>
+            </a:fld>
+            <a:endParaRPr lang="en-US"/>
+          </a:p>
+        </p:txBody>
+      </p:sp>
+    </p:spTree>
+    <p:extLst>
+      <p:ext uri="{BB962C8B-B14F-4D97-AF65-F5344CB8AC3E}">
+        <p14:creationId xmlns:p14="http://schemas.microsoft.com/office/powerpoint/2010/main" val="1024086991"/>
+      </p:ext>
+    </p:extLst>
+  </p:cSld>
+  <p:clrMapOvr>
+    <a:masterClrMapping/>
+  </p:clrMapOvr>
+</p:notes>
+</file>
+
+<file path=ppt/notesSlides/notesSlide12.xml><?xml version="1.0" encoding="utf-8"?>
+<p:notes xmlns:a="http://schemas.openxmlformats.org/drawingml/2006/main" xmlns:r="http://schemas.openxmlformats.org/officeDocument/2006/relationships" xmlns:p="http://schemas.openxmlformats.org/presentationml/2006/main">
+  <p:cSld>
+    <p:spTree>
+      <p:nvGrpSpPr>
+        <p:cNvPr id="1" name=""/>
+        <p:cNvGrpSpPr/>
+        <p:nvPr/>
+      </p:nvGrpSpPr>
+      <p:grpSpPr>
+        <a:xfrm>
+          <a:off x="0" y="0"/>
+          <a:ext cx="0" cy="0"/>
+          <a:chOff x="0" y="0"/>
+          <a:chExt cx="0" cy="0"/>
+        </a:xfrm>
+      </p:grpSpPr>
+      <p:sp>
+        <p:nvSpPr>
+          <p:cNvPr id="2" name="Slide Image Placeholder 1"/>
+          <p:cNvSpPr>
+            <a:spLocks noGrp="1" noRot="1" noChangeAspect="1"/>
+          </p:cNvSpPr>
+          <p:nvPr>
+            <p:ph type="sldImg"/>
+          </p:nvPr>
+        </p:nvSpPr>
+        <p:spPr/>
+      </p:sp>
+      <p:sp>
+        <p:nvSpPr>
+          <p:cNvPr id="3" name="Notes Placeholder 2"/>
+          <p:cNvSpPr>
+            <a:spLocks noGrp="1"/>
+          </p:cNvSpPr>
+          <p:nvPr>
+            <p:ph type="body" idx="1"/>
+          </p:nvPr>
+        </p:nvSpPr>
+        <p:spPr/>
+        <p:txBody>
+          <a:bodyPr/>
+          <a:lstStyle/>
+          <a:p>
+            <a:r>
+              <a:rPr lang="en-US" dirty="0"/>
+              <a:t/>
+            </a:r>
+            <a:endParaRPr lang="en-US" dirty="0"/>
+          </a:p>
+        </p:txBody>
+      </p:sp>
+      <p:sp>
+        <p:nvSpPr>
+          <p:cNvPr id="4" name="Slide Number Placeholder 3"/>
+          <p:cNvSpPr>
+            <a:spLocks noGrp="1"/>
+          </p:cNvSpPr>
+          <p:nvPr>
+            <p:ph type="sldNum" sz="quarter" idx="10"/>
+          </p:nvPr>
+        </p:nvSpPr>
+        <p:spPr/>
+        <p:txBody>
+          <a:bodyPr/>
+          <a:lstStyle/>
+          <a:p>
+            <a:fld id="{F7021451-1387-4CA6-816F-3879F97B5CBC}" type="slidenum">
+              <a:rPr lang="en-US"/>
+              <a:t>12</a:t>
+            </a:fld>
+            <a:endParaRPr lang="en-US"/>
+          </a:p>
+        </p:txBody>
+      </p:sp>
+    </p:spTree>
+    <p:extLst>
+      <p:ext uri="{BB962C8B-B14F-4D97-AF65-F5344CB8AC3E}">
+        <p14:creationId xmlns:p14="http://schemas.microsoft.com/office/powerpoint/2010/main" val="1024086991"/>
+      </p:ext>
+    </p:extLst>
+  </p:cSld>
+  <p:clrMapOvr>
+    <a:masterClrMapping/>
+  </p:clrMapOvr>
+</p:notes>
+</file>
+
+<file path=ppt/notesSlides/notesSlide13.xml><?xml version="1.0" encoding="utf-8"?>
+<p:notes xmlns:a="http://schemas.openxmlformats.org/drawingml/2006/main" xmlns:r="http://schemas.openxmlformats.org/officeDocument/2006/relationships" xmlns:p="http://schemas.openxmlformats.org/presentationml/2006/main">
+  <p:cSld>
+    <p:spTree>
+      <p:nvGrpSpPr>
+        <p:cNvPr id="1" name=""/>
+        <p:cNvGrpSpPr/>
+        <p:nvPr/>
+      </p:nvGrpSpPr>
+      <p:grpSpPr>
+        <a:xfrm>
+          <a:off x="0" y="0"/>
+          <a:ext cx="0" cy="0"/>
+          <a:chOff x="0" y="0"/>
+          <a:chExt cx="0" cy="0"/>
+        </a:xfrm>
+      </p:grpSpPr>
+      <p:sp>
+        <p:nvSpPr>
+          <p:cNvPr id="2" name="Slide Image Placeholder 1"/>
+          <p:cNvSpPr>
+            <a:spLocks noGrp="1" noRot="1" noChangeAspect="1"/>
+          </p:cNvSpPr>
+          <p:nvPr>
+            <p:ph type="sldImg"/>
+          </p:nvPr>
+        </p:nvSpPr>
+        <p:spPr/>
+      </p:sp>
+      <p:sp>
+        <p:nvSpPr>
+          <p:cNvPr id="3" name="Notes Placeholder 2"/>
+          <p:cNvSpPr>
+            <a:spLocks noGrp="1"/>
+          </p:cNvSpPr>
+          <p:nvPr>
+            <p:ph type="body" idx="1"/>
+          </p:nvPr>
+        </p:nvSpPr>
+        <p:spPr/>
+        <p:txBody>
+          <a:bodyPr/>
+          <a:lstStyle/>
+          <a:p>
+            <a:r>
+              <a:rPr lang="en-US" dirty="0"/>
+              <a:t/>
+            </a:r>
+            <a:endParaRPr lang="en-US" dirty="0"/>
+          </a:p>
+        </p:txBody>
+      </p:sp>
+      <p:sp>
+        <p:nvSpPr>
+          <p:cNvPr id="4" name="Slide Number Placeholder 3"/>
+          <p:cNvSpPr>
+            <a:spLocks noGrp="1"/>
+          </p:cNvSpPr>
+          <p:nvPr>
+            <p:ph type="sldNum" sz="quarter" idx="10"/>
+          </p:nvPr>
+        </p:nvSpPr>
+        <p:spPr/>
+        <p:txBody>
+          <a:bodyPr/>
+          <a:lstStyle/>
+          <a:p>
+            <a:fld id="{F7021451-1387-4CA6-816F-3879F97B5CBC}" type="slidenum">
+              <a:rPr lang="en-US"/>
+              <a:t>13</a:t>
             </a:fld>
             <a:endParaRPr lang="en-US"/>
           </a:p>
@@ -2209,57 +2387,277 @@
       </p:pic>
       <p:sp>
         <p:nvSpPr>
-          <p:cNvPr id="3" name="Text 0"/>
-          <p:cNvSpPr/>
-          <p:nvPr/>
-        </p:nvSpPr>
-        <p:spPr>
-          <a:xfrm>
-            <a:off x="548640" y="320040"/>
-            <a:ext cx="8869680" cy="548640"/>
-          </a:xfrm>
-          <a:prstGeom prst="rect">
-            <a:avLst/>
-          </a:prstGeom>
-          <a:noFill/>
-          <a:ln/>
-        </p:spPr>
-        <p:txBody>
-          <a:bodyPr wrap="square" rtlCol="0" anchor="ctr"/>
-          <a:lstStyle/>
-          <a:p>
-            <a:pPr indent="0" marL="0">
-              <a:buNone/>
-            </a:pPr>
-            <a:r>
-              <a:rPr lang="en-US" sz="2800" b="1" dirty="0">
-                <a:solidFill>
-                  <a:srgbClr val="122952"/>
-                </a:solidFill>
-                <a:latin typeface="Calibri" pitchFamily="34" charset="0"/>
-                <a:ea typeface="Calibri" pitchFamily="34" charset="-122"/>
-                <a:cs typeface="Calibri" pitchFamily="34" charset="-120"/>
-              </a:rPr>
-              <a:t>Revision — Key Terms</a:t>
-            </a:r>
-            <a:endParaRPr lang="en-US" sz="2800" dirty="0"/>
-          </a:p>
-        </p:txBody>
-      </p:sp>
-      <p:sp>
-        <p:nvSpPr>
-          <p:cNvPr id="4" name="Shape 1"/>
-          <p:cNvSpPr/>
-          <p:nvPr/>
-        </p:nvSpPr>
-        <p:spPr>
-          <a:xfrm>
-            <a:off x="548640" y="1161288"/>
-            <a:ext cx="5440680" cy="676656"/>
+          <p:cNvPr id="3" name="Shape 0"/>
+          <p:cNvSpPr/>
+          <p:nvPr/>
+        </p:nvSpPr>
+        <p:spPr>
+          <a:xfrm>
+            <a:off x="9144000" y="274320"/>
+            <a:ext cx="2697480" cy="384048"/>
           </a:xfrm>
           <a:prstGeom prst="roundRect">
             <a:avLst>
-              <a:gd name="adj" fmla="val 6757"/>
+              <a:gd name="adj" fmla="val 19048"/>
+            </a:avLst>
+          </a:prstGeom>
+          <a:solidFill>
+            <a:srgbClr val="C8A951"/>
+          </a:solidFill>
+          <a:ln/>
+        </p:spPr>
+      </p:sp>
+      <p:sp>
+        <p:nvSpPr>
+          <p:cNvPr id="4" name="Text 1"/>
+          <p:cNvSpPr/>
+          <p:nvPr/>
+        </p:nvSpPr>
+        <p:spPr>
+          <a:xfrm>
+            <a:off x="9144000" y="274320"/>
+            <a:ext cx="2697480" cy="384048"/>
+          </a:xfrm>
+          <a:prstGeom prst="rect">
+            <a:avLst/>
+          </a:prstGeom>
+          <a:noFill/>
+          <a:ln/>
+        </p:spPr>
+        <p:txBody>
+          <a:bodyPr wrap="square" lIns="0" tIns="0" rIns="0" bIns="0" rtlCol="0" anchor="ctr"/>
+          <a:lstStyle/>
+          <a:p>
+            <a:pPr algn="ctr" indent="0" marL="0">
+              <a:buNone/>
+            </a:pPr>
+            <a:r>
+              <a:rPr lang="en-US" sz="1200" b="1" dirty="0">
+                <a:solidFill>
+                  <a:srgbClr val="122952"/>
+                </a:solidFill>
+                <a:latin typeface="Calibri" pitchFamily="34" charset="0"/>
+                <a:ea typeface="Calibri" pitchFamily="34" charset="-122"/>
+                <a:cs typeface="Calibri" pitchFamily="34" charset="-120"/>
+              </a:rPr>
+              <a:t>B.P3 · B.M3 · B.D3</a:t>
+            </a:r>
+            <a:endParaRPr lang="en-US" sz="1200" dirty="0"/>
+          </a:p>
+        </p:txBody>
+      </p:sp>
+      <p:sp>
+        <p:nvSpPr>
+          <p:cNvPr id="5" name="Text 2"/>
+          <p:cNvSpPr/>
+          <p:nvPr/>
+        </p:nvSpPr>
+        <p:spPr>
+          <a:xfrm>
+            <a:off x="548640" y="320040"/>
+            <a:ext cx="8869680" cy="640080"/>
+          </a:xfrm>
+          <a:prstGeom prst="rect">
+            <a:avLst/>
+          </a:prstGeom>
+          <a:noFill/>
+          <a:ln/>
+        </p:spPr>
+        <p:txBody>
+          <a:bodyPr wrap="square" rtlCol="0" anchor="ctr"/>
+          <a:lstStyle/>
+          <a:p>
+            <a:pPr indent="0" marL="0">
+              <a:buNone/>
+            </a:pPr>
+            <a:r>
+              <a:rPr lang="en-US" sz="2500" b="1" dirty="0">
+                <a:solidFill>
+                  <a:srgbClr val="122952"/>
+                </a:solidFill>
+                <a:latin typeface="Calibri" pitchFamily="34" charset="0"/>
+                <a:ea typeface="Calibri" pitchFamily="34" charset="-122"/>
+                <a:cs typeface="Calibri" pitchFamily="34" charset="-120"/>
+              </a:rPr>
+              <a:t>Communication and Teamwork in Sport</a:t>
+            </a:r>
+            <a:endParaRPr lang="en-US" sz="2500" dirty="0"/>
+          </a:p>
+        </p:txBody>
+      </p:sp>
+      <p:sp>
+        <p:nvSpPr>
+          <p:cNvPr id="6" name="Text 3"/>
+          <p:cNvSpPr/>
+          <p:nvPr/>
+        </p:nvSpPr>
+        <p:spPr>
+          <a:xfrm>
+            <a:off x="548640" y="1097280"/>
+            <a:ext cx="5303520" cy="365760"/>
+          </a:xfrm>
+          <a:prstGeom prst="rect">
+            <a:avLst/>
+          </a:prstGeom>
+          <a:noFill/>
+          <a:ln/>
+        </p:spPr>
+        <p:txBody>
+          <a:bodyPr wrap="square" rtlCol="0" anchor="ctr"/>
+          <a:lstStyle/>
+          <a:p>
+            <a:pPr indent="0" marL="0">
+              <a:buNone/>
+            </a:pPr>
+            <a:r>
+              <a:rPr lang="en-US" sz="1600" b="1" dirty="0">
+                <a:solidFill>
+                  <a:srgbClr val="122952"/>
+                </a:solidFill>
+                <a:latin typeface="Calibri" pitchFamily="34" charset="0"/>
+                <a:ea typeface="Calibri" pitchFamily="34" charset="-122"/>
+                <a:cs typeface="Calibri" pitchFamily="34" charset="-120"/>
+              </a:rPr>
+              <a:t>Communication skills:</a:t>
+            </a:r>
+            <a:endParaRPr lang="en-US" sz="1600" dirty="0"/>
+          </a:p>
+        </p:txBody>
+      </p:sp>
+      <p:sp>
+        <p:nvSpPr>
+          <p:cNvPr id="7" name="Text 4"/>
+          <p:cNvSpPr/>
+          <p:nvPr/>
+        </p:nvSpPr>
+        <p:spPr>
+          <a:xfrm>
+            <a:off x="548640" y="1554480"/>
+            <a:ext cx="5303520" cy="548640"/>
+          </a:xfrm>
+          <a:prstGeom prst="rect">
+            <a:avLst/>
+          </a:prstGeom>
+          <a:noFill/>
+          <a:ln/>
+        </p:spPr>
+        <p:txBody>
+          <a:bodyPr wrap="square" rtlCol="0" anchor="ctr"/>
+          <a:lstStyle/>
+          <a:p>
+            <a:pPr marL="342900" indent="-342900">
+              <a:buSzPct val="100000"/>
+              <a:buChar char="▪"/>
+            </a:pPr>
+            <a:r>
+              <a:rPr lang="en-US" sz="1300" dirty="0">
+                <a:solidFill>
+                  <a:srgbClr val="2A2A2A"/>
+                </a:solidFill>
+                <a:latin typeface="Calibri" pitchFamily="34" charset="0"/>
+                <a:ea typeface="Calibri" pitchFamily="34" charset="-122"/>
+                <a:cs typeface="Calibri" pitchFamily="34" charset="-120"/>
+              </a:rPr>
+              <a:t>Non-verbal communication — hand signals, body language</a:t>
+            </a:r>
+            <a:endParaRPr lang="en-US" sz="1300" dirty="0"/>
+          </a:p>
+        </p:txBody>
+      </p:sp>
+      <p:sp>
+        <p:nvSpPr>
+          <p:cNvPr id="8" name="Text 5"/>
+          <p:cNvSpPr/>
+          <p:nvPr/>
+        </p:nvSpPr>
+        <p:spPr>
+          <a:xfrm>
+            <a:off x="548640" y="2148840"/>
+            <a:ext cx="5303520" cy="548640"/>
+          </a:xfrm>
+          <a:prstGeom prst="rect">
+            <a:avLst/>
+          </a:prstGeom>
+          <a:noFill/>
+          <a:ln/>
+        </p:spPr>
+        <p:txBody>
+          <a:bodyPr wrap="square" rtlCol="0" anchor="ctr"/>
+          <a:lstStyle/>
+          <a:p>
+            <a:pPr marL="342900" indent="-342900">
+              <a:buSzPct val="100000"/>
+              <a:buChar char="▪"/>
+            </a:pPr>
+            <a:r>
+              <a:rPr lang="en-US" sz="1300" dirty="0">
+                <a:solidFill>
+                  <a:srgbClr val="2A2A2A"/>
+                </a:solidFill>
+                <a:latin typeface="Calibri" pitchFamily="34" charset="0"/>
+                <a:ea typeface="Calibri" pitchFamily="34" charset="-122"/>
+                <a:cs typeface="Calibri" pitchFamily="34" charset="-120"/>
+              </a:rPr>
+              <a:t>Speaking clearly, giving instructions to team mates</a:t>
+            </a:r>
+            <a:endParaRPr lang="en-US" sz="1300" dirty="0"/>
+          </a:p>
+        </p:txBody>
+      </p:sp>
+      <p:sp>
+        <p:nvSpPr>
+          <p:cNvPr id="9" name="Text 6"/>
+          <p:cNvSpPr/>
+          <p:nvPr/>
+        </p:nvSpPr>
+        <p:spPr>
+          <a:xfrm>
+            <a:off x="548640" y="2743200"/>
+            <a:ext cx="5303520" cy="548640"/>
+          </a:xfrm>
+          <a:prstGeom prst="rect">
+            <a:avLst/>
+          </a:prstGeom>
+          <a:noFill/>
+          <a:ln/>
+        </p:spPr>
+        <p:txBody>
+          <a:bodyPr wrap="square" rtlCol="0" anchor="ctr"/>
+          <a:lstStyle/>
+          <a:p>
+            <a:pPr marL="342900" indent="-342900">
+              <a:buSzPct val="100000"/>
+              <a:buChar char="▪"/>
+            </a:pPr>
+            <a:r>
+              <a:rPr lang="en-US" sz="1300" dirty="0">
+                <a:solidFill>
+                  <a:srgbClr val="2A2A2A"/>
+                </a:solidFill>
+                <a:latin typeface="Calibri" pitchFamily="34" charset="0"/>
+                <a:ea typeface="Calibri" pitchFamily="34" charset="-122"/>
+                <a:cs typeface="Calibri" pitchFamily="34" charset="-120"/>
+              </a:rPr>
+              <a:t>Listening and discussing plans with others</a:t>
+            </a:r>
+            <a:endParaRPr lang="en-US" sz="1300" dirty="0"/>
+          </a:p>
+        </p:txBody>
+      </p:sp>
+      <p:sp>
+        <p:nvSpPr>
+          <p:cNvPr id="10" name="Shape 7"/>
+          <p:cNvSpPr/>
+          <p:nvPr/>
+        </p:nvSpPr>
+        <p:spPr>
+          <a:xfrm>
+            <a:off x="6172200" y="1097280"/>
+            <a:ext cx="5440680" cy="4343400"/>
+          </a:xfrm>
+          <a:prstGeom prst="roundRect">
+            <a:avLst>
+              <a:gd name="adj" fmla="val 1684"/>
             </a:avLst>
           </a:prstGeom>
           <a:solidFill>
@@ -2270,30 +2668,30 @@
       </p:sp>
       <p:sp>
         <p:nvSpPr>
-          <p:cNvPr id="5" name="Text 2"/>
-          <p:cNvSpPr/>
-          <p:nvPr/>
-        </p:nvSpPr>
-        <p:spPr>
-          <a:xfrm>
-            <a:off x="685800" y="1161288"/>
-            <a:ext cx="1828800" cy="676656"/>
-          </a:xfrm>
-          <a:prstGeom prst="rect">
-            <a:avLst/>
-          </a:prstGeom>
-          <a:noFill/>
-          <a:ln/>
-        </p:spPr>
-        <p:txBody>
-          <a:bodyPr wrap="square" rtlCol="0" anchor="ctr"/>
-          <a:lstStyle/>
-          <a:p>
-            <a:pPr indent="0" marL="0">
-              <a:buNone/>
-            </a:pPr>
-            <a:r>
-              <a:rPr lang="en-US" sz="1200" b="1" dirty="0">
+          <p:cNvPr id="11" name="Text 8"/>
+          <p:cNvSpPr/>
+          <p:nvPr/>
+        </p:nvSpPr>
+        <p:spPr>
+          <a:xfrm>
+            <a:off x="6446520" y="1325880"/>
+            <a:ext cx="4937760" cy="365760"/>
+          </a:xfrm>
+          <a:prstGeom prst="rect">
+            <a:avLst/>
+          </a:prstGeom>
+          <a:noFill/>
+          <a:ln/>
+        </p:spPr>
+        <p:txBody>
+          <a:bodyPr wrap="square" rtlCol="0" anchor="ctr"/>
+          <a:lstStyle/>
+          <a:p>
+            <a:pPr indent="0" marL="0">
+              <a:buNone/>
+            </a:pPr>
+            <a:r>
+              <a:rPr lang="en-US" sz="1600" b="1" dirty="0">
                 <a:solidFill>
                   <a:srgbClr val="122952"/>
                 </a:solidFill>
@@ -2301,7 +2699,85 @@
                 <a:ea typeface="Calibri" pitchFamily="34" charset="-122"/>
                 <a:cs typeface="Calibri" pitchFamily="34" charset="-120"/>
               </a:rPr>
-              <a:t>Team cohesion</a:t>
+              <a:t>Teamwork means:</a:t>
+            </a:r>
+            <a:endParaRPr lang="en-US" sz="1600" dirty="0"/>
+          </a:p>
+        </p:txBody>
+      </p:sp>
+      <p:sp>
+        <p:nvSpPr>
+          <p:cNvPr id="12" name="Text 9"/>
+          <p:cNvSpPr/>
+          <p:nvPr/>
+        </p:nvSpPr>
+        <p:spPr>
+          <a:xfrm>
+            <a:off x="6446520" y="1874520"/>
+            <a:ext cx="4937760" cy="320040"/>
+          </a:xfrm>
+          <a:prstGeom prst="rect">
+            <a:avLst/>
+          </a:prstGeom>
+          <a:noFill/>
+          <a:ln/>
+        </p:spPr>
+        <p:txBody>
+          <a:bodyPr wrap="square" rtlCol="0" anchor="ctr"/>
+          <a:lstStyle/>
+          <a:p>
+            <a:pPr indent="0" marL="0">
+              <a:buNone/>
+            </a:pPr>
+            <a:r>
+              <a:rPr lang="en-US" sz="1300" b="1" dirty="0">
+                <a:solidFill>
+                  <a:srgbClr val="122952"/>
+                </a:solidFill>
+                <a:latin typeface="Calibri" pitchFamily="34" charset="0"/>
+                <a:ea typeface="Calibri" pitchFamily="34" charset="-122"/>
+                <a:cs typeface="Calibri" pitchFamily="34" charset="-120"/>
+              </a:rPr>
+              <a:t>Working together</a:t>
+            </a:r>
+            <a:endParaRPr lang="en-US" sz="1300" dirty="0"/>
+          </a:p>
+        </p:txBody>
+      </p:sp>
+      <p:sp>
+        <p:nvSpPr>
+          <p:cNvPr id="13" name="Text 10"/>
+          <p:cNvSpPr/>
+          <p:nvPr/>
+        </p:nvSpPr>
+        <p:spPr>
+          <a:xfrm>
+            <a:off x="6446520" y="2240280"/>
+            <a:ext cx="4937760" cy="640080"/>
+          </a:xfrm>
+          <a:prstGeom prst="rect">
+            <a:avLst/>
+          </a:prstGeom>
+          <a:noFill/>
+          <a:ln/>
+        </p:spPr>
+        <p:txBody>
+          <a:bodyPr wrap="square" rtlCol="0" anchor="ctr"/>
+          <a:lstStyle/>
+          <a:p>
+            <a:pPr indent="0" marL="0">
+              <a:buNone/>
+            </a:pPr>
+            <a:r>
+              <a:rPr lang="en-US" sz="1200" dirty="0">
+                <a:solidFill>
+                  <a:srgbClr val="2A2A2A"/>
+                </a:solidFill>
+                <a:latin typeface="Calibri" pitchFamily="34" charset="0"/>
+                <a:ea typeface="Calibri" pitchFamily="34" charset="-122"/>
+                <a:cs typeface="Calibri" pitchFamily="34" charset="-120"/>
+              </a:rPr>
+              <a:t>To take part in sport and adventurous activities</a:t>
             </a:r>
             <a:endParaRPr lang="en-US" sz="1200" dirty="0"/>
           </a:p>
@@ -2309,30 +2785,69 @@
       </p:sp>
       <p:sp>
         <p:nvSpPr>
-          <p:cNvPr id="6" name="Text 3"/>
-          <p:cNvSpPr/>
-          <p:nvPr/>
-        </p:nvSpPr>
-        <p:spPr>
-          <a:xfrm>
-            <a:off x="2560320" y="1161288"/>
-            <a:ext cx="3291840" cy="676656"/>
-          </a:xfrm>
-          <a:prstGeom prst="rect">
-            <a:avLst/>
-          </a:prstGeom>
-          <a:noFill/>
-          <a:ln/>
-        </p:spPr>
-        <p:txBody>
-          <a:bodyPr wrap="square" rtlCol="0" anchor="ctr"/>
-          <a:lstStyle/>
-          <a:p>
-            <a:pPr indent="0" marL="0">
-              <a:buNone/>
-            </a:pPr>
-            <a:r>
-              <a:rPr lang="en-US" sz="1100" dirty="0">
+          <p:cNvPr id="14" name="Text 11"/>
+          <p:cNvSpPr/>
+          <p:nvPr/>
+        </p:nvSpPr>
+        <p:spPr>
+          <a:xfrm>
+            <a:off x="6446520" y="3017520"/>
+            <a:ext cx="4937760" cy="320040"/>
+          </a:xfrm>
+          <a:prstGeom prst="rect">
+            <a:avLst/>
+          </a:prstGeom>
+          <a:noFill/>
+          <a:ln/>
+        </p:spPr>
+        <p:txBody>
+          <a:bodyPr wrap="square" rtlCol="0" anchor="ctr"/>
+          <a:lstStyle/>
+          <a:p>
+            <a:pPr indent="0" marL="0">
+              <a:buNone/>
+            </a:pPr>
+            <a:r>
+              <a:rPr lang="en-US" sz="1300" b="1" dirty="0">
+                <a:solidFill>
+                  <a:srgbClr val="122952"/>
+                </a:solidFill>
+                <a:latin typeface="Calibri" pitchFamily="34" charset="0"/>
+                <a:ea typeface="Calibri" pitchFamily="34" charset="-122"/>
+                <a:cs typeface="Calibri" pitchFamily="34" charset="-120"/>
+              </a:rPr>
+              <a:t>Individual contribution</a:t>
+            </a:r>
+            <a:endParaRPr lang="en-US" sz="1300" dirty="0"/>
+          </a:p>
+        </p:txBody>
+      </p:sp>
+      <p:sp>
+        <p:nvSpPr>
+          <p:cNvPr id="15" name="Text 12"/>
+          <p:cNvSpPr/>
+          <p:nvPr/>
+        </p:nvSpPr>
+        <p:spPr>
+          <a:xfrm>
+            <a:off x="6446520" y="3383280"/>
+            <a:ext cx="4937760" cy="640080"/>
+          </a:xfrm>
+          <a:prstGeom prst="rect">
+            <a:avLst/>
+          </a:prstGeom>
+          <a:noFill/>
+          <a:ln/>
+        </p:spPr>
+        <p:txBody>
+          <a:bodyPr wrap="square" rtlCol="0" anchor="ctr"/>
+          <a:lstStyle/>
+          <a:p>
+            <a:pPr indent="0" marL="0">
+              <a:buNone/>
+            </a:pPr>
+            <a:r>
+              <a:rPr lang="en-US" sz="1200" dirty="0">
                 <a:solidFill>
                   <a:srgbClr val="2A2A2A"/>
                 </a:solidFill>
@@ -2340,60 +2855,38 @@
                 <a:ea typeface="Calibri" pitchFamily="34" charset="-122"/>
                 <a:cs typeface="Calibri" pitchFamily="34" charset="-120"/>
               </a:rPr>
-              <a:t>How well a team trusts and relies on each other</a:t>
-            </a:r>
-            <a:endParaRPr lang="en-US" sz="1100" dirty="0"/>
-          </a:p>
-        </p:txBody>
-      </p:sp>
-      <p:sp>
-        <p:nvSpPr>
-          <p:cNvPr id="7" name="Shape 4"/>
-          <p:cNvSpPr/>
-          <p:nvPr/>
-        </p:nvSpPr>
-        <p:spPr>
-          <a:xfrm>
-            <a:off x="6263640" y="1161288"/>
-            <a:ext cx="5440680" cy="676656"/>
-          </a:xfrm>
-          <a:prstGeom prst="roundRect">
-            <a:avLst>
-              <a:gd name="adj" fmla="val 6757"/>
-            </a:avLst>
-          </a:prstGeom>
-          <a:solidFill>
-            <a:srgbClr val="E8EEF7"/>
-          </a:solidFill>
-          <a:ln/>
-        </p:spPr>
-      </p:sp>
-      <p:sp>
-        <p:nvSpPr>
-          <p:cNvPr id="8" name="Text 5"/>
-          <p:cNvSpPr/>
-          <p:nvPr/>
-        </p:nvSpPr>
-        <p:spPr>
-          <a:xfrm>
-            <a:off x="6400800" y="1161288"/>
-            <a:ext cx="1828800" cy="676656"/>
-          </a:xfrm>
-          <a:prstGeom prst="rect">
-            <a:avLst/>
-          </a:prstGeom>
-          <a:noFill/>
-          <a:ln/>
-        </p:spPr>
-        <p:txBody>
-          <a:bodyPr wrap="square" rtlCol="0" anchor="ctr"/>
-          <a:lstStyle/>
-          <a:p>
-            <a:pPr indent="0" marL="0">
-              <a:buNone/>
-            </a:pPr>
-            <a:r>
-              <a:rPr lang="en-US" sz="1200" b="1" dirty="0">
+              <a:t>Working individually to contribute to the team effort</a:t>
+            </a:r>
+            <a:endParaRPr lang="en-US" sz="1200" dirty="0"/>
+          </a:p>
+        </p:txBody>
+      </p:sp>
+      <p:sp>
+        <p:nvSpPr>
+          <p:cNvPr id="16" name="Text 13"/>
+          <p:cNvSpPr/>
+          <p:nvPr/>
+        </p:nvSpPr>
+        <p:spPr>
+          <a:xfrm>
+            <a:off x="6446520" y="4160520"/>
+            <a:ext cx="4937760" cy="320040"/>
+          </a:xfrm>
+          <a:prstGeom prst="rect">
+            <a:avLst/>
+          </a:prstGeom>
+          <a:noFill/>
+          <a:ln/>
+        </p:spPr>
+        <p:txBody>
+          <a:bodyPr wrap="square" rtlCol="0" anchor="ctr"/>
+          <a:lstStyle/>
+          <a:p>
+            <a:pPr indent="0" marL="0">
+              <a:buNone/>
+            </a:pPr>
+            <a:r>
+              <a:rPr lang="en-US" sz="1300" b="1" dirty="0">
                 <a:solidFill>
                   <a:srgbClr val="122952"/>
                 </a:solidFill>
@@ -2401,7 +2894,46 @@
                 <a:ea typeface="Calibri" pitchFamily="34" charset="-122"/>
                 <a:cs typeface="Calibri" pitchFamily="34" charset="-120"/>
               </a:rPr>
-              <a:t>Protocol</a:t>
+              <a:t>Respecting roles</a:t>
+            </a:r>
+            <a:endParaRPr lang="en-US" sz="1300" dirty="0"/>
+          </a:p>
+        </p:txBody>
+      </p:sp>
+      <p:sp>
+        <p:nvSpPr>
+          <p:cNvPr id="17" name="Text 14"/>
+          <p:cNvSpPr/>
+          <p:nvPr/>
+        </p:nvSpPr>
+        <p:spPr>
+          <a:xfrm>
+            <a:off x="6446520" y="4526280"/>
+            <a:ext cx="4937760" cy="640080"/>
+          </a:xfrm>
+          <a:prstGeom prst="rect">
+            <a:avLst/>
+          </a:prstGeom>
+          <a:noFill/>
+          <a:ln/>
+        </p:spPr>
+        <p:txBody>
+          <a:bodyPr wrap="square" rtlCol="0" anchor="ctr"/>
+          <a:lstStyle/>
+          <a:p>
+            <a:pPr indent="0" marL="0">
+              <a:buNone/>
+            </a:pPr>
+            <a:r>
+              <a:rPr lang="en-US" sz="1200" dirty="0">
+                <a:solidFill>
+                  <a:srgbClr val="2A2A2A"/>
+                </a:solidFill>
+                <a:latin typeface="Calibri" pitchFamily="34" charset="0"/>
+                <a:ea typeface="Calibri" pitchFamily="34" charset="-122"/>
+                <a:cs typeface="Calibri" pitchFamily="34" charset="-120"/>
+              </a:rPr>
+              <a:t>Respecting others' roles within the team</a:t>
             </a:r>
             <a:endParaRPr lang="en-US" sz="1200" dirty="0"/>
           </a:p>
@@ -2409,846 +2941,7 @@
       </p:sp>
       <p:sp>
         <p:nvSpPr>
-          <p:cNvPr id="9" name="Text 6"/>
-          <p:cNvSpPr/>
-          <p:nvPr/>
-        </p:nvSpPr>
-        <p:spPr>
-          <a:xfrm>
-            <a:off x="8275320" y="1161288"/>
-            <a:ext cx="3291840" cy="676656"/>
-          </a:xfrm>
-          <a:prstGeom prst="rect">
-            <a:avLst/>
-          </a:prstGeom>
-          <a:noFill/>
-          <a:ln/>
-        </p:spPr>
-        <p:txBody>
-          <a:bodyPr wrap="square" rtlCol="0" anchor="ctr"/>
-          <a:lstStyle/>
-          <a:p>
-            <a:pPr indent="0" marL="0">
-              <a:buNone/>
-            </a:pPr>
-            <a:r>
-              <a:rPr lang="en-US" sz="1100" dirty="0">
-                <a:solidFill>
-                  <a:srgbClr val="2A2A2A"/>
-                </a:solidFill>
-                <a:latin typeface="Calibri" pitchFamily="34" charset="0"/>
-                <a:ea typeface="Calibri" pitchFamily="34" charset="-122"/>
-                <a:cs typeface="Calibri" pitchFamily="34" charset="-120"/>
-              </a:rPr>
-              <a:t>Agreed rules or procedures for an activity</a:t>
-            </a:r>
-            <a:endParaRPr lang="en-US" sz="1100" dirty="0"/>
-          </a:p>
-        </p:txBody>
-      </p:sp>
-      <p:sp>
-        <p:nvSpPr>
-          <p:cNvPr id="10" name="Shape 7"/>
-          <p:cNvSpPr/>
-          <p:nvPr/>
-        </p:nvSpPr>
-        <p:spPr>
-          <a:xfrm>
-            <a:off x="548640" y="1947672"/>
-            <a:ext cx="5440680" cy="676656"/>
-          </a:xfrm>
-          <a:prstGeom prst="roundRect">
-            <a:avLst>
-              <a:gd name="adj" fmla="val 6757"/>
-            </a:avLst>
-          </a:prstGeom>
-          <a:solidFill>
-            <a:srgbClr val="F7F9FC"/>
-          </a:solidFill>
-          <a:ln/>
-        </p:spPr>
-      </p:sp>
-      <p:sp>
-        <p:nvSpPr>
-          <p:cNvPr id="11" name="Text 8"/>
-          <p:cNvSpPr/>
-          <p:nvPr/>
-        </p:nvSpPr>
-        <p:spPr>
-          <a:xfrm>
-            <a:off x="685800" y="1947672"/>
-            <a:ext cx="1828800" cy="676656"/>
-          </a:xfrm>
-          <a:prstGeom prst="rect">
-            <a:avLst/>
-          </a:prstGeom>
-          <a:noFill/>
-          <a:ln/>
-        </p:spPr>
-        <p:txBody>
-          <a:bodyPr wrap="square" rtlCol="0" anchor="ctr"/>
-          <a:lstStyle/>
-          <a:p>
-            <a:pPr indent="0" marL="0">
-              <a:buNone/>
-            </a:pPr>
-            <a:r>
-              <a:rPr lang="en-US" sz="1200" b="1" dirty="0">
-                <a:solidFill>
-                  <a:srgbClr val="122952"/>
-                </a:solidFill>
-                <a:latin typeface="Calibri" pitchFamily="34" charset="0"/>
-                <a:ea typeface="Calibri" pitchFamily="34" charset="-122"/>
-                <a:cs typeface="Calibri" pitchFamily="34" charset="-120"/>
-              </a:rPr>
-              <a:t>Resilience</a:t>
-            </a:r>
-            <a:endParaRPr lang="en-US" sz="1200" dirty="0"/>
-          </a:p>
-        </p:txBody>
-      </p:sp>
-      <p:sp>
-        <p:nvSpPr>
-          <p:cNvPr id="12" name="Text 9"/>
-          <p:cNvSpPr/>
-          <p:nvPr/>
-        </p:nvSpPr>
-        <p:spPr>
-          <a:xfrm>
-            <a:off x="2560320" y="1947672"/>
-            <a:ext cx="3291840" cy="676656"/>
-          </a:xfrm>
-          <a:prstGeom prst="rect">
-            <a:avLst/>
-          </a:prstGeom>
-          <a:noFill/>
-          <a:ln/>
-        </p:spPr>
-        <p:txBody>
-          <a:bodyPr wrap="square" rtlCol="0" anchor="ctr"/>
-          <a:lstStyle/>
-          <a:p>
-            <a:pPr indent="0" marL="0">
-              <a:buNone/>
-            </a:pPr>
-            <a:r>
-              <a:rPr lang="en-US" sz="1100" dirty="0">
-                <a:solidFill>
-                  <a:srgbClr val="2A2A2A"/>
-                </a:solidFill>
-                <a:latin typeface="Calibri" pitchFamily="34" charset="0"/>
-                <a:ea typeface="Calibri" pitchFamily="34" charset="-122"/>
-                <a:cs typeface="Calibri" pitchFamily="34" charset="-120"/>
-              </a:rPr>
-              <a:t>Ability to keep going and recover from setbacks</a:t>
-            </a:r>
-            <a:endParaRPr lang="en-US" sz="1100" dirty="0"/>
-          </a:p>
-        </p:txBody>
-      </p:sp>
-      <p:sp>
-        <p:nvSpPr>
-          <p:cNvPr id="13" name="Shape 10"/>
-          <p:cNvSpPr/>
-          <p:nvPr/>
-        </p:nvSpPr>
-        <p:spPr>
-          <a:xfrm>
-            <a:off x="6263640" y="1947672"/>
-            <a:ext cx="5440680" cy="676656"/>
-          </a:xfrm>
-          <a:prstGeom prst="roundRect">
-            <a:avLst>
-              <a:gd name="adj" fmla="val 6757"/>
-            </a:avLst>
-          </a:prstGeom>
-          <a:solidFill>
-            <a:srgbClr val="F7F9FC"/>
-          </a:solidFill>
-          <a:ln/>
-        </p:spPr>
-      </p:sp>
-      <p:sp>
-        <p:nvSpPr>
-          <p:cNvPr id="14" name="Text 11"/>
-          <p:cNvSpPr/>
-          <p:nvPr/>
-        </p:nvSpPr>
-        <p:spPr>
-          <a:xfrm>
-            <a:off x="6400800" y="1947672"/>
-            <a:ext cx="1828800" cy="676656"/>
-          </a:xfrm>
-          <a:prstGeom prst="rect">
-            <a:avLst/>
-          </a:prstGeom>
-          <a:noFill/>
-          <a:ln/>
-        </p:spPr>
-        <p:txBody>
-          <a:bodyPr wrap="square" rtlCol="0" anchor="ctr"/>
-          <a:lstStyle/>
-          <a:p>
-            <a:pPr indent="0" marL="0">
-              <a:buNone/>
-            </a:pPr>
-            <a:r>
-              <a:rPr lang="en-US" sz="1200" b="1" dirty="0">
-                <a:solidFill>
-                  <a:srgbClr val="122952"/>
-                </a:solidFill>
-                <a:latin typeface="Calibri" pitchFamily="34" charset="0"/>
-                <a:ea typeface="Calibri" pitchFamily="34" charset="-122"/>
-                <a:cs typeface="Calibri" pitchFamily="34" charset="-120"/>
-              </a:rPr>
-              <a:t>Perseverance</a:t>
-            </a:r>
-            <a:endParaRPr lang="en-US" sz="1200" dirty="0"/>
-          </a:p>
-        </p:txBody>
-      </p:sp>
-      <p:sp>
-        <p:nvSpPr>
-          <p:cNvPr id="15" name="Text 12"/>
-          <p:cNvSpPr/>
-          <p:nvPr/>
-        </p:nvSpPr>
-        <p:spPr>
-          <a:xfrm>
-            <a:off x="8275320" y="1947672"/>
-            <a:ext cx="3291840" cy="676656"/>
-          </a:xfrm>
-          <a:prstGeom prst="rect">
-            <a:avLst/>
-          </a:prstGeom>
-          <a:noFill/>
-          <a:ln/>
-        </p:spPr>
-        <p:txBody>
-          <a:bodyPr wrap="square" rtlCol="0" anchor="ctr"/>
-          <a:lstStyle/>
-          <a:p>
-            <a:pPr indent="0" marL="0">
-              <a:buNone/>
-            </a:pPr>
-            <a:r>
-              <a:rPr lang="en-US" sz="1100" dirty="0">
-                <a:solidFill>
-                  <a:srgbClr val="2A2A2A"/>
-                </a:solidFill>
-                <a:latin typeface="Calibri" pitchFamily="34" charset="0"/>
-                <a:ea typeface="Calibri" pitchFamily="34" charset="-122"/>
-                <a:cs typeface="Calibri" pitchFamily="34" charset="-120"/>
-              </a:rPr>
-              <a:t>Continuing to try even when it's difficult</a:t>
-            </a:r>
-            <a:endParaRPr lang="en-US" sz="1100" dirty="0"/>
-          </a:p>
-        </p:txBody>
-      </p:sp>
-      <p:sp>
-        <p:nvSpPr>
-          <p:cNvPr id="16" name="Shape 13"/>
-          <p:cNvSpPr/>
-          <p:nvPr/>
-        </p:nvSpPr>
-        <p:spPr>
-          <a:xfrm>
-            <a:off x="548640" y="2734056"/>
-            <a:ext cx="5440680" cy="676656"/>
-          </a:xfrm>
-          <a:prstGeom prst="roundRect">
-            <a:avLst>
-              <a:gd name="adj" fmla="val 6757"/>
-            </a:avLst>
-          </a:prstGeom>
-          <a:solidFill>
-            <a:srgbClr val="E8EEF7"/>
-          </a:solidFill>
-          <a:ln/>
-        </p:spPr>
-      </p:sp>
-      <p:sp>
-        <p:nvSpPr>
-          <p:cNvPr id="17" name="Text 14"/>
-          <p:cNvSpPr/>
-          <p:nvPr/>
-        </p:nvSpPr>
-        <p:spPr>
-          <a:xfrm>
-            <a:off x="685800" y="2734056"/>
-            <a:ext cx="1828800" cy="676656"/>
-          </a:xfrm>
-          <a:prstGeom prst="rect">
-            <a:avLst/>
-          </a:prstGeom>
-          <a:noFill/>
-          <a:ln/>
-        </p:spPr>
-        <p:txBody>
-          <a:bodyPr wrap="square" rtlCol="0" anchor="ctr"/>
-          <a:lstStyle/>
-          <a:p>
-            <a:pPr indent="0" marL="0">
-              <a:buNone/>
-            </a:pPr>
-            <a:r>
-              <a:rPr lang="en-US" sz="1200" b="1" dirty="0">
-                <a:solidFill>
-                  <a:srgbClr val="122952"/>
-                </a:solidFill>
-                <a:latin typeface="Calibri" pitchFamily="34" charset="0"/>
-                <a:ea typeface="Calibri" pitchFamily="34" charset="-122"/>
-                <a:cs typeface="Calibri" pitchFamily="34" charset="-120"/>
-              </a:rPr>
-              <a:t>Non-verbal communication</a:t>
-            </a:r>
-            <a:endParaRPr lang="en-US" sz="1200" dirty="0"/>
-          </a:p>
-        </p:txBody>
-      </p:sp>
-      <p:sp>
-        <p:nvSpPr>
-          <p:cNvPr id="18" name="Text 15"/>
-          <p:cNvSpPr/>
-          <p:nvPr/>
-        </p:nvSpPr>
-        <p:spPr>
-          <a:xfrm>
-            <a:off x="2560320" y="2734056"/>
-            <a:ext cx="3291840" cy="676656"/>
-          </a:xfrm>
-          <a:prstGeom prst="rect">
-            <a:avLst/>
-          </a:prstGeom>
-          <a:noFill/>
-          <a:ln/>
-        </p:spPr>
-        <p:txBody>
-          <a:bodyPr wrap="square" rtlCol="0" anchor="ctr"/>
-          <a:lstStyle/>
-          <a:p>
-            <a:pPr indent="0" marL="0">
-              <a:buNone/>
-            </a:pPr>
-            <a:r>
-              <a:rPr lang="en-US" sz="1100" dirty="0">
-                <a:solidFill>
-                  <a:srgbClr val="2A2A2A"/>
-                </a:solidFill>
-                <a:latin typeface="Calibri" pitchFamily="34" charset="0"/>
-                <a:ea typeface="Calibri" pitchFamily="34" charset="-122"/>
-                <a:cs typeface="Calibri" pitchFamily="34" charset="-120"/>
-              </a:rPr>
-              <a:t>Communicating without words</a:t>
-            </a:r>
-            <a:endParaRPr lang="en-US" sz="1100" dirty="0"/>
-          </a:p>
-        </p:txBody>
-      </p:sp>
-      <p:sp>
-        <p:nvSpPr>
-          <p:cNvPr id="19" name="Shape 16"/>
-          <p:cNvSpPr/>
-          <p:nvPr/>
-        </p:nvSpPr>
-        <p:spPr>
-          <a:xfrm>
-            <a:off x="6263640" y="2734056"/>
-            <a:ext cx="5440680" cy="676656"/>
-          </a:xfrm>
-          <a:prstGeom prst="roundRect">
-            <a:avLst>
-              <a:gd name="adj" fmla="val 6757"/>
-            </a:avLst>
-          </a:prstGeom>
-          <a:solidFill>
-            <a:srgbClr val="E8EEF7"/>
-          </a:solidFill>
-          <a:ln/>
-        </p:spPr>
-      </p:sp>
-      <p:sp>
-        <p:nvSpPr>
-          <p:cNvPr id="20" name="Text 17"/>
-          <p:cNvSpPr/>
-          <p:nvPr/>
-        </p:nvSpPr>
-        <p:spPr>
-          <a:xfrm>
-            <a:off x="6400800" y="2734056"/>
-            <a:ext cx="1828800" cy="676656"/>
-          </a:xfrm>
-          <a:prstGeom prst="rect">
-            <a:avLst/>
-          </a:prstGeom>
-          <a:noFill/>
-          <a:ln/>
-        </p:spPr>
-        <p:txBody>
-          <a:bodyPr wrap="square" rtlCol="0" anchor="ctr"/>
-          <a:lstStyle/>
-          <a:p>
-            <a:pPr indent="0" marL="0">
-              <a:buNone/>
-            </a:pPr>
-            <a:r>
-              <a:rPr lang="en-US" sz="1200" b="1" dirty="0">
-                <a:solidFill>
-                  <a:srgbClr val="122952"/>
-                </a:solidFill>
-                <a:latin typeface="Calibri" pitchFamily="34" charset="0"/>
-                <a:ea typeface="Calibri" pitchFamily="34" charset="-122"/>
-                <a:cs typeface="Calibri" pitchFamily="34" charset="-120"/>
-              </a:rPr>
-              <a:t>Personal conduct</a:t>
-            </a:r>
-            <a:endParaRPr lang="en-US" sz="1200" dirty="0"/>
-          </a:p>
-        </p:txBody>
-      </p:sp>
-      <p:sp>
-        <p:nvSpPr>
-          <p:cNvPr id="21" name="Text 18"/>
-          <p:cNvSpPr/>
-          <p:nvPr/>
-        </p:nvSpPr>
-        <p:spPr>
-          <a:xfrm>
-            <a:off x="8275320" y="2734056"/>
-            <a:ext cx="3291840" cy="676656"/>
-          </a:xfrm>
-          <a:prstGeom prst="rect">
-            <a:avLst/>
-          </a:prstGeom>
-          <a:noFill/>
-          <a:ln/>
-        </p:spPr>
-        <p:txBody>
-          <a:bodyPr wrap="square" rtlCol="0" anchor="ctr"/>
-          <a:lstStyle/>
-          <a:p>
-            <a:pPr indent="0" marL="0">
-              <a:buNone/>
-            </a:pPr>
-            <a:r>
-              <a:rPr lang="en-US" sz="1100" dirty="0">
-                <a:solidFill>
-                  <a:srgbClr val="2A2A2A"/>
-                </a:solidFill>
-                <a:latin typeface="Calibri" pitchFamily="34" charset="0"/>
-                <a:ea typeface="Calibri" pitchFamily="34" charset="-122"/>
-                <a:cs typeface="Calibri" pitchFamily="34" charset="-120"/>
-              </a:rPr>
-              <a:t>How a person behaves during an activity</a:t>
-            </a:r>
-            <a:endParaRPr lang="en-US" sz="1100" dirty="0"/>
-          </a:p>
-        </p:txBody>
-      </p:sp>
-      <p:sp>
-        <p:nvSpPr>
-          <p:cNvPr id="22" name="Shape 19"/>
-          <p:cNvSpPr/>
-          <p:nvPr/>
-        </p:nvSpPr>
-        <p:spPr>
-          <a:xfrm>
-            <a:off x="548640" y="3520440"/>
-            <a:ext cx="5440680" cy="676656"/>
-          </a:xfrm>
-          <a:prstGeom prst="roundRect">
-            <a:avLst>
-              <a:gd name="adj" fmla="val 6757"/>
-            </a:avLst>
-          </a:prstGeom>
-          <a:solidFill>
-            <a:srgbClr val="F7F9FC"/>
-          </a:solidFill>
-          <a:ln/>
-        </p:spPr>
-      </p:sp>
-      <p:sp>
-        <p:nvSpPr>
-          <p:cNvPr id="23" name="Text 20"/>
-          <p:cNvSpPr/>
-          <p:nvPr/>
-        </p:nvSpPr>
-        <p:spPr>
-          <a:xfrm>
-            <a:off x="685800" y="3520440"/>
-            <a:ext cx="1828800" cy="676656"/>
-          </a:xfrm>
-          <a:prstGeom prst="rect">
-            <a:avLst/>
-          </a:prstGeom>
-          <a:noFill/>
-          <a:ln/>
-        </p:spPr>
-        <p:txBody>
-          <a:bodyPr wrap="square" rtlCol="0" anchor="ctr"/>
-          <a:lstStyle/>
-          <a:p>
-            <a:pPr indent="0" marL="0">
-              <a:buNone/>
-            </a:pPr>
-            <a:r>
-              <a:rPr lang="en-US" sz="1200" b="1" dirty="0">
-                <a:solidFill>
-                  <a:srgbClr val="122952"/>
-                </a:solidFill>
-                <a:latin typeface="Calibri" pitchFamily="34" charset="0"/>
-                <a:ea typeface="Calibri" pitchFamily="34" charset="-122"/>
-                <a:cs typeface="Calibri" pitchFamily="34" charset="-120"/>
-              </a:rPr>
-              <a:t>Staff morale</a:t>
-            </a:r>
-            <a:endParaRPr lang="en-US" sz="1200" dirty="0"/>
-          </a:p>
-        </p:txBody>
-      </p:sp>
-      <p:sp>
-        <p:nvSpPr>
-          <p:cNvPr id="24" name="Text 21"/>
-          <p:cNvSpPr/>
-          <p:nvPr/>
-        </p:nvSpPr>
-        <p:spPr>
-          <a:xfrm>
-            <a:off x="2560320" y="3520440"/>
-            <a:ext cx="3291840" cy="676656"/>
-          </a:xfrm>
-          <a:prstGeom prst="rect">
-            <a:avLst/>
-          </a:prstGeom>
-          <a:noFill/>
-          <a:ln/>
-        </p:spPr>
-        <p:txBody>
-          <a:bodyPr wrap="square" rtlCol="0" anchor="ctr"/>
-          <a:lstStyle/>
-          <a:p>
-            <a:pPr indent="0" marL="0">
-              <a:buNone/>
-            </a:pPr>
-            <a:r>
-              <a:rPr lang="en-US" sz="1100" dirty="0">
-                <a:solidFill>
-                  <a:srgbClr val="2A2A2A"/>
-                </a:solidFill>
-                <a:latin typeface="Calibri" pitchFamily="34" charset="0"/>
-                <a:ea typeface="Calibri" pitchFamily="34" charset="-122"/>
-                <a:cs typeface="Calibri" pitchFamily="34" charset="-120"/>
-              </a:rPr>
-              <a:t>How motivated and positive employees feel</a:t>
-            </a:r>
-            <a:endParaRPr lang="en-US" sz="1100" dirty="0"/>
-          </a:p>
-        </p:txBody>
-      </p:sp>
-      <p:sp>
-        <p:nvSpPr>
-          <p:cNvPr id="25" name="Shape 22"/>
-          <p:cNvSpPr/>
-          <p:nvPr/>
-        </p:nvSpPr>
-        <p:spPr>
-          <a:xfrm>
-            <a:off x="6263640" y="3520440"/>
-            <a:ext cx="5440680" cy="676656"/>
-          </a:xfrm>
-          <a:prstGeom prst="roundRect">
-            <a:avLst>
-              <a:gd name="adj" fmla="val 6757"/>
-            </a:avLst>
-          </a:prstGeom>
-          <a:solidFill>
-            <a:srgbClr val="F7F9FC"/>
-          </a:solidFill>
-          <a:ln/>
-        </p:spPr>
-      </p:sp>
-      <p:sp>
-        <p:nvSpPr>
-          <p:cNvPr id="26" name="Text 23"/>
-          <p:cNvSpPr/>
-          <p:nvPr/>
-        </p:nvSpPr>
-        <p:spPr>
-          <a:xfrm>
-            <a:off x="6400800" y="3520440"/>
-            <a:ext cx="1828800" cy="676656"/>
-          </a:xfrm>
-          <a:prstGeom prst="rect">
-            <a:avLst/>
-          </a:prstGeom>
-          <a:noFill/>
-          <a:ln/>
-        </p:spPr>
-        <p:txBody>
-          <a:bodyPr wrap="square" rtlCol="0" anchor="ctr"/>
-          <a:lstStyle/>
-          <a:p>
-            <a:pPr indent="0" marL="0">
-              <a:buNone/>
-            </a:pPr>
-            <a:r>
-              <a:rPr lang="en-US" sz="1200" b="1" dirty="0">
-                <a:solidFill>
-                  <a:srgbClr val="122952"/>
-                </a:solidFill>
-                <a:latin typeface="Calibri" pitchFamily="34" charset="0"/>
-                <a:ea typeface="Calibri" pitchFamily="34" charset="-122"/>
-                <a:cs typeface="Calibri" pitchFamily="34" charset="-120"/>
-              </a:rPr>
-              <a:t>Skill acquisition</a:t>
-            </a:r>
-            <a:endParaRPr lang="en-US" sz="1200" dirty="0"/>
-          </a:p>
-        </p:txBody>
-      </p:sp>
-      <p:sp>
-        <p:nvSpPr>
-          <p:cNvPr id="27" name="Text 24"/>
-          <p:cNvSpPr/>
-          <p:nvPr/>
-        </p:nvSpPr>
-        <p:spPr>
-          <a:xfrm>
-            <a:off x="8275320" y="3520440"/>
-            <a:ext cx="3291840" cy="676656"/>
-          </a:xfrm>
-          <a:prstGeom prst="rect">
-            <a:avLst/>
-          </a:prstGeom>
-          <a:noFill/>
-          <a:ln/>
-        </p:spPr>
-        <p:txBody>
-          <a:bodyPr wrap="square" rtlCol="0" anchor="ctr"/>
-          <a:lstStyle/>
-          <a:p>
-            <a:pPr indent="0" marL="0">
-              <a:buNone/>
-            </a:pPr>
-            <a:r>
-              <a:rPr lang="en-US" sz="1100" dirty="0">
-                <a:solidFill>
-                  <a:srgbClr val="2A2A2A"/>
-                </a:solidFill>
-                <a:latin typeface="Calibri" pitchFamily="34" charset="0"/>
-                <a:ea typeface="Calibri" pitchFamily="34" charset="-122"/>
-                <a:cs typeface="Calibri" pitchFamily="34" charset="-120"/>
-              </a:rPr>
-              <a:t>Learning and improving a new skill</a:t>
-            </a:r>
-            <a:endParaRPr lang="en-US" sz="1100" dirty="0"/>
-          </a:p>
-        </p:txBody>
-      </p:sp>
-      <p:sp>
-        <p:nvSpPr>
-          <p:cNvPr id="28" name="Shape 25"/>
-          <p:cNvSpPr/>
-          <p:nvPr/>
-        </p:nvSpPr>
-        <p:spPr>
-          <a:xfrm>
-            <a:off x="548640" y="4306824"/>
-            <a:ext cx="5440680" cy="676656"/>
-          </a:xfrm>
-          <a:prstGeom prst="roundRect">
-            <a:avLst>
-              <a:gd name="adj" fmla="val 6757"/>
-            </a:avLst>
-          </a:prstGeom>
-          <a:solidFill>
-            <a:srgbClr val="E8EEF7"/>
-          </a:solidFill>
-          <a:ln/>
-        </p:spPr>
-      </p:sp>
-      <p:sp>
-        <p:nvSpPr>
-          <p:cNvPr id="29" name="Text 26"/>
-          <p:cNvSpPr/>
-          <p:nvPr/>
-        </p:nvSpPr>
-        <p:spPr>
-          <a:xfrm>
-            <a:off x="685800" y="4306824"/>
-            <a:ext cx="1828800" cy="676656"/>
-          </a:xfrm>
-          <a:prstGeom prst="rect">
-            <a:avLst/>
-          </a:prstGeom>
-          <a:noFill/>
-          <a:ln/>
-        </p:spPr>
-        <p:txBody>
-          <a:bodyPr wrap="square" rtlCol="0" anchor="ctr"/>
-          <a:lstStyle/>
-          <a:p>
-            <a:pPr indent="0" marL="0">
-              <a:buNone/>
-            </a:pPr>
-            <a:r>
-              <a:rPr lang="en-US" sz="1200" b="1" dirty="0">
-                <a:solidFill>
-                  <a:srgbClr val="122952"/>
-                </a:solidFill>
-                <a:latin typeface="Calibri" pitchFamily="34" charset="0"/>
-                <a:ea typeface="Calibri" pitchFamily="34" charset="-122"/>
-                <a:cs typeface="Calibri" pitchFamily="34" charset="-120"/>
-              </a:rPr>
-              <a:t>Adaptability</a:t>
-            </a:r>
-            <a:endParaRPr lang="en-US" sz="1200" dirty="0"/>
-          </a:p>
-        </p:txBody>
-      </p:sp>
-      <p:sp>
-        <p:nvSpPr>
-          <p:cNvPr id="30" name="Text 27"/>
-          <p:cNvSpPr/>
-          <p:nvPr/>
-        </p:nvSpPr>
-        <p:spPr>
-          <a:xfrm>
-            <a:off x="2560320" y="4306824"/>
-            <a:ext cx="3291840" cy="676656"/>
-          </a:xfrm>
-          <a:prstGeom prst="rect">
-            <a:avLst/>
-          </a:prstGeom>
-          <a:noFill/>
-          <a:ln/>
-        </p:spPr>
-        <p:txBody>
-          <a:bodyPr wrap="square" rtlCol="0" anchor="ctr"/>
-          <a:lstStyle/>
-          <a:p>
-            <a:pPr indent="0" marL="0">
-              <a:buNone/>
-            </a:pPr>
-            <a:r>
-              <a:rPr lang="en-US" sz="1100" dirty="0">
-                <a:solidFill>
-                  <a:srgbClr val="2A2A2A"/>
-                </a:solidFill>
-                <a:latin typeface="Calibri" pitchFamily="34" charset="0"/>
-                <a:ea typeface="Calibri" pitchFamily="34" charset="-122"/>
-                <a:cs typeface="Calibri" pitchFamily="34" charset="-120"/>
-              </a:rPr>
-              <a:t>Changing your approach to suit new conditions</a:t>
-            </a:r>
-            <a:endParaRPr lang="en-US" sz="1100" dirty="0"/>
-          </a:p>
-        </p:txBody>
-      </p:sp>
-      <p:sp>
-        <p:nvSpPr>
-          <p:cNvPr id="31" name="Shape 28"/>
-          <p:cNvSpPr/>
-          <p:nvPr/>
-        </p:nvSpPr>
-        <p:spPr>
-          <a:xfrm>
-            <a:off x="6263640" y="4306824"/>
-            <a:ext cx="5440680" cy="676656"/>
-          </a:xfrm>
-          <a:prstGeom prst="roundRect">
-            <a:avLst>
-              <a:gd name="adj" fmla="val 6757"/>
-            </a:avLst>
-          </a:prstGeom>
-          <a:solidFill>
-            <a:srgbClr val="E8EEF7"/>
-          </a:solidFill>
-          <a:ln/>
-        </p:spPr>
-      </p:sp>
-      <p:sp>
-        <p:nvSpPr>
-          <p:cNvPr id="32" name="Text 29"/>
-          <p:cNvSpPr/>
-          <p:nvPr/>
-        </p:nvSpPr>
-        <p:spPr>
-          <a:xfrm>
-            <a:off x="6400800" y="4306824"/>
-            <a:ext cx="1828800" cy="676656"/>
-          </a:xfrm>
-          <a:prstGeom prst="rect">
-            <a:avLst/>
-          </a:prstGeom>
-          <a:noFill/>
-          <a:ln/>
-        </p:spPr>
-        <p:txBody>
-          <a:bodyPr wrap="square" rtlCol="0" anchor="ctr"/>
-          <a:lstStyle/>
-          <a:p>
-            <a:pPr indent="0" marL="0">
-              <a:buNone/>
-            </a:pPr>
-            <a:r>
-              <a:rPr lang="en-US" sz="1200" b="1" dirty="0">
-                <a:solidFill>
-                  <a:srgbClr val="122952"/>
-                </a:solidFill>
-                <a:latin typeface="Calibri" pitchFamily="34" charset="0"/>
-                <a:ea typeface="Calibri" pitchFamily="34" charset="-122"/>
-                <a:cs typeface="Calibri" pitchFamily="34" charset="-120"/>
-              </a:rPr>
-              <a:t>Participant needs</a:t>
-            </a:r>
-            <a:endParaRPr lang="en-US" sz="1200" dirty="0"/>
-          </a:p>
-        </p:txBody>
-      </p:sp>
-      <p:sp>
-        <p:nvSpPr>
-          <p:cNvPr id="33" name="Text 30"/>
-          <p:cNvSpPr/>
-          <p:nvPr/>
-        </p:nvSpPr>
-        <p:spPr>
-          <a:xfrm>
-            <a:off x="8275320" y="4306824"/>
-            <a:ext cx="3291840" cy="676656"/>
-          </a:xfrm>
-          <a:prstGeom prst="rect">
-            <a:avLst/>
-          </a:prstGeom>
-          <a:noFill/>
-          <a:ln/>
-        </p:spPr>
-        <p:txBody>
-          <a:bodyPr wrap="square" rtlCol="0" anchor="ctr"/>
-          <a:lstStyle/>
-          <a:p>
-            <a:pPr indent="0" marL="0">
-              <a:buNone/>
-            </a:pPr>
-            <a:r>
-              <a:rPr lang="en-US" sz="1100" dirty="0">
-                <a:solidFill>
-                  <a:srgbClr val="2A2A2A"/>
-                </a:solidFill>
-                <a:latin typeface="Calibri" pitchFamily="34" charset="0"/>
-                <a:ea typeface="Calibri" pitchFamily="34" charset="-122"/>
-                <a:cs typeface="Calibri" pitchFamily="34" charset="-120"/>
-              </a:rPr>
-              <a:t>Individual requirements considered when planning</a:t>
-            </a:r>
-            <a:endParaRPr lang="en-US" sz="1100" dirty="0"/>
-          </a:p>
-        </p:txBody>
-      </p:sp>
-      <p:sp>
-        <p:nvSpPr>
-          <p:cNvPr id="34" name="Shape 31"/>
+          <p:cNvPr id="18" name="Shape 15"/>
           <p:cNvSpPr/>
           <p:nvPr/>
         </p:nvSpPr>
@@ -3268,7 +2961,7 @@
       </p:sp>
       <p:sp>
         <p:nvSpPr>
-          <p:cNvPr id="35" name="Text 32"/>
+          <p:cNvPr id="19" name="Text 16"/>
           <p:cNvSpPr/>
           <p:nvPr/>
         </p:nvSpPr>
@@ -3307,7 +3000,7 @@
       </p:sp>
       <p:sp>
         <p:nvSpPr>
-          <p:cNvPr id="36" name="Text 33"/>
+          <p:cNvPr id="20" name="Text 17"/>
           <p:cNvSpPr/>
           <p:nvPr/>
         </p:nvSpPr>
@@ -3338,7 +3031,7 @@
                 <a:ea typeface="Calibri" pitchFamily="34" charset="-122"/>
                 <a:cs typeface="Calibri" pitchFamily="34" charset="-120"/>
               </a:rPr>
-              <a:t>Revision Summary</a:t>
+              <a:t>Knowledge Hub 5 — Communication and Teamwork in Sport</a:t>
             </a:r>
             <a:endParaRPr lang="en-US" sz="1000" dirty="0"/>
           </a:p>
@@ -3355,6 +3048,1785 @@
 <file path=ppt/slides/slide11.xml><?xml version="1.0" encoding="utf-8"?>
 <p:sld xmlns:a="http://schemas.openxmlformats.org/drawingml/2006/main" xmlns:r="http://schemas.openxmlformats.org/officeDocument/2006/relationships" xmlns:p="http://schemas.openxmlformats.org/presentationml/2006/main">
   <p:cSld name="Slide 11">
+    <p:spTree>
+      <p:nvGrpSpPr>
+        <p:cNvPr id="1" name=""/>
+        <p:cNvGrpSpPr/>
+        <p:nvPr/>
+      </p:nvGrpSpPr>
+      <p:grpSpPr>
+        <a:xfrm>
+          <a:off x="0" y="0"/>
+          <a:ext cx="0" cy="0"/>
+          <a:chOff x="0" y="0"/>
+          <a:chExt cx="0" cy="0"/>
+        </a:xfrm>
+      </p:grpSpPr>
+      <p:pic>
+        <p:nvPicPr>
+          <p:cNvPr id="2" name="Image 0" descr="preencoded.png">    </p:cNvPr>
+          <p:cNvPicPr>
+            <a:picLocks noChangeAspect="1"/>
+          </p:cNvPicPr>
+          <p:nvPr/>
+        </p:nvPicPr>
+        <p:blipFill>
+          <a:blip r:embed="rId1"/>
+          <a:stretch>
+            <a:fillRect/>
+          </a:stretch>
+        </p:blipFill>
+        <p:spPr>
+          <a:xfrm>
+            <a:off x="11109960" y="228600"/>
+            <a:ext cx="777240" cy="548640"/>
+          </a:xfrm>
+          <a:prstGeom prst="rect">
+            <a:avLst/>
+          </a:prstGeom>
+        </p:spPr>
+      </p:pic>
+      <p:sp>
+        <p:nvSpPr>
+          <p:cNvPr id="3" name="Shape 0"/>
+          <p:cNvSpPr/>
+          <p:nvPr/>
+        </p:nvSpPr>
+        <p:spPr>
+          <a:xfrm>
+            <a:off x="548640" y="274320"/>
+            <a:ext cx="1645920" cy="384048"/>
+          </a:xfrm>
+          <a:prstGeom prst="roundRect">
+            <a:avLst>
+              <a:gd name="adj" fmla="val 19048"/>
+            </a:avLst>
+          </a:prstGeom>
+          <a:solidFill>
+            <a:srgbClr val="9333EA"/>
+          </a:solidFill>
+          <a:ln/>
+        </p:spPr>
+      </p:sp>
+      <p:sp>
+        <p:nvSpPr>
+          <p:cNvPr id="4" name="Text 1"/>
+          <p:cNvSpPr/>
+          <p:nvPr/>
+        </p:nvSpPr>
+        <p:spPr>
+          <a:xfrm>
+            <a:off x="548640" y="274320"/>
+            <a:ext cx="1645920" cy="384048"/>
+          </a:xfrm>
+          <a:prstGeom prst="rect">
+            <a:avLst/>
+          </a:prstGeom>
+          <a:noFill/>
+          <a:ln/>
+        </p:spPr>
+        <p:txBody>
+          <a:bodyPr wrap="square" lIns="0" tIns="0" rIns="0" bIns="0" rtlCol="0" anchor="ctr"/>
+          <a:lstStyle/>
+          <a:p>
+            <a:pPr algn="ctr" indent="0" marL="0">
+              <a:buNone/>
+            </a:pPr>
+            <a:r>
+              <a:rPr lang="en-US" sz="1100" b="1" dirty="0">
+                <a:solidFill>
+                  <a:srgbClr val="FFFFFF"/>
+                </a:solidFill>
+                <a:latin typeface="Calibri" pitchFamily="34" charset="0"/>
+                <a:ea typeface="Calibri" pitchFamily="34" charset="-122"/>
+                <a:cs typeface="Calibri" pitchFamily="34" charset="-120"/>
+              </a:rPr>
+              <a:t>SCENARIO</a:t>
+            </a:r>
+            <a:endParaRPr lang="en-US" sz="1100" dirty="0"/>
+          </a:p>
+        </p:txBody>
+      </p:sp>
+      <p:sp>
+        <p:nvSpPr>
+          <p:cNvPr id="5" name="Text 2"/>
+          <p:cNvSpPr/>
+          <p:nvPr/>
+        </p:nvSpPr>
+        <p:spPr>
+          <a:xfrm>
+            <a:off x="548640" y="822960"/>
+            <a:ext cx="8869680" cy="640080"/>
+          </a:xfrm>
+          <a:prstGeom prst="rect">
+            <a:avLst/>
+          </a:prstGeom>
+          <a:noFill/>
+          <a:ln/>
+        </p:spPr>
+        <p:txBody>
+          <a:bodyPr wrap="square" rtlCol="0" anchor="ctr"/>
+          <a:lstStyle/>
+          <a:p>
+            <a:pPr indent="0" marL="0">
+              <a:buNone/>
+            </a:pPr>
+            <a:r>
+              <a:rPr lang="en-US" sz="2300" b="1" dirty="0">
+                <a:solidFill>
+                  <a:srgbClr val="122952"/>
+                </a:solidFill>
+                <a:latin typeface="Calibri" pitchFamily="34" charset="0"/>
+                <a:ea typeface="Calibri" pitchFamily="34" charset="-122"/>
+                <a:cs typeface="Calibri" pitchFamily="34" charset="-120"/>
+              </a:rPr>
+              <a:t>Your Teammate Keeps Missing Instructions</a:t>
+            </a:r>
+            <a:endParaRPr lang="en-US" sz="2300" dirty="0"/>
+          </a:p>
+        </p:txBody>
+      </p:sp>
+      <p:sp>
+        <p:nvSpPr>
+          <p:cNvPr id="6" name="Shape 3"/>
+          <p:cNvSpPr/>
+          <p:nvPr/>
+        </p:nvSpPr>
+        <p:spPr>
+          <a:xfrm>
+            <a:off x="548640" y="1508760"/>
+            <a:ext cx="11064240" cy="1005840"/>
+          </a:xfrm>
+          <a:prstGeom prst="roundRect">
+            <a:avLst>
+              <a:gd name="adj" fmla="val 5455"/>
+            </a:avLst>
+          </a:prstGeom>
+          <a:solidFill>
+            <a:srgbClr val="E8EEF7"/>
+          </a:solidFill>
+          <a:ln/>
+        </p:spPr>
+      </p:sp>
+      <p:sp>
+        <p:nvSpPr>
+          <p:cNvPr id="7" name="Text 4"/>
+          <p:cNvSpPr/>
+          <p:nvPr/>
+        </p:nvSpPr>
+        <p:spPr>
+          <a:xfrm>
+            <a:off x="822960" y="1645920"/>
+            <a:ext cx="10515600" cy="731520"/>
+          </a:xfrm>
+          <a:prstGeom prst="rect">
+            <a:avLst/>
+          </a:prstGeom>
+          <a:noFill/>
+          <a:ln/>
+        </p:spPr>
+        <p:txBody>
+          <a:bodyPr wrap="square" rtlCol="0" anchor="ctr"/>
+          <a:lstStyle/>
+          <a:p>
+            <a:pPr indent="0" marL="0">
+              <a:buNone/>
+            </a:pPr>
+            <a:r>
+              <a:rPr lang="en-US" sz="1400" dirty="0">
+                <a:solidFill>
+                  <a:srgbClr val="2A2A2A"/>
+                </a:solidFill>
+                <a:latin typeface="Calibri" pitchFamily="34" charset="0"/>
+                <a:ea typeface="Calibri" pitchFamily="34" charset="-122"/>
+                <a:cs typeface="Calibri" pitchFamily="34" charset="-120"/>
+              </a:rPr>
+              <a:t>During a five-a-side match, one teammate keeps drifting out of position and missing your calls. The other team is starting to exploit the gap.</a:t>
+            </a:r>
+            <a:endParaRPr lang="en-US" sz="1400" dirty="0"/>
+          </a:p>
+        </p:txBody>
+      </p:sp>
+      <p:sp>
+        <p:nvSpPr>
+          <p:cNvPr id="8" name="Shape 5"/>
+          <p:cNvSpPr/>
+          <p:nvPr/>
+        </p:nvSpPr>
+        <p:spPr>
+          <a:xfrm>
+            <a:off x="548640" y="2743200"/>
+            <a:ext cx="11064240" cy="1188720"/>
+          </a:xfrm>
+          <a:prstGeom prst="roundRect">
+            <a:avLst>
+              <a:gd name="adj" fmla="val 4615"/>
+            </a:avLst>
+          </a:prstGeom>
+          <a:solidFill>
+            <a:srgbClr val="F7F9FC"/>
+          </a:solidFill>
+          <a:ln w="12700">
+            <a:solidFill>
+              <a:srgbClr val="8A9AAF"/>
+            </a:solidFill>
+            <a:prstDash val="solid"/>
+          </a:ln>
+        </p:spPr>
+      </p:sp>
+      <p:sp>
+        <p:nvSpPr>
+          <p:cNvPr id="9" name="Text 6"/>
+          <p:cNvSpPr/>
+          <p:nvPr/>
+        </p:nvSpPr>
+        <p:spPr>
+          <a:xfrm>
+            <a:off x="822960" y="2852928"/>
+            <a:ext cx="2377440" cy="960120"/>
+          </a:xfrm>
+          <a:prstGeom prst="rect">
+            <a:avLst/>
+          </a:prstGeom>
+          <a:noFill/>
+          <a:ln/>
+        </p:spPr>
+        <p:txBody>
+          <a:bodyPr wrap="square" rtlCol="0" anchor="ctr"/>
+          <a:lstStyle/>
+          <a:p>
+            <a:pPr indent="0" marL="0">
+              <a:buNone/>
+            </a:pPr>
+            <a:r>
+              <a:rPr lang="en-US" sz="1300" b="1" dirty="0">
+                <a:solidFill>
+                  <a:srgbClr val="5A6B85"/>
+                </a:solidFill>
+                <a:latin typeface="Calibri" pitchFamily="34" charset="0"/>
+                <a:ea typeface="Calibri" pitchFamily="34" charset="-122"/>
+                <a:cs typeface="Calibri" pitchFamily="34" charset="-120"/>
+              </a:rPr>
+              <a:t>Weaker response</a:t>
+            </a:r>
+            <a:endParaRPr lang="en-US" sz="1300" dirty="0"/>
+          </a:p>
+        </p:txBody>
+      </p:sp>
+      <p:sp>
+        <p:nvSpPr>
+          <p:cNvPr id="10" name="Text 7"/>
+          <p:cNvSpPr/>
+          <p:nvPr/>
+        </p:nvSpPr>
+        <p:spPr>
+          <a:xfrm>
+            <a:off x="3383280" y="2852928"/>
+            <a:ext cx="7955280" cy="960120"/>
+          </a:xfrm>
+          <a:prstGeom prst="rect">
+            <a:avLst/>
+          </a:prstGeom>
+          <a:noFill/>
+          <a:ln/>
+        </p:spPr>
+        <p:txBody>
+          <a:bodyPr wrap="square" rtlCol="0" anchor="ctr"/>
+          <a:lstStyle/>
+          <a:p>
+            <a:pPr indent="0" marL="0">
+              <a:buNone/>
+            </a:pPr>
+            <a:r>
+              <a:rPr lang="en-US" sz="1250" dirty="0">
+                <a:solidFill>
+                  <a:srgbClr val="2A2A2A"/>
+                </a:solidFill>
+                <a:latin typeface="Calibri" pitchFamily="34" charset="0"/>
+                <a:ea typeface="Calibri" pitchFamily="34" charset="-122"/>
+                <a:cs typeface="Calibri" pitchFamily="34" charset="-120"/>
+              </a:rPr>
+              <a:t>Get frustrated and stop passing to them, or shout angrily across the pitch.</a:t>
+            </a:r>
+            <a:endParaRPr lang="en-US" sz="1250" dirty="0"/>
+          </a:p>
+        </p:txBody>
+      </p:sp>
+      <p:sp>
+        <p:nvSpPr>
+          <p:cNvPr id="11" name="Shape 8"/>
+          <p:cNvSpPr/>
+          <p:nvPr/>
+        </p:nvSpPr>
+        <p:spPr>
+          <a:xfrm>
+            <a:off x="548640" y="4114800"/>
+            <a:ext cx="11064240" cy="1188720"/>
+          </a:xfrm>
+          <a:prstGeom prst="roundRect">
+            <a:avLst>
+              <a:gd name="adj" fmla="val 4615"/>
+            </a:avLst>
+          </a:prstGeom>
+          <a:solidFill>
+            <a:srgbClr val="F0FDF4"/>
+          </a:solidFill>
+          <a:ln w="12700">
+            <a:solidFill>
+              <a:srgbClr val="16A34A"/>
+            </a:solidFill>
+            <a:prstDash val="solid"/>
+          </a:ln>
+        </p:spPr>
+      </p:sp>
+      <p:sp>
+        <p:nvSpPr>
+          <p:cNvPr id="12" name="Text 9"/>
+          <p:cNvSpPr/>
+          <p:nvPr/>
+        </p:nvSpPr>
+        <p:spPr>
+          <a:xfrm>
+            <a:off x="822960" y="4224528"/>
+            <a:ext cx="2377440" cy="960120"/>
+          </a:xfrm>
+          <a:prstGeom prst="rect">
+            <a:avLst/>
+          </a:prstGeom>
+          <a:noFill/>
+          <a:ln/>
+        </p:spPr>
+        <p:txBody>
+          <a:bodyPr wrap="square" rtlCol="0" anchor="ctr"/>
+          <a:lstStyle/>
+          <a:p>
+            <a:pPr indent="0" marL="0">
+              <a:buNone/>
+            </a:pPr>
+            <a:r>
+              <a:rPr lang="en-US" sz="1300" b="1" dirty="0">
+                <a:solidFill>
+                  <a:srgbClr val="16A34A"/>
+                </a:solidFill>
+                <a:latin typeface="Calibri" pitchFamily="34" charset="0"/>
+                <a:ea typeface="Calibri" pitchFamily="34" charset="-122"/>
+                <a:cs typeface="Calibri" pitchFamily="34" charset="-120"/>
+              </a:rPr>
+              <a:t>Stronger response</a:t>
+            </a:r>
+            <a:endParaRPr lang="en-US" sz="1300" dirty="0"/>
+          </a:p>
+        </p:txBody>
+      </p:sp>
+      <p:sp>
+        <p:nvSpPr>
+          <p:cNvPr id="13" name="Text 10"/>
+          <p:cNvSpPr/>
+          <p:nvPr/>
+        </p:nvSpPr>
+        <p:spPr>
+          <a:xfrm>
+            <a:off x="3383280" y="4224528"/>
+            <a:ext cx="7955280" cy="960120"/>
+          </a:xfrm>
+          <a:prstGeom prst="rect">
+            <a:avLst/>
+          </a:prstGeom>
+          <a:noFill/>
+          <a:ln/>
+        </p:spPr>
+        <p:txBody>
+          <a:bodyPr wrap="square" rtlCol="0" anchor="ctr"/>
+          <a:lstStyle/>
+          <a:p>
+            <a:pPr indent="0" marL="0">
+              <a:buNone/>
+            </a:pPr>
+            <a:r>
+              <a:rPr lang="en-US" sz="1250" dirty="0">
+                <a:solidFill>
+                  <a:srgbClr val="2A2A2A"/>
+                </a:solidFill>
+                <a:latin typeface="Calibri" pitchFamily="34" charset="0"/>
+                <a:ea typeface="Calibri" pitchFamily="34" charset="-122"/>
+                <a:cs typeface="Calibri" pitchFamily="34" charset="-120"/>
+              </a:rPr>
+              <a:t>Call a quick word during a natural break: “Can you hold that left side? I'll call you when I need you to push up.” Clear, specific, no blame.</a:t>
+            </a:r>
+            <a:endParaRPr lang="en-US" sz="1250" dirty="0"/>
+          </a:p>
+        </p:txBody>
+      </p:sp>
+      <p:sp>
+        <p:nvSpPr>
+          <p:cNvPr id="14" name="Shape 11"/>
+          <p:cNvSpPr/>
+          <p:nvPr/>
+        </p:nvSpPr>
+        <p:spPr>
+          <a:xfrm>
+            <a:off x="548640" y="5532120"/>
+            <a:ext cx="11064240" cy="685800"/>
+          </a:xfrm>
+          <a:prstGeom prst="roundRect">
+            <a:avLst>
+              <a:gd name="adj" fmla="val 8000"/>
+            </a:avLst>
+          </a:prstGeom>
+          <a:solidFill>
+            <a:srgbClr val="F3E8FF"/>
+          </a:solidFill>
+          <a:ln/>
+        </p:spPr>
+      </p:sp>
+      <p:sp>
+        <p:nvSpPr>
+          <p:cNvPr id="15" name="Text 12"/>
+          <p:cNvSpPr/>
+          <p:nvPr/>
+        </p:nvSpPr>
+        <p:spPr>
+          <a:xfrm>
+            <a:off x="822960" y="5605272"/>
+            <a:ext cx="10515600" cy="502920"/>
+          </a:xfrm>
+          <a:prstGeom prst="rect">
+            <a:avLst/>
+          </a:prstGeom>
+          <a:noFill/>
+          <a:ln/>
+        </p:spPr>
+        <p:txBody>
+          <a:bodyPr wrap="square" rtlCol="0" anchor="ctr"/>
+          <a:lstStyle/>
+          <a:p>
+            <a:pPr indent="0" marL="0">
+              <a:buNone/>
+            </a:pPr>
+            <a:r>
+              <a:rPr lang="en-US" sz="1250" b="1" dirty="0">
+                <a:solidFill>
+                  <a:srgbClr val="9333EA"/>
+                </a:solidFill>
+                <a:latin typeface="Calibri" pitchFamily="34" charset="0"/>
+                <a:ea typeface="Calibri" pitchFamily="34" charset="-122"/>
+                <a:cs typeface="Calibri" pitchFamily="34" charset="-120"/>
+              </a:rPr>
+              <a:t>Why it matters:  </a:t>
+            </a:r>
+            <a:pPr indent="0" marL="0">
+              <a:buNone/>
+            </a:pPr>
+            <a:r>
+              <a:rPr lang="en-US" sz="1250" dirty="0">
+                <a:solidFill>
+                  <a:srgbClr val="2A2A2A"/>
+                </a:solidFill>
+                <a:latin typeface="Calibri" pitchFamily="34" charset="0"/>
+                <a:ea typeface="Calibri" pitchFamily="34" charset="-122"/>
+                <a:cs typeface="Calibri" pitchFamily="34" charset="-120"/>
+              </a:rPr>
+              <a:t>Non-verbal frustration doesn't fix anything — the assessor is looking for you to actively communicate and support a struggling teammate, which is exactly what B.D3 rewards.</a:t>
+            </a:r>
+            <a:endParaRPr lang="en-US" sz="1250" dirty="0"/>
+          </a:p>
+        </p:txBody>
+      </p:sp>
+      <p:sp>
+        <p:nvSpPr>
+          <p:cNvPr id="16" name="Shape 13"/>
+          <p:cNvSpPr/>
+          <p:nvPr/>
+        </p:nvSpPr>
+        <p:spPr>
+          <a:xfrm>
+            <a:off x="0" y="6537960"/>
+            <a:ext cx="12188952" cy="320040"/>
+          </a:xfrm>
+          <a:prstGeom prst="rect">
+            <a:avLst/>
+          </a:prstGeom>
+          <a:solidFill>
+            <a:srgbClr val="1B3A6B"/>
+          </a:solidFill>
+          <a:ln/>
+        </p:spPr>
+      </p:sp>
+      <p:sp>
+        <p:nvSpPr>
+          <p:cNvPr id="17" name="Text 14"/>
+          <p:cNvSpPr/>
+          <p:nvPr/>
+        </p:nvSpPr>
+        <p:spPr>
+          <a:xfrm>
+            <a:off x="274320" y="6537960"/>
+            <a:ext cx="3657600" cy="320040"/>
+          </a:xfrm>
+          <a:prstGeom prst="rect">
+            <a:avLst/>
+          </a:prstGeom>
+          <a:noFill/>
+          <a:ln/>
+        </p:spPr>
+        <p:txBody>
+          <a:bodyPr wrap="square" rtlCol="0" anchor="ctr"/>
+          <a:lstStyle/>
+          <a:p>
+            <a:pPr indent="0" marL="0">
+              <a:buNone/>
+            </a:pPr>
+            <a:r>
+              <a:rPr lang="en-US" sz="1000" dirty="0">
+                <a:solidFill>
+                  <a:srgbClr val="FFFFFF"/>
+                </a:solidFill>
+                <a:latin typeface="Calibri" pitchFamily="34" charset="0"/>
+                <a:ea typeface="Calibri" pitchFamily="34" charset="-122"/>
+                <a:cs typeface="Calibri" pitchFamily="34" charset="-120"/>
+              </a:rPr>
+              <a:t>PS12</a:t>
+            </a:r>
+            <a:endParaRPr lang="en-US" sz="1000" dirty="0"/>
+          </a:p>
+        </p:txBody>
+      </p:sp>
+      <p:sp>
+        <p:nvSpPr>
+          <p:cNvPr id="18" name="Text 15"/>
+          <p:cNvSpPr/>
+          <p:nvPr/>
+        </p:nvSpPr>
+        <p:spPr>
+          <a:xfrm>
+            <a:off x="7772400" y="6537960"/>
+            <a:ext cx="4114800" cy="320040"/>
+          </a:xfrm>
+          <a:prstGeom prst="rect">
+            <a:avLst/>
+          </a:prstGeom>
+          <a:noFill/>
+          <a:ln/>
+        </p:spPr>
+        <p:txBody>
+          <a:bodyPr wrap="square" rtlCol="0" anchor="ctr"/>
+          <a:lstStyle/>
+          <a:p>
+            <a:pPr algn="r" indent="0" marL="0">
+              <a:buNone/>
+            </a:pPr>
+            <a:r>
+              <a:rPr lang="en-US" sz="1000" dirty="0">
+                <a:solidFill>
+                  <a:srgbClr val="FFFFFF"/>
+                </a:solidFill>
+                <a:latin typeface="Calibri" pitchFamily="34" charset="0"/>
+                <a:ea typeface="Calibri" pitchFamily="34" charset="-122"/>
+                <a:cs typeface="Calibri" pitchFamily="34" charset="-120"/>
+              </a:rPr>
+              <a:t>Knowledge Hub 5 — Handling a Team Problem</a:t>
+            </a:r>
+            <a:endParaRPr lang="en-US" sz="1000" dirty="0"/>
+          </a:p>
+        </p:txBody>
+      </p:sp>
+    </p:spTree>
+  </p:cSld>
+  <p:clrMapOvr>
+    <a:masterClrMapping/>
+  </p:clrMapOvr>
+</p:sld>
+</file>
+
+<file path=ppt/slides/slide12.xml><?xml version="1.0" encoding="utf-8"?>
+<p:sld xmlns:a="http://schemas.openxmlformats.org/drawingml/2006/main" xmlns:r="http://schemas.openxmlformats.org/officeDocument/2006/relationships" xmlns:p="http://schemas.openxmlformats.org/presentationml/2006/main">
+  <p:cSld name="Slide 12">
+    <p:spTree>
+      <p:nvGrpSpPr>
+        <p:cNvPr id="1" name=""/>
+        <p:cNvGrpSpPr/>
+        <p:nvPr/>
+      </p:nvGrpSpPr>
+      <p:grpSpPr>
+        <a:xfrm>
+          <a:off x="0" y="0"/>
+          <a:ext cx="0" cy="0"/>
+          <a:chOff x="0" y="0"/>
+          <a:chExt cx="0" cy="0"/>
+        </a:xfrm>
+      </p:grpSpPr>
+      <p:pic>
+        <p:nvPicPr>
+          <p:cNvPr id="2" name="Image 0" descr="preencoded.png">    </p:cNvPr>
+          <p:cNvPicPr>
+            <a:picLocks noChangeAspect="1"/>
+          </p:cNvPicPr>
+          <p:nvPr/>
+        </p:nvPicPr>
+        <p:blipFill>
+          <a:blip r:embed="rId1"/>
+          <a:stretch>
+            <a:fillRect/>
+          </a:stretch>
+        </p:blipFill>
+        <p:spPr>
+          <a:xfrm>
+            <a:off x="11109960" y="228600"/>
+            <a:ext cx="777240" cy="548640"/>
+          </a:xfrm>
+          <a:prstGeom prst="rect">
+            <a:avLst/>
+          </a:prstGeom>
+        </p:spPr>
+      </p:pic>
+      <p:sp>
+        <p:nvSpPr>
+          <p:cNvPr id="3" name="Text 0"/>
+          <p:cNvSpPr/>
+          <p:nvPr/>
+        </p:nvSpPr>
+        <p:spPr>
+          <a:xfrm>
+            <a:off x="548640" y="320040"/>
+            <a:ext cx="8869680" cy="548640"/>
+          </a:xfrm>
+          <a:prstGeom prst="rect">
+            <a:avLst/>
+          </a:prstGeom>
+          <a:noFill/>
+          <a:ln/>
+        </p:spPr>
+        <p:txBody>
+          <a:bodyPr wrap="square" rtlCol="0" anchor="ctr"/>
+          <a:lstStyle/>
+          <a:p>
+            <a:pPr indent="0" marL="0">
+              <a:buNone/>
+            </a:pPr>
+            <a:r>
+              <a:rPr lang="en-US" sz="2800" b="1" dirty="0">
+                <a:solidFill>
+                  <a:srgbClr val="122952"/>
+                </a:solidFill>
+                <a:latin typeface="Calibri" pitchFamily="34" charset="0"/>
+                <a:ea typeface="Calibri" pitchFamily="34" charset="-122"/>
+                <a:cs typeface="Calibri" pitchFamily="34" charset="-120"/>
+              </a:rPr>
+              <a:t>Revision — Key Terms</a:t>
+            </a:r>
+            <a:endParaRPr lang="en-US" sz="2800" dirty="0"/>
+          </a:p>
+        </p:txBody>
+      </p:sp>
+      <p:sp>
+        <p:nvSpPr>
+          <p:cNvPr id="4" name="Shape 1"/>
+          <p:cNvSpPr/>
+          <p:nvPr/>
+        </p:nvSpPr>
+        <p:spPr>
+          <a:xfrm>
+            <a:off x="548640" y="1161288"/>
+            <a:ext cx="5440680" cy="676656"/>
+          </a:xfrm>
+          <a:prstGeom prst="roundRect">
+            <a:avLst>
+              <a:gd name="adj" fmla="val 6757"/>
+            </a:avLst>
+          </a:prstGeom>
+          <a:solidFill>
+            <a:srgbClr val="E8EEF7"/>
+          </a:solidFill>
+          <a:ln/>
+        </p:spPr>
+      </p:sp>
+      <p:sp>
+        <p:nvSpPr>
+          <p:cNvPr id="5" name="Text 2"/>
+          <p:cNvSpPr/>
+          <p:nvPr/>
+        </p:nvSpPr>
+        <p:spPr>
+          <a:xfrm>
+            <a:off x="685800" y="1161288"/>
+            <a:ext cx="1828800" cy="676656"/>
+          </a:xfrm>
+          <a:prstGeom prst="rect">
+            <a:avLst/>
+          </a:prstGeom>
+          <a:noFill/>
+          <a:ln/>
+        </p:spPr>
+        <p:txBody>
+          <a:bodyPr wrap="square" rtlCol="0" anchor="ctr"/>
+          <a:lstStyle/>
+          <a:p>
+            <a:pPr indent="0" marL="0">
+              <a:buNone/>
+            </a:pPr>
+            <a:r>
+              <a:rPr lang="en-US" sz="1200" b="1" dirty="0">
+                <a:solidFill>
+                  <a:srgbClr val="122952"/>
+                </a:solidFill>
+                <a:latin typeface="Calibri" pitchFamily="34" charset="0"/>
+                <a:ea typeface="Calibri" pitchFamily="34" charset="-122"/>
+                <a:cs typeface="Calibri" pitchFamily="34" charset="-120"/>
+              </a:rPr>
+              <a:t>Team cohesion</a:t>
+            </a:r>
+            <a:endParaRPr lang="en-US" sz="1200" dirty="0"/>
+          </a:p>
+        </p:txBody>
+      </p:sp>
+      <p:sp>
+        <p:nvSpPr>
+          <p:cNvPr id="6" name="Text 3"/>
+          <p:cNvSpPr/>
+          <p:nvPr/>
+        </p:nvSpPr>
+        <p:spPr>
+          <a:xfrm>
+            <a:off x="2560320" y="1161288"/>
+            <a:ext cx="3291840" cy="676656"/>
+          </a:xfrm>
+          <a:prstGeom prst="rect">
+            <a:avLst/>
+          </a:prstGeom>
+          <a:noFill/>
+          <a:ln/>
+        </p:spPr>
+        <p:txBody>
+          <a:bodyPr wrap="square" rtlCol="0" anchor="ctr"/>
+          <a:lstStyle/>
+          <a:p>
+            <a:pPr indent="0" marL="0">
+              <a:buNone/>
+            </a:pPr>
+            <a:r>
+              <a:rPr lang="en-US" sz="1100" dirty="0">
+                <a:solidFill>
+                  <a:srgbClr val="2A2A2A"/>
+                </a:solidFill>
+                <a:latin typeface="Calibri" pitchFamily="34" charset="0"/>
+                <a:ea typeface="Calibri" pitchFamily="34" charset="-122"/>
+                <a:cs typeface="Calibri" pitchFamily="34" charset="-120"/>
+              </a:rPr>
+              <a:t>How well a team trusts and relies on each other</a:t>
+            </a:r>
+            <a:endParaRPr lang="en-US" sz="1100" dirty="0"/>
+          </a:p>
+        </p:txBody>
+      </p:sp>
+      <p:sp>
+        <p:nvSpPr>
+          <p:cNvPr id="7" name="Shape 4"/>
+          <p:cNvSpPr/>
+          <p:nvPr/>
+        </p:nvSpPr>
+        <p:spPr>
+          <a:xfrm>
+            <a:off x="6263640" y="1161288"/>
+            <a:ext cx="5440680" cy="676656"/>
+          </a:xfrm>
+          <a:prstGeom prst="roundRect">
+            <a:avLst>
+              <a:gd name="adj" fmla="val 6757"/>
+            </a:avLst>
+          </a:prstGeom>
+          <a:solidFill>
+            <a:srgbClr val="E8EEF7"/>
+          </a:solidFill>
+          <a:ln/>
+        </p:spPr>
+      </p:sp>
+      <p:sp>
+        <p:nvSpPr>
+          <p:cNvPr id="8" name="Text 5"/>
+          <p:cNvSpPr/>
+          <p:nvPr/>
+        </p:nvSpPr>
+        <p:spPr>
+          <a:xfrm>
+            <a:off x="6400800" y="1161288"/>
+            <a:ext cx="1828800" cy="676656"/>
+          </a:xfrm>
+          <a:prstGeom prst="rect">
+            <a:avLst/>
+          </a:prstGeom>
+          <a:noFill/>
+          <a:ln/>
+        </p:spPr>
+        <p:txBody>
+          <a:bodyPr wrap="square" rtlCol="0" anchor="ctr"/>
+          <a:lstStyle/>
+          <a:p>
+            <a:pPr indent="0" marL="0">
+              <a:buNone/>
+            </a:pPr>
+            <a:r>
+              <a:rPr lang="en-US" sz="1200" b="1" dirty="0">
+                <a:solidFill>
+                  <a:srgbClr val="122952"/>
+                </a:solidFill>
+                <a:latin typeface="Calibri" pitchFamily="34" charset="0"/>
+                <a:ea typeface="Calibri" pitchFamily="34" charset="-122"/>
+                <a:cs typeface="Calibri" pitchFamily="34" charset="-120"/>
+              </a:rPr>
+              <a:t>Protocol</a:t>
+            </a:r>
+            <a:endParaRPr lang="en-US" sz="1200" dirty="0"/>
+          </a:p>
+        </p:txBody>
+      </p:sp>
+      <p:sp>
+        <p:nvSpPr>
+          <p:cNvPr id="9" name="Text 6"/>
+          <p:cNvSpPr/>
+          <p:nvPr/>
+        </p:nvSpPr>
+        <p:spPr>
+          <a:xfrm>
+            <a:off x="8275320" y="1161288"/>
+            <a:ext cx="3291840" cy="676656"/>
+          </a:xfrm>
+          <a:prstGeom prst="rect">
+            <a:avLst/>
+          </a:prstGeom>
+          <a:noFill/>
+          <a:ln/>
+        </p:spPr>
+        <p:txBody>
+          <a:bodyPr wrap="square" rtlCol="0" anchor="ctr"/>
+          <a:lstStyle/>
+          <a:p>
+            <a:pPr indent="0" marL="0">
+              <a:buNone/>
+            </a:pPr>
+            <a:r>
+              <a:rPr lang="en-US" sz="1100" dirty="0">
+                <a:solidFill>
+                  <a:srgbClr val="2A2A2A"/>
+                </a:solidFill>
+                <a:latin typeface="Calibri" pitchFamily="34" charset="0"/>
+                <a:ea typeface="Calibri" pitchFamily="34" charset="-122"/>
+                <a:cs typeface="Calibri" pitchFamily="34" charset="-120"/>
+              </a:rPr>
+              <a:t>Agreed rules or procedures for an activity</a:t>
+            </a:r>
+            <a:endParaRPr lang="en-US" sz="1100" dirty="0"/>
+          </a:p>
+        </p:txBody>
+      </p:sp>
+      <p:sp>
+        <p:nvSpPr>
+          <p:cNvPr id="10" name="Shape 7"/>
+          <p:cNvSpPr/>
+          <p:nvPr/>
+        </p:nvSpPr>
+        <p:spPr>
+          <a:xfrm>
+            <a:off x="548640" y="1947672"/>
+            <a:ext cx="5440680" cy="676656"/>
+          </a:xfrm>
+          <a:prstGeom prst="roundRect">
+            <a:avLst>
+              <a:gd name="adj" fmla="val 6757"/>
+            </a:avLst>
+          </a:prstGeom>
+          <a:solidFill>
+            <a:srgbClr val="F7F9FC"/>
+          </a:solidFill>
+          <a:ln/>
+        </p:spPr>
+      </p:sp>
+      <p:sp>
+        <p:nvSpPr>
+          <p:cNvPr id="11" name="Text 8"/>
+          <p:cNvSpPr/>
+          <p:nvPr/>
+        </p:nvSpPr>
+        <p:spPr>
+          <a:xfrm>
+            <a:off x="685800" y="1947672"/>
+            <a:ext cx="1828800" cy="676656"/>
+          </a:xfrm>
+          <a:prstGeom prst="rect">
+            <a:avLst/>
+          </a:prstGeom>
+          <a:noFill/>
+          <a:ln/>
+        </p:spPr>
+        <p:txBody>
+          <a:bodyPr wrap="square" rtlCol="0" anchor="ctr"/>
+          <a:lstStyle/>
+          <a:p>
+            <a:pPr indent="0" marL="0">
+              <a:buNone/>
+            </a:pPr>
+            <a:r>
+              <a:rPr lang="en-US" sz="1200" b="1" dirty="0">
+                <a:solidFill>
+                  <a:srgbClr val="122952"/>
+                </a:solidFill>
+                <a:latin typeface="Calibri" pitchFamily="34" charset="0"/>
+                <a:ea typeface="Calibri" pitchFamily="34" charset="-122"/>
+                <a:cs typeface="Calibri" pitchFamily="34" charset="-120"/>
+              </a:rPr>
+              <a:t>Resilience</a:t>
+            </a:r>
+            <a:endParaRPr lang="en-US" sz="1200" dirty="0"/>
+          </a:p>
+        </p:txBody>
+      </p:sp>
+      <p:sp>
+        <p:nvSpPr>
+          <p:cNvPr id="12" name="Text 9"/>
+          <p:cNvSpPr/>
+          <p:nvPr/>
+        </p:nvSpPr>
+        <p:spPr>
+          <a:xfrm>
+            <a:off x="2560320" y="1947672"/>
+            <a:ext cx="3291840" cy="676656"/>
+          </a:xfrm>
+          <a:prstGeom prst="rect">
+            <a:avLst/>
+          </a:prstGeom>
+          <a:noFill/>
+          <a:ln/>
+        </p:spPr>
+        <p:txBody>
+          <a:bodyPr wrap="square" rtlCol="0" anchor="ctr"/>
+          <a:lstStyle/>
+          <a:p>
+            <a:pPr indent="0" marL="0">
+              <a:buNone/>
+            </a:pPr>
+            <a:r>
+              <a:rPr lang="en-US" sz="1100" dirty="0">
+                <a:solidFill>
+                  <a:srgbClr val="2A2A2A"/>
+                </a:solidFill>
+                <a:latin typeface="Calibri" pitchFamily="34" charset="0"/>
+                <a:ea typeface="Calibri" pitchFamily="34" charset="-122"/>
+                <a:cs typeface="Calibri" pitchFamily="34" charset="-120"/>
+              </a:rPr>
+              <a:t>Ability to keep going and recover from setbacks</a:t>
+            </a:r>
+            <a:endParaRPr lang="en-US" sz="1100" dirty="0"/>
+          </a:p>
+        </p:txBody>
+      </p:sp>
+      <p:sp>
+        <p:nvSpPr>
+          <p:cNvPr id="13" name="Shape 10"/>
+          <p:cNvSpPr/>
+          <p:nvPr/>
+        </p:nvSpPr>
+        <p:spPr>
+          <a:xfrm>
+            <a:off x="6263640" y="1947672"/>
+            <a:ext cx="5440680" cy="676656"/>
+          </a:xfrm>
+          <a:prstGeom prst="roundRect">
+            <a:avLst>
+              <a:gd name="adj" fmla="val 6757"/>
+            </a:avLst>
+          </a:prstGeom>
+          <a:solidFill>
+            <a:srgbClr val="F7F9FC"/>
+          </a:solidFill>
+          <a:ln/>
+        </p:spPr>
+      </p:sp>
+      <p:sp>
+        <p:nvSpPr>
+          <p:cNvPr id="14" name="Text 11"/>
+          <p:cNvSpPr/>
+          <p:nvPr/>
+        </p:nvSpPr>
+        <p:spPr>
+          <a:xfrm>
+            <a:off x="6400800" y="1947672"/>
+            <a:ext cx="1828800" cy="676656"/>
+          </a:xfrm>
+          <a:prstGeom prst="rect">
+            <a:avLst/>
+          </a:prstGeom>
+          <a:noFill/>
+          <a:ln/>
+        </p:spPr>
+        <p:txBody>
+          <a:bodyPr wrap="square" rtlCol="0" anchor="ctr"/>
+          <a:lstStyle/>
+          <a:p>
+            <a:pPr indent="0" marL="0">
+              <a:buNone/>
+            </a:pPr>
+            <a:r>
+              <a:rPr lang="en-US" sz="1200" b="1" dirty="0">
+                <a:solidFill>
+                  <a:srgbClr val="122952"/>
+                </a:solidFill>
+                <a:latin typeface="Calibri" pitchFamily="34" charset="0"/>
+                <a:ea typeface="Calibri" pitchFamily="34" charset="-122"/>
+                <a:cs typeface="Calibri" pitchFamily="34" charset="-120"/>
+              </a:rPr>
+              <a:t>Perseverance</a:t>
+            </a:r>
+            <a:endParaRPr lang="en-US" sz="1200" dirty="0"/>
+          </a:p>
+        </p:txBody>
+      </p:sp>
+      <p:sp>
+        <p:nvSpPr>
+          <p:cNvPr id="15" name="Text 12"/>
+          <p:cNvSpPr/>
+          <p:nvPr/>
+        </p:nvSpPr>
+        <p:spPr>
+          <a:xfrm>
+            <a:off x="8275320" y="1947672"/>
+            <a:ext cx="3291840" cy="676656"/>
+          </a:xfrm>
+          <a:prstGeom prst="rect">
+            <a:avLst/>
+          </a:prstGeom>
+          <a:noFill/>
+          <a:ln/>
+        </p:spPr>
+        <p:txBody>
+          <a:bodyPr wrap="square" rtlCol="0" anchor="ctr"/>
+          <a:lstStyle/>
+          <a:p>
+            <a:pPr indent="0" marL="0">
+              <a:buNone/>
+            </a:pPr>
+            <a:r>
+              <a:rPr lang="en-US" sz="1100" dirty="0">
+                <a:solidFill>
+                  <a:srgbClr val="2A2A2A"/>
+                </a:solidFill>
+                <a:latin typeface="Calibri" pitchFamily="34" charset="0"/>
+                <a:ea typeface="Calibri" pitchFamily="34" charset="-122"/>
+                <a:cs typeface="Calibri" pitchFamily="34" charset="-120"/>
+              </a:rPr>
+              <a:t>Continuing to try even when it's difficult</a:t>
+            </a:r>
+            <a:endParaRPr lang="en-US" sz="1100" dirty="0"/>
+          </a:p>
+        </p:txBody>
+      </p:sp>
+      <p:sp>
+        <p:nvSpPr>
+          <p:cNvPr id="16" name="Shape 13"/>
+          <p:cNvSpPr/>
+          <p:nvPr/>
+        </p:nvSpPr>
+        <p:spPr>
+          <a:xfrm>
+            <a:off x="548640" y="2734056"/>
+            <a:ext cx="5440680" cy="676656"/>
+          </a:xfrm>
+          <a:prstGeom prst="roundRect">
+            <a:avLst>
+              <a:gd name="adj" fmla="val 6757"/>
+            </a:avLst>
+          </a:prstGeom>
+          <a:solidFill>
+            <a:srgbClr val="E8EEF7"/>
+          </a:solidFill>
+          <a:ln/>
+        </p:spPr>
+      </p:sp>
+      <p:sp>
+        <p:nvSpPr>
+          <p:cNvPr id="17" name="Text 14"/>
+          <p:cNvSpPr/>
+          <p:nvPr/>
+        </p:nvSpPr>
+        <p:spPr>
+          <a:xfrm>
+            <a:off x="685800" y="2734056"/>
+            <a:ext cx="1828800" cy="676656"/>
+          </a:xfrm>
+          <a:prstGeom prst="rect">
+            <a:avLst/>
+          </a:prstGeom>
+          <a:noFill/>
+          <a:ln/>
+        </p:spPr>
+        <p:txBody>
+          <a:bodyPr wrap="square" rtlCol="0" anchor="ctr"/>
+          <a:lstStyle/>
+          <a:p>
+            <a:pPr indent="0" marL="0">
+              <a:buNone/>
+            </a:pPr>
+            <a:r>
+              <a:rPr lang="en-US" sz="1200" b="1" dirty="0">
+                <a:solidFill>
+                  <a:srgbClr val="122952"/>
+                </a:solidFill>
+                <a:latin typeface="Calibri" pitchFamily="34" charset="0"/>
+                <a:ea typeface="Calibri" pitchFamily="34" charset="-122"/>
+                <a:cs typeface="Calibri" pitchFamily="34" charset="-120"/>
+              </a:rPr>
+              <a:t>Non-verbal communication</a:t>
+            </a:r>
+            <a:endParaRPr lang="en-US" sz="1200" dirty="0"/>
+          </a:p>
+        </p:txBody>
+      </p:sp>
+      <p:sp>
+        <p:nvSpPr>
+          <p:cNvPr id="18" name="Text 15"/>
+          <p:cNvSpPr/>
+          <p:nvPr/>
+        </p:nvSpPr>
+        <p:spPr>
+          <a:xfrm>
+            <a:off x="2560320" y="2734056"/>
+            <a:ext cx="3291840" cy="676656"/>
+          </a:xfrm>
+          <a:prstGeom prst="rect">
+            <a:avLst/>
+          </a:prstGeom>
+          <a:noFill/>
+          <a:ln/>
+        </p:spPr>
+        <p:txBody>
+          <a:bodyPr wrap="square" rtlCol="0" anchor="ctr"/>
+          <a:lstStyle/>
+          <a:p>
+            <a:pPr indent="0" marL="0">
+              <a:buNone/>
+            </a:pPr>
+            <a:r>
+              <a:rPr lang="en-US" sz="1100" dirty="0">
+                <a:solidFill>
+                  <a:srgbClr val="2A2A2A"/>
+                </a:solidFill>
+                <a:latin typeface="Calibri" pitchFamily="34" charset="0"/>
+                <a:ea typeface="Calibri" pitchFamily="34" charset="-122"/>
+                <a:cs typeface="Calibri" pitchFamily="34" charset="-120"/>
+              </a:rPr>
+              <a:t>Communicating without words</a:t>
+            </a:r>
+            <a:endParaRPr lang="en-US" sz="1100" dirty="0"/>
+          </a:p>
+        </p:txBody>
+      </p:sp>
+      <p:sp>
+        <p:nvSpPr>
+          <p:cNvPr id="19" name="Shape 16"/>
+          <p:cNvSpPr/>
+          <p:nvPr/>
+        </p:nvSpPr>
+        <p:spPr>
+          <a:xfrm>
+            <a:off x="6263640" y="2734056"/>
+            <a:ext cx="5440680" cy="676656"/>
+          </a:xfrm>
+          <a:prstGeom prst="roundRect">
+            <a:avLst>
+              <a:gd name="adj" fmla="val 6757"/>
+            </a:avLst>
+          </a:prstGeom>
+          <a:solidFill>
+            <a:srgbClr val="E8EEF7"/>
+          </a:solidFill>
+          <a:ln/>
+        </p:spPr>
+      </p:sp>
+      <p:sp>
+        <p:nvSpPr>
+          <p:cNvPr id="20" name="Text 17"/>
+          <p:cNvSpPr/>
+          <p:nvPr/>
+        </p:nvSpPr>
+        <p:spPr>
+          <a:xfrm>
+            <a:off x="6400800" y="2734056"/>
+            <a:ext cx="1828800" cy="676656"/>
+          </a:xfrm>
+          <a:prstGeom prst="rect">
+            <a:avLst/>
+          </a:prstGeom>
+          <a:noFill/>
+          <a:ln/>
+        </p:spPr>
+        <p:txBody>
+          <a:bodyPr wrap="square" rtlCol="0" anchor="ctr"/>
+          <a:lstStyle/>
+          <a:p>
+            <a:pPr indent="0" marL="0">
+              <a:buNone/>
+            </a:pPr>
+            <a:r>
+              <a:rPr lang="en-US" sz="1200" b="1" dirty="0">
+                <a:solidFill>
+                  <a:srgbClr val="122952"/>
+                </a:solidFill>
+                <a:latin typeface="Calibri" pitchFamily="34" charset="0"/>
+                <a:ea typeface="Calibri" pitchFamily="34" charset="-122"/>
+                <a:cs typeface="Calibri" pitchFamily="34" charset="-120"/>
+              </a:rPr>
+              <a:t>Personal conduct</a:t>
+            </a:r>
+            <a:endParaRPr lang="en-US" sz="1200" dirty="0"/>
+          </a:p>
+        </p:txBody>
+      </p:sp>
+      <p:sp>
+        <p:nvSpPr>
+          <p:cNvPr id="21" name="Text 18"/>
+          <p:cNvSpPr/>
+          <p:nvPr/>
+        </p:nvSpPr>
+        <p:spPr>
+          <a:xfrm>
+            <a:off x="8275320" y="2734056"/>
+            <a:ext cx="3291840" cy="676656"/>
+          </a:xfrm>
+          <a:prstGeom prst="rect">
+            <a:avLst/>
+          </a:prstGeom>
+          <a:noFill/>
+          <a:ln/>
+        </p:spPr>
+        <p:txBody>
+          <a:bodyPr wrap="square" rtlCol="0" anchor="ctr"/>
+          <a:lstStyle/>
+          <a:p>
+            <a:pPr indent="0" marL="0">
+              <a:buNone/>
+            </a:pPr>
+            <a:r>
+              <a:rPr lang="en-US" sz="1100" dirty="0">
+                <a:solidFill>
+                  <a:srgbClr val="2A2A2A"/>
+                </a:solidFill>
+                <a:latin typeface="Calibri" pitchFamily="34" charset="0"/>
+                <a:ea typeface="Calibri" pitchFamily="34" charset="-122"/>
+                <a:cs typeface="Calibri" pitchFamily="34" charset="-120"/>
+              </a:rPr>
+              <a:t>How a person behaves during an activity</a:t>
+            </a:r>
+            <a:endParaRPr lang="en-US" sz="1100" dirty="0"/>
+          </a:p>
+        </p:txBody>
+      </p:sp>
+      <p:sp>
+        <p:nvSpPr>
+          <p:cNvPr id="22" name="Shape 19"/>
+          <p:cNvSpPr/>
+          <p:nvPr/>
+        </p:nvSpPr>
+        <p:spPr>
+          <a:xfrm>
+            <a:off x="548640" y="3520440"/>
+            <a:ext cx="5440680" cy="676656"/>
+          </a:xfrm>
+          <a:prstGeom prst="roundRect">
+            <a:avLst>
+              <a:gd name="adj" fmla="val 6757"/>
+            </a:avLst>
+          </a:prstGeom>
+          <a:solidFill>
+            <a:srgbClr val="F7F9FC"/>
+          </a:solidFill>
+          <a:ln/>
+        </p:spPr>
+      </p:sp>
+      <p:sp>
+        <p:nvSpPr>
+          <p:cNvPr id="23" name="Text 20"/>
+          <p:cNvSpPr/>
+          <p:nvPr/>
+        </p:nvSpPr>
+        <p:spPr>
+          <a:xfrm>
+            <a:off x="685800" y="3520440"/>
+            <a:ext cx="1828800" cy="676656"/>
+          </a:xfrm>
+          <a:prstGeom prst="rect">
+            <a:avLst/>
+          </a:prstGeom>
+          <a:noFill/>
+          <a:ln/>
+        </p:spPr>
+        <p:txBody>
+          <a:bodyPr wrap="square" rtlCol="0" anchor="ctr"/>
+          <a:lstStyle/>
+          <a:p>
+            <a:pPr indent="0" marL="0">
+              <a:buNone/>
+            </a:pPr>
+            <a:r>
+              <a:rPr lang="en-US" sz="1200" b="1" dirty="0">
+                <a:solidFill>
+                  <a:srgbClr val="122952"/>
+                </a:solidFill>
+                <a:latin typeface="Calibri" pitchFamily="34" charset="0"/>
+                <a:ea typeface="Calibri" pitchFamily="34" charset="-122"/>
+                <a:cs typeface="Calibri" pitchFamily="34" charset="-120"/>
+              </a:rPr>
+              <a:t>Staff morale</a:t>
+            </a:r>
+            <a:endParaRPr lang="en-US" sz="1200" dirty="0"/>
+          </a:p>
+        </p:txBody>
+      </p:sp>
+      <p:sp>
+        <p:nvSpPr>
+          <p:cNvPr id="24" name="Text 21"/>
+          <p:cNvSpPr/>
+          <p:nvPr/>
+        </p:nvSpPr>
+        <p:spPr>
+          <a:xfrm>
+            <a:off x="2560320" y="3520440"/>
+            <a:ext cx="3291840" cy="676656"/>
+          </a:xfrm>
+          <a:prstGeom prst="rect">
+            <a:avLst/>
+          </a:prstGeom>
+          <a:noFill/>
+          <a:ln/>
+        </p:spPr>
+        <p:txBody>
+          <a:bodyPr wrap="square" rtlCol="0" anchor="ctr"/>
+          <a:lstStyle/>
+          <a:p>
+            <a:pPr indent="0" marL="0">
+              <a:buNone/>
+            </a:pPr>
+            <a:r>
+              <a:rPr lang="en-US" sz="1100" dirty="0">
+                <a:solidFill>
+                  <a:srgbClr val="2A2A2A"/>
+                </a:solidFill>
+                <a:latin typeface="Calibri" pitchFamily="34" charset="0"/>
+                <a:ea typeface="Calibri" pitchFamily="34" charset="-122"/>
+                <a:cs typeface="Calibri" pitchFamily="34" charset="-120"/>
+              </a:rPr>
+              <a:t>How motivated and positive employees feel</a:t>
+            </a:r>
+            <a:endParaRPr lang="en-US" sz="1100" dirty="0"/>
+          </a:p>
+        </p:txBody>
+      </p:sp>
+      <p:sp>
+        <p:nvSpPr>
+          <p:cNvPr id="25" name="Shape 22"/>
+          <p:cNvSpPr/>
+          <p:nvPr/>
+        </p:nvSpPr>
+        <p:spPr>
+          <a:xfrm>
+            <a:off x="6263640" y="3520440"/>
+            <a:ext cx="5440680" cy="676656"/>
+          </a:xfrm>
+          <a:prstGeom prst="roundRect">
+            <a:avLst>
+              <a:gd name="adj" fmla="val 6757"/>
+            </a:avLst>
+          </a:prstGeom>
+          <a:solidFill>
+            <a:srgbClr val="F7F9FC"/>
+          </a:solidFill>
+          <a:ln/>
+        </p:spPr>
+      </p:sp>
+      <p:sp>
+        <p:nvSpPr>
+          <p:cNvPr id="26" name="Text 23"/>
+          <p:cNvSpPr/>
+          <p:nvPr/>
+        </p:nvSpPr>
+        <p:spPr>
+          <a:xfrm>
+            <a:off x="6400800" y="3520440"/>
+            <a:ext cx="1828800" cy="676656"/>
+          </a:xfrm>
+          <a:prstGeom prst="rect">
+            <a:avLst/>
+          </a:prstGeom>
+          <a:noFill/>
+          <a:ln/>
+        </p:spPr>
+        <p:txBody>
+          <a:bodyPr wrap="square" rtlCol="0" anchor="ctr"/>
+          <a:lstStyle/>
+          <a:p>
+            <a:pPr indent="0" marL="0">
+              <a:buNone/>
+            </a:pPr>
+            <a:r>
+              <a:rPr lang="en-US" sz="1200" b="1" dirty="0">
+                <a:solidFill>
+                  <a:srgbClr val="122952"/>
+                </a:solidFill>
+                <a:latin typeface="Calibri" pitchFamily="34" charset="0"/>
+                <a:ea typeface="Calibri" pitchFamily="34" charset="-122"/>
+                <a:cs typeface="Calibri" pitchFamily="34" charset="-120"/>
+              </a:rPr>
+              <a:t>Skill acquisition</a:t>
+            </a:r>
+            <a:endParaRPr lang="en-US" sz="1200" dirty="0"/>
+          </a:p>
+        </p:txBody>
+      </p:sp>
+      <p:sp>
+        <p:nvSpPr>
+          <p:cNvPr id="27" name="Text 24"/>
+          <p:cNvSpPr/>
+          <p:nvPr/>
+        </p:nvSpPr>
+        <p:spPr>
+          <a:xfrm>
+            <a:off x="8275320" y="3520440"/>
+            <a:ext cx="3291840" cy="676656"/>
+          </a:xfrm>
+          <a:prstGeom prst="rect">
+            <a:avLst/>
+          </a:prstGeom>
+          <a:noFill/>
+          <a:ln/>
+        </p:spPr>
+        <p:txBody>
+          <a:bodyPr wrap="square" rtlCol="0" anchor="ctr"/>
+          <a:lstStyle/>
+          <a:p>
+            <a:pPr indent="0" marL="0">
+              <a:buNone/>
+            </a:pPr>
+            <a:r>
+              <a:rPr lang="en-US" sz="1100" dirty="0">
+                <a:solidFill>
+                  <a:srgbClr val="2A2A2A"/>
+                </a:solidFill>
+                <a:latin typeface="Calibri" pitchFamily="34" charset="0"/>
+                <a:ea typeface="Calibri" pitchFamily="34" charset="-122"/>
+                <a:cs typeface="Calibri" pitchFamily="34" charset="-120"/>
+              </a:rPr>
+              <a:t>Learning and improving a new skill</a:t>
+            </a:r>
+            <a:endParaRPr lang="en-US" sz="1100" dirty="0"/>
+          </a:p>
+        </p:txBody>
+      </p:sp>
+      <p:sp>
+        <p:nvSpPr>
+          <p:cNvPr id="28" name="Shape 25"/>
+          <p:cNvSpPr/>
+          <p:nvPr/>
+        </p:nvSpPr>
+        <p:spPr>
+          <a:xfrm>
+            <a:off x="548640" y="4306824"/>
+            <a:ext cx="5440680" cy="676656"/>
+          </a:xfrm>
+          <a:prstGeom prst="roundRect">
+            <a:avLst>
+              <a:gd name="adj" fmla="val 6757"/>
+            </a:avLst>
+          </a:prstGeom>
+          <a:solidFill>
+            <a:srgbClr val="E8EEF7"/>
+          </a:solidFill>
+          <a:ln/>
+        </p:spPr>
+      </p:sp>
+      <p:sp>
+        <p:nvSpPr>
+          <p:cNvPr id="29" name="Text 26"/>
+          <p:cNvSpPr/>
+          <p:nvPr/>
+        </p:nvSpPr>
+        <p:spPr>
+          <a:xfrm>
+            <a:off x="685800" y="4306824"/>
+            <a:ext cx="1828800" cy="676656"/>
+          </a:xfrm>
+          <a:prstGeom prst="rect">
+            <a:avLst/>
+          </a:prstGeom>
+          <a:noFill/>
+          <a:ln/>
+        </p:spPr>
+        <p:txBody>
+          <a:bodyPr wrap="square" rtlCol="0" anchor="ctr"/>
+          <a:lstStyle/>
+          <a:p>
+            <a:pPr indent="0" marL="0">
+              <a:buNone/>
+            </a:pPr>
+            <a:r>
+              <a:rPr lang="en-US" sz="1200" b="1" dirty="0">
+                <a:solidFill>
+                  <a:srgbClr val="122952"/>
+                </a:solidFill>
+                <a:latin typeface="Calibri" pitchFamily="34" charset="0"/>
+                <a:ea typeface="Calibri" pitchFamily="34" charset="-122"/>
+                <a:cs typeface="Calibri" pitchFamily="34" charset="-120"/>
+              </a:rPr>
+              <a:t>Adaptability</a:t>
+            </a:r>
+            <a:endParaRPr lang="en-US" sz="1200" dirty="0"/>
+          </a:p>
+        </p:txBody>
+      </p:sp>
+      <p:sp>
+        <p:nvSpPr>
+          <p:cNvPr id="30" name="Text 27"/>
+          <p:cNvSpPr/>
+          <p:nvPr/>
+        </p:nvSpPr>
+        <p:spPr>
+          <a:xfrm>
+            <a:off x="2560320" y="4306824"/>
+            <a:ext cx="3291840" cy="676656"/>
+          </a:xfrm>
+          <a:prstGeom prst="rect">
+            <a:avLst/>
+          </a:prstGeom>
+          <a:noFill/>
+          <a:ln/>
+        </p:spPr>
+        <p:txBody>
+          <a:bodyPr wrap="square" rtlCol="0" anchor="ctr"/>
+          <a:lstStyle/>
+          <a:p>
+            <a:pPr indent="0" marL="0">
+              <a:buNone/>
+            </a:pPr>
+            <a:r>
+              <a:rPr lang="en-US" sz="1100" dirty="0">
+                <a:solidFill>
+                  <a:srgbClr val="2A2A2A"/>
+                </a:solidFill>
+                <a:latin typeface="Calibri" pitchFamily="34" charset="0"/>
+                <a:ea typeface="Calibri" pitchFamily="34" charset="-122"/>
+                <a:cs typeface="Calibri" pitchFamily="34" charset="-120"/>
+              </a:rPr>
+              <a:t>Changing your approach to suit new conditions</a:t>
+            </a:r>
+            <a:endParaRPr lang="en-US" sz="1100" dirty="0"/>
+          </a:p>
+        </p:txBody>
+      </p:sp>
+      <p:sp>
+        <p:nvSpPr>
+          <p:cNvPr id="31" name="Shape 28"/>
+          <p:cNvSpPr/>
+          <p:nvPr/>
+        </p:nvSpPr>
+        <p:spPr>
+          <a:xfrm>
+            <a:off x="6263640" y="4306824"/>
+            <a:ext cx="5440680" cy="676656"/>
+          </a:xfrm>
+          <a:prstGeom prst="roundRect">
+            <a:avLst>
+              <a:gd name="adj" fmla="val 6757"/>
+            </a:avLst>
+          </a:prstGeom>
+          <a:solidFill>
+            <a:srgbClr val="E8EEF7"/>
+          </a:solidFill>
+          <a:ln/>
+        </p:spPr>
+      </p:sp>
+      <p:sp>
+        <p:nvSpPr>
+          <p:cNvPr id="32" name="Text 29"/>
+          <p:cNvSpPr/>
+          <p:nvPr/>
+        </p:nvSpPr>
+        <p:spPr>
+          <a:xfrm>
+            <a:off x="6400800" y="4306824"/>
+            <a:ext cx="1828800" cy="676656"/>
+          </a:xfrm>
+          <a:prstGeom prst="rect">
+            <a:avLst/>
+          </a:prstGeom>
+          <a:noFill/>
+          <a:ln/>
+        </p:spPr>
+        <p:txBody>
+          <a:bodyPr wrap="square" rtlCol="0" anchor="ctr"/>
+          <a:lstStyle/>
+          <a:p>
+            <a:pPr indent="0" marL="0">
+              <a:buNone/>
+            </a:pPr>
+            <a:r>
+              <a:rPr lang="en-US" sz="1200" b="1" dirty="0">
+                <a:solidFill>
+                  <a:srgbClr val="122952"/>
+                </a:solidFill>
+                <a:latin typeface="Calibri" pitchFamily="34" charset="0"/>
+                <a:ea typeface="Calibri" pitchFamily="34" charset="-122"/>
+                <a:cs typeface="Calibri" pitchFamily="34" charset="-120"/>
+              </a:rPr>
+              <a:t>Participant needs</a:t>
+            </a:r>
+            <a:endParaRPr lang="en-US" sz="1200" dirty="0"/>
+          </a:p>
+        </p:txBody>
+      </p:sp>
+      <p:sp>
+        <p:nvSpPr>
+          <p:cNvPr id="33" name="Text 30"/>
+          <p:cNvSpPr/>
+          <p:nvPr/>
+        </p:nvSpPr>
+        <p:spPr>
+          <a:xfrm>
+            <a:off x="8275320" y="4306824"/>
+            <a:ext cx="3291840" cy="676656"/>
+          </a:xfrm>
+          <a:prstGeom prst="rect">
+            <a:avLst/>
+          </a:prstGeom>
+          <a:noFill/>
+          <a:ln/>
+        </p:spPr>
+        <p:txBody>
+          <a:bodyPr wrap="square" rtlCol="0" anchor="ctr"/>
+          <a:lstStyle/>
+          <a:p>
+            <a:pPr indent="0" marL="0">
+              <a:buNone/>
+            </a:pPr>
+            <a:r>
+              <a:rPr lang="en-US" sz="1100" dirty="0">
+                <a:solidFill>
+                  <a:srgbClr val="2A2A2A"/>
+                </a:solidFill>
+                <a:latin typeface="Calibri" pitchFamily="34" charset="0"/>
+                <a:ea typeface="Calibri" pitchFamily="34" charset="-122"/>
+                <a:cs typeface="Calibri" pitchFamily="34" charset="-120"/>
+              </a:rPr>
+              <a:t>Individual requirements considered when planning</a:t>
+            </a:r>
+            <a:endParaRPr lang="en-US" sz="1100" dirty="0"/>
+          </a:p>
+        </p:txBody>
+      </p:sp>
+      <p:sp>
+        <p:nvSpPr>
+          <p:cNvPr id="34" name="Shape 31"/>
+          <p:cNvSpPr/>
+          <p:nvPr/>
+        </p:nvSpPr>
+        <p:spPr>
+          <a:xfrm>
+            <a:off x="0" y="6537960"/>
+            <a:ext cx="12188952" cy="320040"/>
+          </a:xfrm>
+          <a:prstGeom prst="rect">
+            <a:avLst/>
+          </a:prstGeom>
+          <a:solidFill>
+            <a:srgbClr val="1B3A6B"/>
+          </a:solidFill>
+          <a:ln/>
+        </p:spPr>
+      </p:sp>
+      <p:sp>
+        <p:nvSpPr>
+          <p:cNvPr id="35" name="Text 32"/>
+          <p:cNvSpPr/>
+          <p:nvPr/>
+        </p:nvSpPr>
+        <p:spPr>
+          <a:xfrm>
+            <a:off x="274320" y="6537960"/>
+            <a:ext cx="3657600" cy="320040"/>
+          </a:xfrm>
+          <a:prstGeom prst="rect">
+            <a:avLst/>
+          </a:prstGeom>
+          <a:noFill/>
+          <a:ln/>
+        </p:spPr>
+        <p:txBody>
+          <a:bodyPr wrap="square" rtlCol="0" anchor="ctr"/>
+          <a:lstStyle/>
+          <a:p>
+            <a:pPr indent="0" marL="0">
+              <a:buNone/>
+            </a:pPr>
+            <a:r>
+              <a:rPr lang="en-US" sz="1000" dirty="0">
+                <a:solidFill>
+                  <a:srgbClr val="FFFFFF"/>
+                </a:solidFill>
+                <a:latin typeface="Calibri" pitchFamily="34" charset="0"/>
+                <a:ea typeface="Calibri" pitchFamily="34" charset="-122"/>
+                <a:cs typeface="Calibri" pitchFamily="34" charset="-120"/>
+              </a:rPr>
+              <a:t>PS12</a:t>
+            </a:r>
+            <a:endParaRPr lang="en-US" sz="1000" dirty="0"/>
+          </a:p>
+        </p:txBody>
+      </p:sp>
+      <p:sp>
+        <p:nvSpPr>
+          <p:cNvPr id="36" name="Text 33"/>
+          <p:cNvSpPr/>
+          <p:nvPr/>
+        </p:nvSpPr>
+        <p:spPr>
+          <a:xfrm>
+            <a:off x="7772400" y="6537960"/>
+            <a:ext cx="4114800" cy="320040"/>
+          </a:xfrm>
+          <a:prstGeom prst="rect">
+            <a:avLst/>
+          </a:prstGeom>
+          <a:noFill/>
+          <a:ln/>
+        </p:spPr>
+        <p:txBody>
+          <a:bodyPr wrap="square" rtlCol="0" anchor="ctr"/>
+          <a:lstStyle/>
+          <a:p>
+            <a:pPr algn="r" indent="0" marL="0">
+              <a:buNone/>
+            </a:pPr>
+            <a:r>
+              <a:rPr lang="en-US" sz="1000" dirty="0">
+                <a:solidFill>
+                  <a:srgbClr val="FFFFFF"/>
+                </a:solidFill>
+                <a:latin typeface="Calibri" pitchFamily="34" charset="0"/>
+                <a:ea typeface="Calibri" pitchFamily="34" charset="-122"/>
+                <a:cs typeface="Calibri" pitchFamily="34" charset="-120"/>
+              </a:rPr>
+              <a:t>Revision Summary</a:t>
+            </a:r>
+            <a:endParaRPr lang="en-US" sz="1000" dirty="0"/>
+          </a:p>
+        </p:txBody>
+      </p:sp>
+    </p:spTree>
+  </p:cSld>
+  <p:clrMapOvr>
+    <a:masterClrMapping/>
+  </p:clrMapOvr>
+</p:sld>
+</file>
+
+<file path=ppt/slides/slide13.xml><?xml version="1.0" encoding="utf-8"?>
+<p:sld xmlns:a="http://schemas.openxmlformats.org/drawingml/2006/main" xmlns:r="http://schemas.openxmlformats.org/officeDocument/2006/relationships" xmlns:p="http://schemas.openxmlformats.org/presentationml/2006/main">
+  <p:cSld name="Slide 13">
     <p:spTree>
       <p:nvGrpSpPr>
         <p:cNvPr id="1" name=""/>
@@ -4586,8 +6058,8 @@
         </p:nvSpPr>
         <p:spPr>
           <a:xfrm>
-            <a:off x="9418320" y="274320"/>
-            <a:ext cx="2423160" cy="384048"/>
+            <a:off x="9144000" y="274320"/>
+            <a:ext cx="2697480" cy="384048"/>
           </a:xfrm>
           <a:prstGeom prst="roundRect">
             <a:avLst>
@@ -4608,8 +6080,8 @@
         </p:nvSpPr>
         <p:spPr>
           <a:xfrm>
-            <a:off x="9418320" y="274320"/>
-            <a:ext cx="2423160" cy="384048"/>
+            <a:off x="9144000" y="274320"/>
+            <a:ext cx="2697480" cy="384048"/>
           </a:xfrm>
           <a:prstGeom prst="rect">
             <a:avLst/>
@@ -4648,23 +6120,23 @@
         <p:spPr>
           <a:xfrm>
             <a:off x="548640" y="320040"/>
-            <a:ext cx="8869680" cy="640080"/>
-          </a:xfrm>
-          <a:prstGeom prst="rect">
-            <a:avLst/>
-          </a:prstGeom>
-          <a:noFill/>
-          <a:ln/>
-        </p:spPr>
-        <p:txBody>
-          <a:bodyPr wrap="square" rtlCol="0" anchor="ctr"/>
-          <a:lstStyle/>
-          <a:p>
-            <a:pPr indent="0" marL="0">
-              <a:buNone/>
-            </a:pPr>
-            <a:r>
-              <a:rPr lang="en-US" sz="2600" b="1" dirty="0">
+            <a:ext cx="8595360" cy="640080"/>
+          </a:xfrm>
+          <a:prstGeom prst="rect">
+            <a:avLst/>
+          </a:prstGeom>
+          <a:noFill/>
+          <a:ln/>
+        </p:spPr>
+        <p:txBody>
+          <a:bodyPr wrap="square" rtlCol="0" anchor="ctr"/>
+          <a:lstStyle/>
+          <a:p>
+            <a:pPr indent="0" marL="0">
+              <a:buNone/>
+            </a:pPr>
+            <a:r>
+              <a:rPr lang="en-US" sz="2400" b="1" dirty="0">
                 <a:solidFill>
                   <a:srgbClr val="122952"/>
                 </a:solidFill>
@@ -4674,7 +6146,7 @@
               </a:rPr>
               <a:t>Why Sport Matters to the Public Services</a:t>
             </a:r>
-            <a:endParaRPr lang="en-US" sz="2600" dirty="0"/>
+            <a:endParaRPr lang="en-US" sz="2400" dirty="0"/>
           </a:p>
         </p:txBody>
       </p:sp>
@@ -5172,8 +6644,8 @@
         </p:nvSpPr>
         <p:spPr>
           <a:xfrm>
-            <a:off x="9418320" y="274320"/>
-            <a:ext cx="2423160" cy="384048"/>
+            <a:off x="9144000" y="274320"/>
+            <a:ext cx="2697480" cy="384048"/>
           </a:xfrm>
           <a:prstGeom prst="roundRect">
             <a:avLst>
@@ -5194,8 +6666,8 @@
         </p:nvSpPr>
         <p:spPr>
           <a:xfrm>
-            <a:off x="9418320" y="274320"/>
-            <a:ext cx="2423160" cy="384048"/>
+            <a:off x="9144000" y="274320"/>
+            <a:ext cx="2697480" cy="384048"/>
           </a:xfrm>
           <a:prstGeom prst="rect">
             <a:avLst/>
@@ -5833,8 +7305,8 @@
         </p:nvSpPr>
         <p:spPr>
           <a:xfrm>
-            <a:off x="9418320" y="274320"/>
-            <a:ext cx="2423160" cy="384048"/>
+            <a:off x="548640" y="274320"/>
+            <a:ext cx="2103120" cy="384048"/>
           </a:xfrm>
           <a:prstGeom prst="roundRect">
             <a:avLst>
@@ -5842,7 +7314,7 @@
             </a:avLst>
           </a:prstGeom>
           <a:solidFill>
-            <a:srgbClr val="C8A951"/>
+            <a:srgbClr val="1E40AF"/>
           </a:solidFill>
           <a:ln/>
         </p:spPr>
@@ -5855,8 +7327,8 @@
         </p:nvSpPr>
         <p:spPr>
           <a:xfrm>
-            <a:off x="9418320" y="274320"/>
-            <a:ext cx="2423160" cy="384048"/>
+            <a:off x="548640" y="274320"/>
+            <a:ext cx="2103120" cy="384048"/>
           </a:xfrm>
           <a:prstGeom prst="rect">
             <a:avLst/>
@@ -5872,7 +7344,46 @@
               <a:buNone/>
             </a:pPr>
             <a:r>
-              <a:rPr lang="en-US" sz="1200" b="1" dirty="0">
+              <a:rPr lang="en-US" sz="1100" b="1" dirty="0">
+                <a:solidFill>
+                  <a:srgbClr val="FFFFFF"/>
+                </a:solidFill>
+                <a:latin typeface="Calibri" pitchFamily="34" charset="0"/>
+                <a:ea typeface="Calibri" pitchFamily="34" charset="-122"/>
+                <a:cs typeface="Calibri" pitchFamily="34" charset="-120"/>
+              </a:rPr>
+              <a:t>WORKED EXAMPLE</a:t>
+            </a:r>
+            <a:endParaRPr lang="en-US" sz="1100" dirty="0"/>
+          </a:p>
+        </p:txBody>
+      </p:sp>
+      <p:sp>
+        <p:nvSpPr>
+          <p:cNvPr id="5" name="Text 2"/>
+          <p:cNvSpPr/>
+          <p:nvPr/>
+        </p:nvSpPr>
+        <p:spPr>
+          <a:xfrm>
+            <a:off x="548640" y="822960"/>
+            <a:ext cx="8869680" cy="640080"/>
+          </a:xfrm>
+          <a:prstGeom prst="rect">
+            <a:avLst/>
+          </a:prstGeom>
+          <a:noFill/>
+          <a:ln/>
+        </p:spPr>
+        <p:txBody>
+          <a:bodyPr wrap="square" rtlCol="0" anchor="ctr"/>
+          <a:lstStyle/>
+          <a:p>
+            <a:pPr indent="0" marL="0">
+              <a:buNone/>
+            </a:pPr>
+            <a:r>
+              <a:rPr lang="en-US" sz="2500" b="1" dirty="0">
                 <a:solidFill>
                   <a:srgbClr val="122952"/>
                 </a:solidFill>
@@ -5880,7 +7391,190 @@
                 <a:ea typeface="Calibri" pitchFamily="34" charset="-122"/>
                 <a:cs typeface="Calibri" pitchFamily="34" charset="-120"/>
               </a:rPr>
-              <a:t>A.P1 · A.M1 · A.D1</a:t>
+              <a:t>A Weak Plan vs a Strong Plan</a:t>
+            </a:r>
+            <a:endParaRPr lang="en-US" sz="2500" dirty="0"/>
+          </a:p>
+        </p:txBody>
+      </p:sp>
+      <p:sp>
+        <p:nvSpPr>
+          <p:cNvPr id="6" name="Text 3"/>
+          <p:cNvSpPr/>
+          <p:nvPr/>
+        </p:nvSpPr>
+        <p:spPr>
+          <a:xfrm>
+            <a:off x="548640" y="1417320"/>
+            <a:ext cx="10789920" cy="365760"/>
+          </a:xfrm>
+          <a:prstGeom prst="rect">
+            <a:avLst/>
+          </a:prstGeom>
+          <a:noFill/>
+          <a:ln/>
+        </p:spPr>
+        <p:txBody>
+          <a:bodyPr wrap="square" rtlCol="0" anchor="ctr"/>
+          <a:lstStyle/>
+          <a:p>
+            <a:pPr indent="0" marL="0">
+              <a:buNone/>
+            </a:pPr>
+            <a:r>
+              <a:rPr lang="en-US" sz="1300" i="1" dirty="0">
+                <a:solidFill>
+                  <a:srgbClr val="6B7B8C"/>
+                </a:solidFill>
+                <a:latin typeface="Calibri" pitchFamily="34" charset="0"/>
+                <a:ea typeface="Calibri" pitchFamily="34" charset="-122"/>
+                <a:cs typeface="Calibri" pitchFamily="34" charset="-120"/>
+              </a:rPr>
+              <a:t>Same activity — five-a-side football. What actually changes between grades?</a:t>
+            </a:r>
+            <a:endParaRPr lang="en-US" sz="1300" dirty="0"/>
+          </a:p>
+        </p:txBody>
+      </p:sp>
+      <p:sp>
+        <p:nvSpPr>
+          <p:cNvPr id="7" name="Shape 4"/>
+          <p:cNvSpPr/>
+          <p:nvPr/>
+        </p:nvSpPr>
+        <p:spPr>
+          <a:xfrm>
+            <a:off x="548640" y="1920240"/>
+            <a:ext cx="5349240" cy="3794760"/>
+          </a:xfrm>
+          <a:prstGeom prst="roundRect">
+            <a:avLst>
+              <a:gd name="adj" fmla="val 1928"/>
+            </a:avLst>
+          </a:prstGeom>
+          <a:solidFill>
+            <a:srgbClr val="F7F9FC"/>
+          </a:solidFill>
+          <a:ln w="12700">
+            <a:solidFill>
+              <a:srgbClr val="8A9AAF"/>
+            </a:solidFill>
+            <a:prstDash val="solid"/>
+          </a:ln>
+        </p:spPr>
+      </p:sp>
+      <p:sp>
+        <p:nvSpPr>
+          <p:cNvPr id="8" name="Text 5"/>
+          <p:cNvSpPr/>
+          <p:nvPr/>
+        </p:nvSpPr>
+        <p:spPr>
+          <a:xfrm>
+            <a:off x="822960" y="2103120"/>
+            <a:ext cx="4800600" cy="365760"/>
+          </a:xfrm>
+          <a:prstGeom prst="rect">
+            <a:avLst/>
+          </a:prstGeom>
+          <a:noFill/>
+          <a:ln/>
+        </p:spPr>
+        <p:txBody>
+          <a:bodyPr wrap="square" rtlCol="0" anchor="ctr"/>
+          <a:lstStyle/>
+          <a:p>
+            <a:pPr indent="0" marL="0">
+              <a:buNone/>
+            </a:pPr>
+            <a:r>
+              <a:rPr lang="en-US" sz="1500" b="1" dirty="0">
+                <a:solidFill>
+                  <a:srgbClr val="5A6B85"/>
+                </a:solidFill>
+                <a:latin typeface="Calibri" pitchFamily="34" charset="0"/>
+                <a:ea typeface="Calibri" pitchFamily="34" charset="-122"/>
+                <a:cs typeface="Calibri" pitchFamily="34" charset="-120"/>
+              </a:rPr>
+              <a:t>Pass-level plan</a:t>
+            </a:r>
+            <a:endParaRPr lang="en-US" sz="1500" dirty="0"/>
+          </a:p>
+        </p:txBody>
+      </p:sp>
+      <p:sp>
+        <p:nvSpPr>
+          <p:cNvPr id="9" name="Text 6"/>
+          <p:cNvSpPr/>
+          <p:nvPr/>
+        </p:nvSpPr>
+        <p:spPr>
+          <a:xfrm>
+            <a:off x="822960" y="2514600"/>
+            <a:ext cx="4800600" cy="822960"/>
+          </a:xfrm>
+          <a:prstGeom prst="rect">
+            <a:avLst/>
+          </a:prstGeom>
+          <a:noFill/>
+          <a:ln/>
+        </p:spPr>
+        <p:txBody>
+          <a:bodyPr wrap="square" rtlCol="0" anchor="ctr"/>
+          <a:lstStyle/>
+          <a:p>
+            <a:pPr indent="0" marL="0">
+              <a:buNone/>
+            </a:pPr>
+            <a:r>
+              <a:rPr lang="en-US" sz="1300" i="1" dirty="0">
+                <a:solidFill>
+                  <a:srgbClr val="2A2A2A"/>
+                </a:solidFill>
+                <a:latin typeface="Calibri" pitchFamily="34" charset="0"/>
+                <a:ea typeface="Calibri" pitchFamily="34" charset="-122"/>
+                <a:cs typeface="Calibri" pitchFamily="34" charset="-120"/>
+              </a:rPr>
+              <a:t>“We are playing five-a-side football on Thursday at the sports hall.”</a:t>
+            </a:r>
+            <a:endParaRPr lang="en-US" sz="1300" dirty="0"/>
+          </a:p>
+        </p:txBody>
+      </p:sp>
+      <p:sp>
+        <p:nvSpPr>
+          <p:cNvPr id="10" name="Text 7"/>
+          <p:cNvSpPr/>
+          <p:nvPr/>
+        </p:nvSpPr>
+        <p:spPr>
+          <a:xfrm>
+            <a:off x="822960" y="3383280"/>
+            <a:ext cx="4800600" cy="548640"/>
+          </a:xfrm>
+          <a:prstGeom prst="rect">
+            <a:avLst/>
+          </a:prstGeom>
+          <a:noFill/>
+          <a:ln/>
+        </p:spPr>
+        <p:txBody>
+          <a:bodyPr wrap="square" rtlCol="0" anchor="ctr"/>
+          <a:lstStyle/>
+          <a:p>
+            <a:pPr indent="0" marL="0">
+              <a:buNone/>
+            </a:pPr>
+            <a:r>
+              <a:rPr lang="en-US" sz="1200" dirty="0">
+                <a:solidFill>
+                  <a:srgbClr val="5A6B85"/>
+                </a:solidFill>
+                <a:latin typeface="Calibri" pitchFamily="34" charset="0"/>
+                <a:ea typeface="Calibri" pitchFamily="34" charset="-122"/>
+                <a:cs typeface="Calibri" pitchFamily="34" charset="-120"/>
+              </a:rPr>
+              <a:t>Identifies the activity — but skills needed aren't named.</a:t>
             </a:r>
             <a:endParaRPr lang="en-US" sz="1200" dirty="0"/>
           </a:p>
@@ -5888,70 +7582,96 @@
       </p:sp>
       <p:sp>
         <p:nvSpPr>
-          <p:cNvPr id="5" name="Text 2"/>
-          <p:cNvSpPr/>
-          <p:nvPr/>
-        </p:nvSpPr>
-        <p:spPr>
-          <a:xfrm>
-            <a:off x="548640" y="320040"/>
-            <a:ext cx="8869680" cy="640080"/>
-          </a:xfrm>
-          <a:prstGeom prst="rect">
-            <a:avLst/>
-          </a:prstGeom>
-          <a:noFill/>
-          <a:ln/>
-        </p:spPr>
-        <p:txBody>
-          <a:bodyPr wrap="square" rtlCol="0" anchor="ctr"/>
-          <a:lstStyle/>
-          <a:p>
-            <a:pPr indent="0" marL="0">
-              <a:buNone/>
-            </a:pPr>
-            <a:r>
-              <a:rPr lang="en-US" sz="2600" b="1" dirty="0">
-                <a:solidFill>
-                  <a:srgbClr val="122952"/>
-                </a:solidFill>
-                <a:latin typeface="Calibri" pitchFamily="34" charset="0"/>
-                <a:ea typeface="Calibri" pitchFamily="34" charset="-122"/>
-                <a:cs typeface="Calibri" pitchFamily="34" charset="-120"/>
-              </a:rPr>
-              <a:t>Factors to Consider When Planning</a:t>
-            </a:r>
-            <a:endParaRPr lang="en-US" sz="2600" dirty="0"/>
-          </a:p>
-        </p:txBody>
-      </p:sp>
-      <p:sp>
-        <p:nvSpPr>
-          <p:cNvPr id="6" name="Text 3"/>
-          <p:cNvSpPr/>
-          <p:nvPr/>
-        </p:nvSpPr>
-        <p:spPr>
-          <a:xfrm>
-            <a:off x="548640" y="1280160"/>
-            <a:ext cx="5303520" cy="640080"/>
-          </a:xfrm>
-          <a:prstGeom prst="rect">
-            <a:avLst/>
-          </a:prstGeom>
-          <a:noFill/>
-          <a:ln/>
-        </p:spPr>
-        <p:txBody>
-          <a:bodyPr wrap="square" rtlCol="0" anchor="ctr"/>
-          <a:lstStyle/>
-          <a:p>
-            <a:pPr marL="342900" indent="-342900">
-              <a:buSzPct val="100000"/>
-              <a:buChar char="▪"/>
-            </a:pPr>
-            <a:r>
-              <a:rPr lang="en-US" sz="1300" dirty="0">
+          <p:cNvPr id="11" name="Shape 8"/>
+          <p:cNvSpPr/>
+          <p:nvPr/>
+        </p:nvSpPr>
+        <p:spPr>
+          <a:xfrm>
+            <a:off x="6263640" y="1920240"/>
+            <a:ext cx="5349240" cy="3794760"/>
+          </a:xfrm>
+          <a:prstGeom prst="roundRect">
+            <a:avLst>
+              <a:gd name="adj" fmla="val 1928"/>
+            </a:avLst>
+          </a:prstGeom>
+          <a:solidFill>
+            <a:srgbClr val="F0FDF4"/>
+          </a:solidFill>
+          <a:ln w="12700">
+            <a:solidFill>
+              <a:srgbClr val="16A34A"/>
+            </a:solidFill>
+            <a:prstDash val="solid"/>
+          </a:ln>
+        </p:spPr>
+      </p:sp>
+      <p:sp>
+        <p:nvSpPr>
+          <p:cNvPr id="12" name="Text 9"/>
+          <p:cNvSpPr/>
+          <p:nvPr/>
+        </p:nvSpPr>
+        <p:spPr>
+          <a:xfrm>
+            <a:off x="6537960" y="2103120"/>
+            <a:ext cx="4800600" cy="365760"/>
+          </a:xfrm>
+          <a:prstGeom prst="rect">
+            <a:avLst/>
+          </a:prstGeom>
+          <a:noFill/>
+          <a:ln/>
+        </p:spPr>
+        <p:txBody>
+          <a:bodyPr wrap="square" rtlCol="0" anchor="ctr"/>
+          <a:lstStyle/>
+          <a:p>
+            <a:pPr indent="0" marL="0">
+              <a:buNone/>
+            </a:pPr>
+            <a:r>
+              <a:rPr lang="en-US" sz="1500" b="1" dirty="0">
+                <a:solidFill>
+                  <a:srgbClr val="16A34A"/>
+                </a:solidFill>
+                <a:latin typeface="Calibri" pitchFamily="34" charset="0"/>
+                <a:ea typeface="Calibri" pitchFamily="34" charset="-122"/>
+                <a:cs typeface="Calibri" pitchFamily="34" charset="-120"/>
+              </a:rPr>
+              <a:t>Distinction-level plan</a:t>
+            </a:r>
+            <a:endParaRPr lang="en-US" sz="1500" dirty="0"/>
+          </a:p>
+        </p:txBody>
+      </p:sp>
+      <p:sp>
+        <p:nvSpPr>
+          <p:cNvPr id="13" name="Text 10"/>
+          <p:cNvSpPr/>
+          <p:nvPr/>
+        </p:nvSpPr>
+        <p:spPr>
+          <a:xfrm>
+            <a:off x="6537960" y="2514600"/>
+            <a:ext cx="4800600" cy="2834640"/>
+          </a:xfrm>
+          <a:prstGeom prst="rect">
+            <a:avLst/>
+          </a:prstGeom>
+          <a:noFill/>
+          <a:ln/>
+        </p:spPr>
+        <p:txBody>
+          <a:bodyPr wrap="square" rtlCol="0" anchor="ctr"/>
+          <a:lstStyle/>
+          <a:p>
+            <a:pPr indent="0" marL="0">
+              <a:buNone/>
+            </a:pPr>
+            <a:r>
+              <a:rPr lang="en-US" sz="1200" i="1" dirty="0">
                 <a:solidFill>
                   <a:srgbClr val="2A2A2A"/>
                 </a:solidFill>
@@ -5959,215 +7679,15 @@
                 <a:ea typeface="Calibri" pitchFamily="34" charset="-122"/>
                 <a:cs typeface="Calibri" pitchFamily="34" charset="-120"/>
               </a:rPr>
-              <a:t>Needs of participants and aims of the session</a:t>
-            </a:r>
-            <a:endParaRPr lang="en-US" sz="1300" dirty="0"/>
-          </a:p>
-        </p:txBody>
-      </p:sp>
-      <p:sp>
-        <p:nvSpPr>
-          <p:cNvPr id="7" name="Text 4"/>
-          <p:cNvSpPr/>
-          <p:nvPr/>
-        </p:nvSpPr>
-        <p:spPr>
-          <a:xfrm>
-            <a:off x="548640" y="1965960"/>
-            <a:ext cx="5303520" cy="640080"/>
-          </a:xfrm>
-          <a:prstGeom prst="rect">
-            <a:avLst/>
-          </a:prstGeom>
-          <a:noFill/>
-          <a:ln/>
-        </p:spPr>
-        <p:txBody>
-          <a:bodyPr wrap="square" rtlCol="0" anchor="ctr"/>
-          <a:lstStyle/>
-          <a:p>
-            <a:pPr marL="342900" indent="-342900">
-              <a:buSzPct val="100000"/>
-              <a:buChar char="▪"/>
-            </a:pPr>
-            <a:r>
-              <a:rPr lang="en-US" sz="1300" dirty="0">
-                <a:solidFill>
-                  <a:srgbClr val="2A2A2A"/>
-                </a:solidFill>
-                <a:latin typeface="Calibri" pitchFamily="34" charset="0"/>
-                <a:ea typeface="Calibri" pitchFamily="34" charset="-122"/>
-                <a:cs typeface="Calibri" pitchFamily="34" charset="-120"/>
-              </a:rPr>
-              <a:t>Access — location, timing, costs, participant ability</a:t>
-            </a:r>
-            <a:endParaRPr lang="en-US" sz="1300" dirty="0"/>
-          </a:p>
-        </p:txBody>
-      </p:sp>
-      <p:sp>
-        <p:nvSpPr>
-          <p:cNvPr id="8" name="Text 5"/>
-          <p:cNvSpPr/>
-          <p:nvPr/>
-        </p:nvSpPr>
-        <p:spPr>
-          <a:xfrm>
-            <a:off x="548640" y="2651760"/>
-            <a:ext cx="5303520" cy="640080"/>
-          </a:xfrm>
-          <a:prstGeom prst="rect">
-            <a:avLst/>
-          </a:prstGeom>
-          <a:noFill/>
-          <a:ln/>
-        </p:spPr>
-        <p:txBody>
-          <a:bodyPr wrap="square" rtlCol="0" anchor="ctr"/>
-          <a:lstStyle/>
-          <a:p>
-            <a:pPr marL="342900" indent="-342900">
-              <a:buSzPct val="100000"/>
-              <a:buChar char="▪"/>
-            </a:pPr>
-            <a:r>
-              <a:rPr lang="en-US" sz="1300" dirty="0">
-                <a:solidFill>
-                  <a:srgbClr val="2A2A2A"/>
-                </a:solidFill>
-                <a:latin typeface="Calibri" pitchFamily="34" charset="0"/>
-                <a:ea typeface="Calibri" pitchFamily="34" charset="-122"/>
-                <a:cs typeface="Calibri" pitchFamily="34" charset="-120"/>
-              </a:rPr>
-              <a:t>Personal safety equipment (e.g. helmets, shin pads, gumshields)</a:t>
-            </a:r>
-            <a:endParaRPr lang="en-US" sz="1300" dirty="0"/>
-          </a:p>
-        </p:txBody>
-      </p:sp>
-      <p:sp>
-        <p:nvSpPr>
-          <p:cNvPr id="9" name="Text 6"/>
-          <p:cNvSpPr/>
-          <p:nvPr/>
-        </p:nvSpPr>
-        <p:spPr>
-          <a:xfrm>
-            <a:off x="6172200" y="1280160"/>
-            <a:ext cx="5303520" cy="640080"/>
-          </a:xfrm>
-          <a:prstGeom prst="rect">
-            <a:avLst/>
-          </a:prstGeom>
-          <a:noFill/>
-          <a:ln/>
-        </p:spPr>
-        <p:txBody>
-          <a:bodyPr wrap="square" rtlCol="0" anchor="ctr"/>
-          <a:lstStyle/>
-          <a:p>
-            <a:pPr marL="342900" indent="-342900">
-              <a:buSzPct val="100000"/>
-              <a:buChar char="▪"/>
-            </a:pPr>
-            <a:r>
-              <a:rPr lang="en-US" sz="1300" dirty="0">
-                <a:solidFill>
-                  <a:srgbClr val="2A2A2A"/>
-                </a:solidFill>
-                <a:latin typeface="Calibri" pitchFamily="34" charset="0"/>
-                <a:ea typeface="Calibri" pitchFamily="34" charset="-122"/>
-                <a:cs typeface="Calibri" pitchFamily="34" charset="-120"/>
-              </a:rPr>
-              <a:t>Care of self and protection from injury</a:t>
-            </a:r>
-            <a:endParaRPr lang="en-US" sz="1300" dirty="0"/>
-          </a:p>
-        </p:txBody>
-      </p:sp>
-      <p:sp>
-        <p:nvSpPr>
-          <p:cNvPr id="10" name="Text 7"/>
-          <p:cNvSpPr/>
-          <p:nvPr/>
-        </p:nvSpPr>
-        <p:spPr>
-          <a:xfrm>
-            <a:off x="6172200" y="1965960"/>
-            <a:ext cx="5303520" cy="640080"/>
-          </a:xfrm>
-          <a:prstGeom prst="rect">
-            <a:avLst/>
-          </a:prstGeom>
-          <a:noFill/>
-          <a:ln/>
-        </p:spPr>
-        <p:txBody>
-          <a:bodyPr wrap="square" rtlCol="0" anchor="ctr"/>
-          <a:lstStyle/>
-          <a:p>
-            <a:pPr marL="342900" indent="-342900">
-              <a:buSzPct val="100000"/>
-              <a:buChar char="▪"/>
-            </a:pPr>
-            <a:r>
-              <a:rPr lang="en-US" sz="1300" dirty="0">
-                <a:solidFill>
-                  <a:srgbClr val="2A2A2A"/>
-                </a:solidFill>
-                <a:latin typeface="Calibri" pitchFamily="34" charset="0"/>
-                <a:ea typeface="Calibri" pitchFamily="34" charset="-122"/>
-                <a:cs typeface="Calibri" pitchFamily="34" charset="-120"/>
-              </a:rPr>
-              <a:t>Rules for team sport participation</a:t>
-            </a:r>
-            <a:endParaRPr lang="en-US" sz="1300" dirty="0"/>
-          </a:p>
-        </p:txBody>
-      </p:sp>
-      <p:sp>
-        <p:nvSpPr>
-          <p:cNvPr id="11" name="Text 8"/>
-          <p:cNvSpPr/>
-          <p:nvPr/>
-        </p:nvSpPr>
-        <p:spPr>
-          <a:xfrm>
-            <a:off x="6172200" y="2651760"/>
-            <a:ext cx="5303520" cy="640080"/>
-          </a:xfrm>
-          <a:prstGeom prst="rect">
-            <a:avLst/>
-          </a:prstGeom>
-          <a:noFill/>
-          <a:ln/>
-        </p:spPr>
-        <p:txBody>
-          <a:bodyPr wrap="square" rtlCol="0" anchor="ctr"/>
-          <a:lstStyle/>
-          <a:p>
-            <a:pPr marL="342900" indent="-342900">
-              <a:buSzPct val="100000"/>
-              <a:buChar char="▪"/>
-            </a:pPr>
-            <a:r>
-              <a:rPr lang="en-US" sz="1300" dirty="0">
-                <a:solidFill>
-                  <a:srgbClr val="2A2A2A"/>
-                </a:solidFill>
-                <a:latin typeface="Calibri" pitchFamily="34" charset="0"/>
-                <a:ea typeface="Calibri" pitchFamily="34" charset="-122"/>
-                <a:cs typeface="Calibri" pitchFamily="34" charset="-120"/>
-              </a:rPr>
-              <a:t>Rules for individual sport participation</a:t>
-            </a:r>
-            <a:endParaRPr lang="en-US" sz="1300" dirty="0"/>
-          </a:p>
-        </p:txBody>
-      </p:sp>
-      <p:sp>
-        <p:nvSpPr>
-          <p:cNvPr id="12" name="Shape 9"/>
+              <a:t>“We are playing five-a-side football on Thursday at the sports hall (4pm-5pm). Rules: standard 5-a-side, rolling subs, no slide tackles. Skills needed: passing accuracy, spatial awareness in a small pitch, and communicating with teammates under pressure since the game moves fast. Safety: shin pads required, check hall floor isn't wet before starting.”</a:t>
+            </a:r>
+            <a:endParaRPr lang="en-US" sz="1200" dirty="0"/>
+          </a:p>
+        </p:txBody>
+      </p:sp>
+      <p:sp>
+        <p:nvSpPr>
+          <p:cNvPr id="14" name="Shape 11"/>
           <p:cNvSpPr/>
           <p:nvPr/>
         </p:nvSpPr>
@@ -6187,7 +7707,7 @@
       </p:sp>
       <p:sp>
         <p:nvSpPr>
-          <p:cNvPr id="13" name="Text 10"/>
+          <p:cNvPr id="15" name="Text 12"/>
           <p:cNvSpPr/>
           <p:nvPr/>
         </p:nvSpPr>
@@ -6226,7 +7746,7 @@
       </p:sp>
       <p:sp>
         <p:nvSpPr>
-          <p:cNvPr id="14" name="Text 11"/>
+          <p:cNvPr id="16" name="Text 13"/>
           <p:cNvSpPr/>
           <p:nvPr/>
         </p:nvSpPr>
@@ -6257,7 +7777,7 @@
                 <a:ea typeface="Calibri" pitchFamily="34" charset="-122"/>
                 <a:cs typeface="Calibri" pitchFamily="34" charset="-120"/>
               </a:rPr>
-              <a:t>Knowledge Hub 3 — Factors to Consider When Planning Activities</a:t>
+              <a:t>Knowledge Hub 2-3 — What a Strong Plan Includes</a:t>
             </a:r>
             <a:endParaRPr lang="en-US" sz="1000" dirty="0"/>
           </a:p>
@@ -6320,8 +7840,8 @@
         </p:nvSpPr>
         <p:spPr>
           <a:xfrm>
-            <a:off x="9418320" y="274320"/>
-            <a:ext cx="2423160" cy="384048"/>
+            <a:off x="9144000" y="274320"/>
+            <a:ext cx="2697480" cy="384048"/>
           </a:xfrm>
           <a:prstGeom prst="roundRect">
             <a:avLst>
@@ -6342,8 +7862,8 @@
         </p:nvSpPr>
         <p:spPr>
           <a:xfrm>
-            <a:off x="9418320" y="274320"/>
-            <a:ext cx="2423160" cy="384048"/>
+            <a:off x="9144000" y="274320"/>
+            <a:ext cx="2697480" cy="384048"/>
           </a:xfrm>
           <a:prstGeom prst="rect">
             <a:avLst/>
@@ -6367,7 +7887,7 @@
                 <a:ea typeface="Calibri" pitchFamily="34" charset="-122"/>
                 <a:cs typeface="Calibri" pitchFamily="34" charset="-120"/>
               </a:rPr>
-              <a:t>A.P2 · A.M2 · A.D2</a:t>
+              <a:t>A.P1 · A.M1 · A.D1</a:t>
             </a:r>
             <a:endParaRPr lang="en-US" sz="1200" dirty="0"/>
           </a:p>
@@ -6406,7 +7926,7 @@
                 <a:ea typeface="Calibri" pitchFamily="34" charset="-122"/>
                 <a:cs typeface="Calibri" pitchFamily="34" charset="-120"/>
               </a:rPr>
-              <a:t>Skills Needed to Participate</a:t>
+              <a:t>Factors to Consider When Planning</a:t>
             </a:r>
             <a:endParaRPr lang="en-US" sz="2600" dirty="0"/>
           </a:p>
@@ -6414,25 +7934,43 @@
       </p:sp>
       <p:sp>
         <p:nvSpPr>
-          <p:cNvPr id="6" name="Shape 3"/>
+          <p:cNvPr id="6" name="Text 3"/>
           <p:cNvSpPr/>
           <p:nvPr/>
         </p:nvSpPr>
         <p:spPr>
           <a:xfrm>
             <a:off x="548640" y="1280160"/>
-            <a:ext cx="11064240" cy="1051560"/>
-          </a:xfrm>
-          <a:prstGeom prst="roundRect">
-            <a:avLst>
-              <a:gd name="adj" fmla="val 5217"/>
-            </a:avLst>
-          </a:prstGeom>
-          <a:solidFill>
-            <a:srgbClr val="E8EEF7"/>
-          </a:solidFill>
-          <a:ln/>
-        </p:spPr>
+            <a:ext cx="5303520" cy="640080"/>
+          </a:xfrm>
+          <a:prstGeom prst="rect">
+            <a:avLst/>
+          </a:prstGeom>
+          <a:noFill/>
+          <a:ln/>
+        </p:spPr>
+        <p:txBody>
+          <a:bodyPr wrap="square" rtlCol="0" anchor="ctr"/>
+          <a:lstStyle/>
+          <a:p>
+            <a:pPr marL="342900" indent="-342900">
+              <a:buSzPct val="100000"/>
+              <a:buChar char="▪"/>
+            </a:pPr>
+            <a:r>
+              <a:rPr lang="en-US" sz="1300" dirty="0">
+                <a:solidFill>
+                  <a:srgbClr val="2A2A2A"/>
+                </a:solidFill>
+                <a:latin typeface="Calibri" pitchFamily="34" charset="0"/>
+                <a:ea typeface="Calibri" pitchFamily="34" charset="-122"/>
+                <a:cs typeface="Calibri" pitchFamily="34" charset="-120"/>
+              </a:rPr>
+              <a:t>Needs of participants and aims of the session</a:t>
+            </a:r>
+            <a:endParaRPr lang="en-US" sz="1300" dirty="0"/>
+          </a:p>
+        </p:txBody>
       </p:sp>
       <p:sp>
         <p:nvSpPr>
@@ -6442,34 +7980,35 @@
         </p:nvSpPr>
         <p:spPr>
           <a:xfrm>
-            <a:off x="822960" y="1389888"/>
-            <a:ext cx="2926080" cy="822960"/>
-          </a:xfrm>
-          <a:prstGeom prst="rect">
-            <a:avLst/>
-          </a:prstGeom>
-          <a:noFill/>
-          <a:ln/>
-        </p:spPr>
-        <p:txBody>
-          <a:bodyPr wrap="square" rtlCol="0" anchor="ctr"/>
-          <a:lstStyle/>
-          <a:p>
-            <a:pPr indent="0" marL="0">
-              <a:buNone/>
-            </a:pPr>
-            <a:r>
-              <a:rPr lang="en-US" sz="1500" b="1" dirty="0">
-                <a:solidFill>
-                  <a:srgbClr val="122952"/>
-                </a:solidFill>
-                <a:latin typeface="Calibri" pitchFamily="34" charset="0"/>
-                <a:ea typeface="Calibri" pitchFamily="34" charset="-122"/>
-                <a:cs typeface="Calibri" pitchFamily="34" charset="-120"/>
-              </a:rPr>
-              <a:t>Individual sport</a:t>
-            </a:r>
-            <a:endParaRPr lang="en-US" sz="1500" dirty="0"/>
+            <a:off x="548640" y="1965960"/>
+            <a:ext cx="5303520" cy="640080"/>
+          </a:xfrm>
+          <a:prstGeom prst="rect">
+            <a:avLst/>
+          </a:prstGeom>
+          <a:noFill/>
+          <a:ln/>
+        </p:spPr>
+        <p:txBody>
+          <a:bodyPr wrap="square" rtlCol="0" anchor="ctr"/>
+          <a:lstStyle/>
+          <a:p>
+            <a:pPr marL="342900" indent="-342900">
+              <a:buSzPct val="100000"/>
+              <a:buChar char="▪"/>
+            </a:pPr>
+            <a:r>
+              <a:rPr lang="en-US" sz="1300" dirty="0">
+                <a:solidFill>
+                  <a:srgbClr val="2A2A2A"/>
+                </a:solidFill>
+                <a:latin typeface="Calibri" pitchFamily="34" charset="0"/>
+                <a:ea typeface="Calibri" pitchFamily="34" charset="-122"/>
+                <a:cs typeface="Calibri" pitchFamily="34" charset="-120"/>
+              </a:rPr>
+              <a:t>Access — location, timing, costs, participant ability</a:t>
+            </a:r>
+            <a:endParaRPr lang="en-US" sz="1300" dirty="0"/>
           </a:p>
         </p:txBody>
       </p:sp>
@@ -6481,21 +8020,22 @@
         </p:nvSpPr>
         <p:spPr>
           <a:xfrm>
-            <a:off x="3840480" y="1389888"/>
-            <a:ext cx="7589520" cy="822960"/>
-          </a:xfrm>
-          <a:prstGeom prst="rect">
-            <a:avLst/>
-          </a:prstGeom>
-          <a:noFill/>
-          <a:ln/>
-        </p:spPr>
-        <p:txBody>
-          <a:bodyPr wrap="square" rtlCol="0" anchor="ctr"/>
-          <a:lstStyle/>
-          <a:p>
-            <a:pPr indent="0" marL="0">
-              <a:buNone/>
+            <a:off x="548640" y="2651760"/>
+            <a:ext cx="5303520" cy="640080"/>
+          </a:xfrm>
+          <a:prstGeom prst="rect">
+            <a:avLst/>
+          </a:prstGeom>
+          <a:noFill/>
+          <a:ln/>
+        </p:spPr>
+        <p:txBody>
+          <a:bodyPr wrap="square" rtlCol="0" anchor="ctr"/>
+          <a:lstStyle/>
+          <a:p>
+            <a:pPr marL="342900" indent="-342900">
+              <a:buSzPct val="100000"/>
+              <a:buChar char="▪"/>
             </a:pPr>
             <a:r>
               <a:rPr lang="en-US" sz="1300" dirty="0">
@@ -6506,7 +8046,7 @@
                 <a:ea typeface="Calibri" pitchFamily="34" charset="-122"/>
                 <a:cs typeface="Calibri" pitchFamily="34" charset="-120"/>
               </a:rPr>
-              <a:t>Resilience, determination, organisation, self-esteem, personal development</a:t>
+              <a:t>Personal safety equipment (e.g. helmets, shin pads, gumshields)</a:t>
             </a:r>
             <a:endParaRPr lang="en-US" sz="1300" dirty="0"/>
           </a:p>
@@ -6514,25 +8054,43 @@
       </p:sp>
       <p:sp>
         <p:nvSpPr>
-          <p:cNvPr id="9" name="Shape 6"/>
-          <p:cNvSpPr/>
-          <p:nvPr/>
-        </p:nvSpPr>
-        <p:spPr>
-          <a:xfrm>
-            <a:off x="548640" y="2468880"/>
-            <a:ext cx="11064240" cy="1051560"/>
-          </a:xfrm>
-          <a:prstGeom prst="roundRect">
-            <a:avLst>
-              <a:gd name="adj" fmla="val 5217"/>
-            </a:avLst>
-          </a:prstGeom>
-          <a:solidFill>
-            <a:srgbClr val="E8EEF7"/>
-          </a:solidFill>
-          <a:ln/>
-        </p:spPr>
+          <p:cNvPr id="9" name="Text 6"/>
+          <p:cNvSpPr/>
+          <p:nvPr/>
+        </p:nvSpPr>
+        <p:spPr>
+          <a:xfrm>
+            <a:off x="6172200" y="1280160"/>
+            <a:ext cx="5303520" cy="640080"/>
+          </a:xfrm>
+          <a:prstGeom prst="rect">
+            <a:avLst/>
+          </a:prstGeom>
+          <a:noFill/>
+          <a:ln/>
+        </p:spPr>
+        <p:txBody>
+          <a:bodyPr wrap="square" rtlCol="0" anchor="ctr"/>
+          <a:lstStyle/>
+          <a:p>
+            <a:pPr marL="342900" indent="-342900">
+              <a:buSzPct val="100000"/>
+              <a:buChar char="▪"/>
+            </a:pPr>
+            <a:r>
+              <a:rPr lang="en-US" sz="1300" dirty="0">
+                <a:solidFill>
+                  <a:srgbClr val="2A2A2A"/>
+                </a:solidFill>
+                <a:latin typeface="Calibri" pitchFamily="34" charset="0"/>
+                <a:ea typeface="Calibri" pitchFamily="34" charset="-122"/>
+                <a:cs typeface="Calibri" pitchFamily="34" charset="-120"/>
+              </a:rPr>
+              <a:t>Care of self and protection from injury</a:t>
+            </a:r>
+            <a:endParaRPr lang="en-US" sz="1300" dirty="0"/>
+          </a:p>
+        </p:txBody>
       </p:sp>
       <p:sp>
         <p:nvSpPr>
@@ -6542,34 +8100,35 @@
         </p:nvSpPr>
         <p:spPr>
           <a:xfrm>
-            <a:off x="822960" y="2578608"/>
-            <a:ext cx="2926080" cy="822960"/>
-          </a:xfrm>
-          <a:prstGeom prst="rect">
-            <a:avLst/>
-          </a:prstGeom>
-          <a:noFill/>
-          <a:ln/>
-        </p:spPr>
-        <p:txBody>
-          <a:bodyPr wrap="square" rtlCol="0" anchor="ctr"/>
-          <a:lstStyle/>
-          <a:p>
-            <a:pPr indent="0" marL="0">
-              <a:buNone/>
-            </a:pPr>
-            <a:r>
-              <a:rPr lang="en-US" sz="1500" b="1" dirty="0">
-                <a:solidFill>
-                  <a:srgbClr val="122952"/>
-                </a:solidFill>
-                <a:latin typeface="Calibri" pitchFamily="34" charset="0"/>
-                <a:ea typeface="Calibri" pitchFamily="34" charset="-122"/>
-                <a:cs typeface="Calibri" pitchFamily="34" charset="-120"/>
-              </a:rPr>
-              <a:t>Competitive team play</a:t>
-            </a:r>
-            <a:endParaRPr lang="en-US" sz="1500" dirty="0"/>
+            <a:off x="6172200" y="1965960"/>
+            <a:ext cx="5303520" cy="640080"/>
+          </a:xfrm>
+          <a:prstGeom prst="rect">
+            <a:avLst/>
+          </a:prstGeom>
+          <a:noFill/>
+          <a:ln/>
+        </p:spPr>
+        <p:txBody>
+          <a:bodyPr wrap="square" rtlCol="0" anchor="ctr"/>
+          <a:lstStyle/>
+          <a:p>
+            <a:pPr marL="342900" indent="-342900">
+              <a:buSzPct val="100000"/>
+              <a:buChar char="▪"/>
+            </a:pPr>
+            <a:r>
+              <a:rPr lang="en-US" sz="1300" dirty="0">
+                <a:solidFill>
+                  <a:srgbClr val="2A2A2A"/>
+                </a:solidFill>
+                <a:latin typeface="Calibri" pitchFamily="34" charset="0"/>
+                <a:ea typeface="Calibri" pitchFamily="34" charset="-122"/>
+                <a:cs typeface="Calibri" pitchFamily="34" charset="-120"/>
+              </a:rPr>
+              <a:t>Rules for team sport participation</a:t>
+            </a:r>
+            <a:endParaRPr lang="en-US" sz="1300" dirty="0"/>
           </a:p>
         </p:txBody>
       </p:sp>
@@ -6581,21 +8140,22 @@
         </p:nvSpPr>
         <p:spPr>
           <a:xfrm>
-            <a:off x="3840480" y="2578608"/>
-            <a:ext cx="7589520" cy="822960"/>
-          </a:xfrm>
-          <a:prstGeom prst="rect">
-            <a:avLst/>
-          </a:prstGeom>
-          <a:noFill/>
-          <a:ln/>
-        </p:spPr>
-        <p:txBody>
-          <a:bodyPr wrap="square" rtlCol="0" anchor="ctr"/>
-          <a:lstStyle/>
-          <a:p>
-            <a:pPr indent="0" marL="0">
-              <a:buNone/>
+            <a:off x="6172200" y="2651760"/>
+            <a:ext cx="5303520" cy="640080"/>
+          </a:xfrm>
+          <a:prstGeom prst="rect">
+            <a:avLst/>
+          </a:prstGeom>
+          <a:noFill/>
+          <a:ln/>
+        </p:spPr>
+        <p:txBody>
+          <a:bodyPr wrap="square" rtlCol="0" anchor="ctr"/>
+          <a:lstStyle/>
+          <a:p>
+            <a:pPr marL="342900" indent="-342900">
+              <a:buSzPct val="100000"/>
+              <a:buChar char="▪"/>
             </a:pPr>
             <a:r>
               <a:rPr lang="en-US" sz="1300" dirty="0">
@@ -6606,7 +8166,7 @@
                 <a:ea typeface="Calibri" pitchFamily="34" charset="-122"/>
                 <a:cs typeface="Calibri" pitchFamily="34" charset="-120"/>
               </a:rPr>
-              <a:t>Playing by the rules, respecting others, communication, tolerance, resilience</a:t>
+              <a:t>Rules for individual sport participation</a:t>
             </a:r>
             <a:endParaRPr lang="en-US" sz="1300" dirty="0"/>
           </a:p>
@@ -6615,106 +8175,6 @@
       <p:sp>
         <p:nvSpPr>
           <p:cNvPr id="12" name="Shape 9"/>
-          <p:cNvSpPr/>
-          <p:nvPr/>
-        </p:nvSpPr>
-        <p:spPr>
-          <a:xfrm>
-            <a:off x="548640" y="3657600"/>
-            <a:ext cx="11064240" cy="1051560"/>
-          </a:xfrm>
-          <a:prstGeom prst="roundRect">
-            <a:avLst>
-              <a:gd name="adj" fmla="val 5217"/>
-            </a:avLst>
-          </a:prstGeom>
-          <a:solidFill>
-            <a:srgbClr val="E8EEF7"/>
-          </a:solidFill>
-          <a:ln/>
-        </p:spPr>
-      </p:sp>
-      <p:sp>
-        <p:nvSpPr>
-          <p:cNvPr id="13" name="Text 10"/>
-          <p:cNvSpPr/>
-          <p:nvPr/>
-        </p:nvSpPr>
-        <p:spPr>
-          <a:xfrm>
-            <a:off x="822960" y="3767328"/>
-            <a:ext cx="2926080" cy="822960"/>
-          </a:xfrm>
-          <a:prstGeom prst="rect">
-            <a:avLst/>
-          </a:prstGeom>
-          <a:noFill/>
-          <a:ln/>
-        </p:spPr>
-        <p:txBody>
-          <a:bodyPr wrap="square" rtlCol="0" anchor="ctr"/>
-          <a:lstStyle/>
-          <a:p>
-            <a:pPr indent="0" marL="0">
-              <a:buNone/>
-            </a:pPr>
-            <a:r>
-              <a:rPr lang="en-US" sz="1500" b="1" dirty="0">
-                <a:solidFill>
-                  <a:srgbClr val="122952"/>
-                </a:solidFill>
-                <a:latin typeface="Calibri" pitchFamily="34" charset="0"/>
-                <a:ea typeface="Calibri" pitchFamily="34" charset="-122"/>
-                <a:cs typeface="Calibri" pitchFamily="34" charset="-120"/>
-              </a:rPr>
-              <a:t>Adventurous activities</a:t>
-            </a:r>
-            <a:endParaRPr lang="en-US" sz="1500" dirty="0"/>
-          </a:p>
-        </p:txBody>
-      </p:sp>
-      <p:sp>
-        <p:nvSpPr>
-          <p:cNvPr id="14" name="Text 11"/>
-          <p:cNvSpPr/>
-          <p:nvPr/>
-        </p:nvSpPr>
-        <p:spPr>
-          <a:xfrm>
-            <a:off x="3840480" y="3767328"/>
-            <a:ext cx="7589520" cy="822960"/>
-          </a:xfrm>
-          <a:prstGeom prst="rect">
-            <a:avLst/>
-          </a:prstGeom>
-          <a:noFill/>
-          <a:ln/>
-        </p:spPr>
-        <p:txBody>
-          <a:bodyPr wrap="square" rtlCol="0" anchor="ctr"/>
-          <a:lstStyle/>
-          <a:p>
-            <a:pPr indent="0" marL="0">
-              <a:buNone/>
-            </a:pPr>
-            <a:r>
-              <a:rPr lang="en-US" sz="1300" dirty="0">
-                <a:solidFill>
-                  <a:srgbClr val="2A2A2A"/>
-                </a:solidFill>
-                <a:latin typeface="Calibri" pitchFamily="34" charset="0"/>
-                <a:ea typeface="Calibri" pitchFamily="34" charset="-122"/>
-                <a:cs typeface="Calibri" pitchFamily="34" charset="-120"/>
-              </a:rPr>
-              <a:t>Perseverance, motivation, adaptability</a:t>
-            </a:r>
-            <a:endParaRPr lang="en-US" sz="1300" dirty="0"/>
-          </a:p>
-        </p:txBody>
-      </p:sp>
-      <p:sp>
-        <p:nvSpPr>
-          <p:cNvPr id="15" name="Shape 12"/>
           <p:cNvSpPr/>
           <p:nvPr/>
         </p:nvSpPr>
@@ -6734,7 +8194,7 @@
       </p:sp>
       <p:sp>
         <p:nvSpPr>
-          <p:cNvPr id="16" name="Text 13"/>
+          <p:cNvPr id="13" name="Text 10"/>
           <p:cNvSpPr/>
           <p:nvPr/>
         </p:nvSpPr>
@@ -6773,7 +8233,7 @@
       </p:sp>
       <p:sp>
         <p:nvSpPr>
-          <p:cNvPr id="17" name="Text 14"/>
+          <p:cNvPr id="14" name="Text 11"/>
           <p:cNvSpPr/>
           <p:nvPr/>
         </p:nvSpPr>
@@ -6804,7 +8264,7 @@
                 <a:ea typeface="Calibri" pitchFamily="34" charset="-122"/>
                 <a:cs typeface="Calibri" pitchFamily="34" charset="-120"/>
               </a:rPr>
-              <a:t>Knowledge Hub 4 — Skills Needed to Participate</a:t>
+              <a:t>Knowledge Hub 3 — Factors to Consider When Planning Activities</a:t>
             </a:r>
             <a:endParaRPr lang="en-US" sz="1000" dirty="0"/>
           </a:p>
@@ -6835,130 +8295,476 @@
           <a:chExt cx="0" cy="0"/>
         </a:xfrm>
       </p:grpSpPr>
-      <p:sp>
-        <p:nvSpPr>
-          <p:cNvPr id="2" name="Shape 0"/>
-          <p:cNvSpPr/>
-          <p:nvPr/>
-        </p:nvSpPr>
-        <p:spPr>
-          <a:xfrm>
-            <a:off x="0" y="0"/>
-            <a:ext cx="12188952" cy="6858000"/>
-          </a:xfrm>
-          <a:prstGeom prst="rect">
-            <a:avLst/>
+      <p:pic>
+        <p:nvPicPr>
+          <p:cNvPr id="2" name="Image 0" descr="preencoded.png">    </p:cNvPr>
+          <p:cNvPicPr>
+            <a:picLocks noChangeAspect="1"/>
+          </p:cNvPicPr>
+          <p:nvPr/>
+        </p:nvPicPr>
+        <p:blipFill>
+          <a:blip r:embed="rId1"/>
+          <a:stretch>
+            <a:fillRect/>
+          </a:stretch>
+        </p:blipFill>
+        <p:spPr>
+          <a:xfrm>
+            <a:off x="11109960" y="228600"/>
+            <a:ext cx="777240" cy="548640"/>
+          </a:xfrm>
+          <a:prstGeom prst="rect">
+            <a:avLst/>
+          </a:prstGeom>
+        </p:spPr>
+      </p:pic>
+      <p:sp>
+        <p:nvSpPr>
+          <p:cNvPr id="3" name="Shape 0"/>
+          <p:cNvSpPr/>
+          <p:nvPr/>
+        </p:nvSpPr>
+        <p:spPr>
+          <a:xfrm>
+            <a:off x="9144000" y="274320"/>
+            <a:ext cx="2697480" cy="384048"/>
+          </a:xfrm>
+          <a:prstGeom prst="roundRect">
+            <a:avLst>
+              <a:gd name="adj" fmla="val 19048"/>
+            </a:avLst>
           </a:prstGeom>
           <a:solidFill>
-            <a:srgbClr val="122952"/>
+            <a:srgbClr val="C8A951"/>
           </a:solidFill>
           <a:ln/>
         </p:spPr>
       </p:sp>
       <p:sp>
         <p:nvSpPr>
-          <p:cNvPr id="3" name="Text 1"/>
-          <p:cNvSpPr/>
-          <p:nvPr/>
-        </p:nvSpPr>
-        <p:spPr>
-          <a:xfrm>
-            <a:off x="731520" y="1828800"/>
-            <a:ext cx="2743200" cy="2286000"/>
-          </a:xfrm>
-          <a:prstGeom prst="rect">
-            <a:avLst/>
-          </a:prstGeom>
-          <a:noFill/>
-          <a:ln/>
-        </p:spPr>
-        <p:txBody>
-          <a:bodyPr wrap="square" rtlCol="0" anchor="ctr"/>
-          <a:lstStyle/>
-          <a:p>
-            <a:pPr indent="0" marL="0">
-              <a:buNone/>
-            </a:pPr>
-            <a:r>
-              <a:rPr lang="en-US" sz="14000" b="1" dirty="0">
-                <a:solidFill>
-                  <a:srgbClr val="26538A"/>
-                </a:solidFill>
-                <a:latin typeface="Calibri" pitchFamily="34" charset="0"/>
-                <a:ea typeface="Calibri" pitchFamily="34" charset="-122"/>
-                <a:cs typeface="Calibri" pitchFamily="34" charset="-120"/>
-              </a:rPr>
-              <a:t>B</a:t>
-            </a:r>
-            <a:endParaRPr lang="en-US" sz="14000" dirty="0"/>
-          </a:p>
-        </p:txBody>
-      </p:sp>
-      <p:sp>
-        <p:nvSpPr>
-          <p:cNvPr id="4" name="Text 2"/>
-          <p:cNvSpPr/>
-          <p:nvPr/>
-        </p:nvSpPr>
-        <p:spPr>
-          <a:xfrm>
-            <a:off x="3840480" y="2377440"/>
-            <a:ext cx="7589520" cy="548640"/>
-          </a:xfrm>
-          <a:prstGeom prst="rect">
-            <a:avLst/>
-          </a:prstGeom>
-          <a:noFill/>
-          <a:ln/>
-        </p:spPr>
-        <p:txBody>
-          <a:bodyPr wrap="square" rtlCol="0" anchor="ctr"/>
-          <a:lstStyle/>
-          <a:p>
-            <a:pPr indent="0" marL="0">
-              <a:buNone/>
-            </a:pPr>
-            <a:r>
-              <a:rPr lang="en-US" sz="2000" b="1" dirty="0">
-                <a:solidFill>
-                  <a:srgbClr val="C8A951"/>
-                </a:solidFill>
-                <a:latin typeface="Calibri" pitchFamily="34" charset="0"/>
-                <a:ea typeface="Calibri" pitchFamily="34" charset="-122"/>
-                <a:cs typeface="Calibri" pitchFamily="34" charset="-120"/>
-              </a:rPr>
-              <a:t>Learning Aim B</a:t>
-            </a:r>
-            <a:endParaRPr lang="en-US" sz="2000" dirty="0"/>
-          </a:p>
-        </p:txBody>
-      </p:sp>
-      <p:sp>
-        <p:nvSpPr>
-          <p:cNvPr id="5" name="Text 3"/>
-          <p:cNvSpPr/>
-          <p:nvPr/>
-        </p:nvSpPr>
-        <p:spPr>
-          <a:xfrm>
-            <a:off x="3840480" y="2926080"/>
-            <a:ext cx="7589520" cy="1005840"/>
-          </a:xfrm>
-          <a:prstGeom prst="rect">
-            <a:avLst/>
-          </a:prstGeom>
-          <a:noFill/>
-          <a:ln/>
-        </p:spPr>
-        <p:txBody>
-          <a:bodyPr wrap="square" rtlCol="0" anchor="ctr"/>
-          <a:lstStyle/>
-          <a:p>
-            <a:pPr indent="0" marL="0">
-              <a:buNone/>
-            </a:pPr>
-            <a:r>
-              <a:rPr lang="en-US" sz="3000" b="1" dirty="0">
+          <p:cNvPr id="4" name="Text 1"/>
+          <p:cNvSpPr/>
+          <p:nvPr/>
+        </p:nvSpPr>
+        <p:spPr>
+          <a:xfrm>
+            <a:off x="9144000" y="274320"/>
+            <a:ext cx="2697480" cy="384048"/>
+          </a:xfrm>
+          <a:prstGeom prst="rect">
+            <a:avLst/>
+          </a:prstGeom>
+          <a:noFill/>
+          <a:ln/>
+        </p:spPr>
+        <p:txBody>
+          <a:bodyPr wrap="square" lIns="0" tIns="0" rIns="0" bIns="0" rtlCol="0" anchor="ctr"/>
+          <a:lstStyle/>
+          <a:p>
+            <a:pPr algn="ctr" indent="0" marL="0">
+              <a:buNone/>
+            </a:pPr>
+            <a:r>
+              <a:rPr lang="en-US" sz="1200" b="1" dirty="0">
+                <a:solidFill>
+                  <a:srgbClr val="122952"/>
+                </a:solidFill>
+                <a:latin typeface="Calibri" pitchFamily="34" charset="0"/>
+                <a:ea typeface="Calibri" pitchFamily="34" charset="-122"/>
+                <a:cs typeface="Calibri" pitchFamily="34" charset="-120"/>
+              </a:rPr>
+              <a:t>A.P2 · A.M2 · A.D2</a:t>
+            </a:r>
+            <a:endParaRPr lang="en-US" sz="1200" dirty="0"/>
+          </a:p>
+        </p:txBody>
+      </p:sp>
+      <p:sp>
+        <p:nvSpPr>
+          <p:cNvPr id="5" name="Text 2"/>
+          <p:cNvSpPr/>
+          <p:nvPr/>
+        </p:nvSpPr>
+        <p:spPr>
+          <a:xfrm>
+            <a:off x="548640" y="320040"/>
+            <a:ext cx="8869680" cy="640080"/>
+          </a:xfrm>
+          <a:prstGeom prst="rect">
+            <a:avLst/>
+          </a:prstGeom>
+          <a:noFill/>
+          <a:ln/>
+        </p:spPr>
+        <p:txBody>
+          <a:bodyPr wrap="square" rtlCol="0" anchor="ctr"/>
+          <a:lstStyle/>
+          <a:p>
+            <a:pPr indent="0" marL="0">
+              <a:buNone/>
+            </a:pPr>
+            <a:r>
+              <a:rPr lang="en-US" sz="2600" b="1" dirty="0">
+                <a:solidFill>
+                  <a:srgbClr val="122952"/>
+                </a:solidFill>
+                <a:latin typeface="Calibri" pitchFamily="34" charset="0"/>
+                <a:ea typeface="Calibri" pitchFamily="34" charset="-122"/>
+                <a:cs typeface="Calibri" pitchFamily="34" charset="-120"/>
+              </a:rPr>
+              <a:t>Skills Needed to Participate</a:t>
+            </a:r>
+            <a:endParaRPr lang="en-US" sz="2600" dirty="0"/>
+          </a:p>
+        </p:txBody>
+      </p:sp>
+      <p:sp>
+        <p:nvSpPr>
+          <p:cNvPr id="6" name="Shape 3"/>
+          <p:cNvSpPr/>
+          <p:nvPr/>
+        </p:nvSpPr>
+        <p:spPr>
+          <a:xfrm>
+            <a:off x="548640" y="1280160"/>
+            <a:ext cx="11064240" cy="1051560"/>
+          </a:xfrm>
+          <a:prstGeom prst="roundRect">
+            <a:avLst>
+              <a:gd name="adj" fmla="val 5217"/>
+            </a:avLst>
+          </a:prstGeom>
+          <a:solidFill>
+            <a:srgbClr val="E8EEF7"/>
+          </a:solidFill>
+          <a:ln/>
+        </p:spPr>
+      </p:sp>
+      <p:sp>
+        <p:nvSpPr>
+          <p:cNvPr id="7" name="Text 4"/>
+          <p:cNvSpPr/>
+          <p:nvPr/>
+        </p:nvSpPr>
+        <p:spPr>
+          <a:xfrm>
+            <a:off x="822960" y="1389888"/>
+            <a:ext cx="2926080" cy="822960"/>
+          </a:xfrm>
+          <a:prstGeom prst="rect">
+            <a:avLst/>
+          </a:prstGeom>
+          <a:noFill/>
+          <a:ln/>
+        </p:spPr>
+        <p:txBody>
+          <a:bodyPr wrap="square" rtlCol="0" anchor="ctr"/>
+          <a:lstStyle/>
+          <a:p>
+            <a:pPr indent="0" marL="0">
+              <a:buNone/>
+            </a:pPr>
+            <a:r>
+              <a:rPr lang="en-US" sz="1500" b="1" dirty="0">
+                <a:solidFill>
+                  <a:srgbClr val="122952"/>
+                </a:solidFill>
+                <a:latin typeface="Calibri" pitchFamily="34" charset="0"/>
+                <a:ea typeface="Calibri" pitchFamily="34" charset="-122"/>
+                <a:cs typeface="Calibri" pitchFamily="34" charset="-120"/>
+              </a:rPr>
+              <a:t>Individual sport</a:t>
+            </a:r>
+            <a:endParaRPr lang="en-US" sz="1500" dirty="0"/>
+          </a:p>
+        </p:txBody>
+      </p:sp>
+      <p:sp>
+        <p:nvSpPr>
+          <p:cNvPr id="8" name="Text 5"/>
+          <p:cNvSpPr/>
+          <p:nvPr/>
+        </p:nvSpPr>
+        <p:spPr>
+          <a:xfrm>
+            <a:off x="3840480" y="1389888"/>
+            <a:ext cx="7589520" cy="822960"/>
+          </a:xfrm>
+          <a:prstGeom prst="rect">
+            <a:avLst/>
+          </a:prstGeom>
+          <a:noFill/>
+          <a:ln/>
+        </p:spPr>
+        <p:txBody>
+          <a:bodyPr wrap="square" rtlCol="0" anchor="ctr"/>
+          <a:lstStyle/>
+          <a:p>
+            <a:pPr indent="0" marL="0">
+              <a:buNone/>
+            </a:pPr>
+            <a:r>
+              <a:rPr lang="en-US" sz="1300" dirty="0">
+                <a:solidFill>
+                  <a:srgbClr val="2A2A2A"/>
+                </a:solidFill>
+                <a:latin typeface="Calibri" pitchFamily="34" charset="0"/>
+                <a:ea typeface="Calibri" pitchFamily="34" charset="-122"/>
+                <a:cs typeface="Calibri" pitchFamily="34" charset="-120"/>
+              </a:rPr>
+              <a:t>Resilience, determination, organisation, self-esteem, personal development</a:t>
+            </a:r>
+            <a:endParaRPr lang="en-US" sz="1300" dirty="0"/>
+          </a:p>
+        </p:txBody>
+      </p:sp>
+      <p:sp>
+        <p:nvSpPr>
+          <p:cNvPr id="9" name="Shape 6"/>
+          <p:cNvSpPr/>
+          <p:nvPr/>
+        </p:nvSpPr>
+        <p:spPr>
+          <a:xfrm>
+            <a:off x="548640" y="2468880"/>
+            <a:ext cx="11064240" cy="1051560"/>
+          </a:xfrm>
+          <a:prstGeom prst="roundRect">
+            <a:avLst>
+              <a:gd name="adj" fmla="val 5217"/>
+            </a:avLst>
+          </a:prstGeom>
+          <a:solidFill>
+            <a:srgbClr val="E8EEF7"/>
+          </a:solidFill>
+          <a:ln/>
+        </p:spPr>
+      </p:sp>
+      <p:sp>
+        <p:nvSpPr>
+          <p:cNvPr id="10" name="Text 7"/>
+          <p:cNvSpPr/>
+          <p:nvPr/>
+        </p:nvSpPr>
+        <p:spPr>
+          <a:xfrm>
+            <a:off x="822960" y="2578608"/>
+            <a:ext cx="2926080" cy="822960"/>
+          </a:xfrm>
+          <a:prstGeom prst="rect">
+            <a:avLst/>
+          </a:prstGeom>
+          <a:noFill/>
+          <a:ln/>
+        </p:spPr>
+        <p:txBody>
+          <a:bodyPr wrap="square" rtlCol="0" anchor="ctr"/>
+          <a:lstStyle/>
+          <a:p>
+            <a:pPr indent="0" marL="0">
+              <a:buNone/>
+            </a:pPr>
+            <a:r>
+              <a:rPr lang="en-US" sz="1500" b="1" dirty="0">
+                <a:solidFill>
+                  <a:srgbClr val="122952"/>
+                </a:solidFill>
+                <a:latin typeface="Calibri" pitchFamily="34" charset="0"/>
+                <a:ea typeface="Calibri" pitchFamily="34" charset="-122"/>
+                <a:cs typeface="Calibri" pitchFamily="34" charset="-120"/>
+              </a:rPr>
+              <a:t>Competitive team play</a:t>
+            </a:r>
+            <a:endParaRPr lang="en-US" sz="1500" dirty="0"/>
+          </a:p>
+        </p:txBody>
+      </p:sp>
+      <p:sp>
+        <p:nvSpPr>
+          <p:cNvPr id="11" name="Text 8"/>
+          <p:cNvSpPr/>
+          <p:nvPr/>
+        </p:nvSpPr>
+        <p:spPr>
+          <a:xfrm>
+            <a:off x="3840480" y="2578608"/>
+            <a:ext cx="7589520" cy="822960"/>
+          </a:xfrm>
+          <a:prstGeom prst="rect">
+            <a:avLst/>
+          </a:prstGeom>
+          <a:noFill/>
+          <a:ln/>
+        </p:spPr>
+        <p:txBody>
+          <a:bodyPr wrap="square" rtlCol="0" anchor="ctr"/>
+          <a:lstStyle/>
+          <a:p>
+            <a:pPr indent="0" marL="0">
+              <a:buNone/>
+            </a:pPr>
+            <a:r>
+              <a:rPr lang="en-US" sz="1300" dirty="0">
+                <a:solidFill>
+                  <a:srgbClr val="2A2A2A"/>
+                </a:solidFill>
+                <a:latin typeface="Calibri" pitchFamily="34" charset="0"/>
+                <a:ea typeface="Calibri" pitchFamily="34" charset="-122"/>
+                <a:cs typeface="Calibri" pitchFamily="34" charset="-120"/>
+              </a:rPr>
+              <a:t>Playing by the rules, respecting others, communication, tolerance, resilience</a:t>
+            </a:r>
+            <a:endParaRPr lang="en-US" sz="1300" dirty="0"/>
+          </a:p>
+        </p:txBody>
+      </p:sp>
+      <p:sp>
+        <p:nvSpPr>
+          <p:cNvPr id="12" name="Shape 9"/>
+          <p:cNvSpPr/>
+          <p:nvPr/>
+        </p:nvSpPr>
+        <p:spPr>
+          <a:xfrm>
+            <a:off x="548640" y="3657600"/>
+            <a:ext cx="11064240" cy="1051560"/>
+          </a:xfrm>
+          <a:prstGeom prst="roundRect">
+            <a:avLst>
+              <a:gd name="adj" fmla="val 5217"/>
+            </a:avLst>
+          </a:prstGeom>
+          <a:solidFill>
+            <a:srgbClr val="E8EEF7"/>
+          </a:solidFill>
+          <a:ln/>
+        </p:spPr>
+      </p:sp>
+      <p:sp>
+        <p:nvSpPr>
+          <p:cNvPr id="13" name="Text 10"/>
+          <p:cNvSpPr/>
+          <p:nvPr/>
+        </p:nvSpPr>
+        <p:spPr>
+          <a:xfrm>
+            <a:off x="822960" y="3767328"/>
+            <a:ext cx="2926080" cy="822960"/>
+          </a:xfrm>
+          <a:prstGeom prst="rect">
+            <a:avLst/>
+          </a:prstGeom>
+          <a:noFill/>
+          <a:ln/>
+        </p:spPr>
+        <p:txBody>
+          <a:bodyPr wrap="square" rtlCol="0" anchor="ctr"/>
+          <a:lstStyle/>
+          <a:p>
+            <a:pPr indent="0" marL="0">
+              <a:buNone/>
+            </a:pPr>
+            <a:r>
+              <a:rPr lang="en-US" sz="1500" b="1" dirty="0">
+                <a:solidFill>
+                  <a:srgbClr val="122952"/>
+                </a:solidFill>
+                <a:latin typeface="Calibri" pitchFamily="34" charset="0"/>
+                <a:ea typeface="Calibri" pitchFamily="34" charset="-122"/>
+                <a:cs typeface="Calibri" pitchFamily="34" charset="-120"/>
+              </a:rPr>
+              <a:t>Adventurous activities</a:t>
+            </a:r>
+            <a:endParaRPr lang="en-US" sz="1500" dirty="0"/>
+          </a:p>
+        </p:txBody>
+      </p:sp>
+      <p:sp>
+        <p:nvSpPr>
+          <p:cNvPr id="14" name="Text 11"/>
+          <p:cNvSpPr/>
+          <p:nvPr/>
+        </p:nvSpPr>
+        <p:spPr>
+          <a:xfrm>
+            <a:off x="3840480" y="3767328"/>
+            <a:ext cx="7589520" cy="822960"/>
+          </a:xfrm>
+          <a:prstGeom prst="rect">
+            <a:avLst/>
+          </a:prstGeom>
+          <a:noFill/>
+          <a:ln/>
+        </p:spPr>
+        <p:txBody>
+          <a:bodyPr wrap="square" rtlCol="0" anchor="ctr"/>
+          <a:lstStyle/>
+          <a:p>
+            <a:pPr indent="0" marL="0">
+              <a:buNone/>
+            </a:pPr>
+            <a:r>
+              <a:rPr lang="en-US" sz="1300" dirty="0">
+                <a:solidFill>
+                  <a:srgbClr val="2A2A2A"/>
+                </a:solidFill>
+                <a:latin typeface="Calibri" pitchFamily="34" charset="0"/>
+                <a:ea typeface="Calibri" pitchFamily="34" charset="-122"/>
+                <a:cs typeface="Calibri" pitchFamily="34" charset="-120"/>
+              </a:rPr>
+              <a:t>Perseverance, motivation, adaptability</a:t>
+            </a:r>
+            <a:endParaRPr lang="en-US" sz="1300" dirty="0"/>
+          </a:p>
+        </p:txBody>
+      </p:sp>
+      <p:sp>
+        <p:nvSpPr>
+          <p:cNvPr id="15" name="Shape 12"/>
+          <p:cNvSpPr/>
+          <p:nvPr/>
+        </p:nvSpPr>
+        <p:spPr>
+          <a:xfrm>
+            <a:off x="0" y="6537960"/>
+            <a:ext cx="12188952" cy="320040"/>
+          </a:xfrm>
+          <a:prstGeom prst="rect">
+            <a:avLst/>
+          </a:prstGeom>
+          <a:solidFill>
+            <a:srgbClr val="1B3A6B"/>
+          </a:solidFill>
+          <a:ln/>
+        </p:spPr>
+      </p:sp>
+      <p:sp>
+        <p:nvSpPr>
+          <p:cNvPr id="16" name="Text 13"/>
+          <p:cNvSpPr/>
+          <p:nvPr/>
+        </p:nvSpPr>
+        <p:spPr>
+          <a:xfrm>
+            <a:off x="274320" y="6537960"/>
+            <a:ext cx="3657600" cy="320040"/>
+          </a:xfrm>
+          <a:prstGeom prst="rect">
+            <a:avLst/>
+          </a:prstGeom>
+          <a:noFill/>
+          <a:ln/>
+        </p:spPr>
+        <p:txBody>
+          <a:bodyPr wrap="square" rtlCol="0" anchor="ctr"/>
+          <a:lstStyle/>
+          <a:p>
+            <a:pPr indent="0" marL="0">
+              <a:buNone/>
+            </a:pPr>
+            <a:r>
+              <a:rPr lang="en-US" sz="1000" dirty="0">
                 <a:solidFill>
                   <a:srgbClr val="FFFFFF"/>
                 </a:solidFill>
@@ -6966,48 +8772,48 @@
                 <a:ea typeface="Calibri" pitchFamily="34" charset="-122"/>
                 <a:cs typeface="Calibri" pitchFamily="34" charset="-120"/>
               </a:rPr>
-              <a:t>Communication and Teamwork Skills</a:t>
-            </a:r>
-            <a:endParaRPr lang="en-US" sz="3000" dirty="0"/>
-          </a:p>
-        </p:txBody>
-      </p:sp>
-      <p:sp>
-        <p:nvSpPr>
-          <p:cNvPr id="6" name="Text 4"/>
-          <p:cNvSpPr/>
-          <p:nvPr/>
-        </p:nvSpPr>
-        <p:spPr>
-          <a:xfrm>
-            <a:off x="3840480" y="3977640"/>
-            <a:ext cx="7589520" cy="457200"/>
-          </a:xfrm>
-          <a:prstGeom prst="rect">
-            <a:avLst/>
-          </a:prstGeom>
-          <a:noFill/>
-          <a:ln/>
-        </p:spPr>
-        <p:txBody>
-          <a:bodyPr wrap="square" rtlCol="0" anchor="ctr"/>
-          <a:lstStyle/>
-          <a:p>
-            <a:pPr indent="0" marL="0">
-              <a:buNone/>
-            </a:pPr>
-            <a:r>
-              <a:rPr lang="en-US" sz="1400" dirty="0">
-                <a:solidFill>
-                  <a:srgbClr val="9FB3D9"/>
-                </a:solidFill>
-                <a:latin typeface="Calibri" pitchFamily="34" charset="0"/>
-                <a:ea typeface="Calibri" pitchFamily="34" charset="-122"/>
-                <a:cs typeface="Calibri" pitchFamily="34" charset="-120"/>
-              </a:rPr>
-              <a:t>Covers: B.P3  ·  B.M3  ·  B.D3</a:t>
-            </a:r>
-            <a:endParaRPr lang="en-US" sz="1400" dirty="0"/>
+              <a:t>PS12</a:t>
+            </a:r>
+            <a:endParaRPr lang="en-US" sz="1000" dirty="0"/>
+          </a:p>
+        </p:txBody>
+      </p:sp>
+      <p:sp>
+        <p:nvSpPr>
+          <p:cNvPr id="17" name="Text 14"/>
+          <p:cNvSpPr/>
+          <p:nvPr/>
+        </p:nvSpPr>
+        <p:spPr>
+          <a:xfrm>
+            <a:off x="7772400" y="6537960"/>
+            <a:ext cx="4114800" cy="320040"/>
+          </a:xfrm>
+          <a:prstGeom prst="rect">
+            <a:avLst/>
+          </a:prstGeom>
+          <a:noFill/>
+          <a:ln/>
+        </p:spPr>
+        <p:txBody>
+          <a:bodyPr wrap="square" rtlCol="0" anchor="ctr"/>
+          <a:lstStyle/>
+          <a:p>
+            <a:pPr algn="r" indent="0" marL="0">
+              <a:buNone/>
+            </a:pPr>
+            <a:r>
+              <a:rPr lang="en-US" sz="1000" dirty="0">
+                <a:solidFill>
+                  <a:srgbClr val="FFFFFF"/>
+                </a:solidFill>
+                <a:latin typeface="Calibri" pitchFamily="34" charset="0"/>
+                <a:ea typeface="Calibri" pitchFamily="34" charset="-122"/>
+                <a:cs typeface="Calibri" pitchFamily="34" charset="-120"/>
+              </a:rPr>
+              <a:t>Knowledge Hub 4 — Skills Needed to Participate</a:t>
+            </a:r>
+            <a:endParaRPr lang="en-US" sz="1000" dirty="0"/>
           </a:p>
         </p:txBody>
       </p:sp>
@@ -7036,630 +8842,130 @@
           <a:chExt cx="0" cy="0"/>
         </a:xfrm>
       </p:grpSpPr>
-      <p:pic>
-        <p:nvPicPr>
-          <p:cNvPr id="2" name="Image 0" descr="preencoded.png">    </p:cNvPr>
-          <p:cNvPicPr>
-            <a:picLocks noChangeAspect="1"/>
-          </p:cNvPicPr>
-          <p:nvPr/>
-        </p:nvPicPr>
-        <p:blipFill>
-          <a:blip r:embed="rId1"/>
-          <a:stretch>
-            <a:fillRect/>
-          </a:stretch>
-        </p:blipFill>
-        <p:spPr>
-          <a:xfrm>
-            <a:off x="11109960" y="228600"/>
-            <a:ext cx="777240" cy="548640"/>
-          </a:xfrm>
-          <a:prstGeom prst="rect">
-            <a:avLst/>
-          </a:prstGeom>
-        </p:spPr>
-      </p:pic>
-      <p:sp>
-        <p:nvSpPr>
-          <p:cNvPr id="3" name="Shape 0"/>
-          <p:cNvSpPr/>
-          <p:nvPr/>
-        </p:nvSpPr>
-        <p:spPr>
-          <a:xfrm>
-            <a:off x="9418320" y="274320"/>
-            <a:ext cx="2423160" cy="384048"/>
-          </a:xfrm>
-          <a:prstGeom prst="roundRect">
-            <a:avLst>
-              <a:gd name="adj" fmla="val 19048"/>
-            </a:avLst>
+      <p:sp>
+        <p:nvSpPr>
+          <p:cNvPr id="2" name="Shape 0"/>
+          <p:cNvSpPr/>
+          <p:nvPr/>
+        </p:nvSpPr>
+        <p:spPr>
+          <a:xfrm>
+            <a:off x="0" y="0"/>
+            <a:ext cx="12188952" cy="6858000"/>
+          </a:xfrm>
+          <a:prstGeom prst="rect">
+            <a:avLst/>
           </a:prstGeom>
           <a:solidFill>
-            <a:srgbClr val="C8A951"/>
+            <a:srgbClr val="122952"/>
           </a:solidFill>
           <a:ln/>
         </p:spPr>
       </p:sp>
       <p:sp>
         <p:nvSpPr>
-          <p:cNvPr id="4" name="Text 1"/>
-          <p:cNvSpPr/>
-          <p:nvPr/>
-        </p:nvSpPr>
-        <p:spPr>
-          <a:xfrm>
-            <a:off x="9418320" y="274320"/>
-            <a:ext cx="2423160" cy="384048"/>
-          </a:xfrm>
-          <a:prstGeom prst="rect">
-            <a:avLst/>
-          </a:prstGeom>
-          <a:noFill/>
-          <a:ln/>
-        </p:spPr>
-        <p:txBody>
-          <a:bodyPr wrap="square" lIns="0" tIns="0" rIns="0" bIns="0" rtlCol="0" anchor="ctr"/>
-          <a:lstStyle/>
-          <a:p>
-            <a:pPr algn="ctr" indent="0" marL="0">
-              <a:buNone/>
-            </a:pPr>
-            <a:r>
-              <a:rPr lang="en-US" sz="1200" b="1" dirty="0">
-                <a:solidFill>
-                  <a:srgbClr val="122952"/>
-                </a:solidFill>
-                <a:latin typeface="Calibri" pitchFamily="34" charset="0"/>
-                <a:ea typeface="Calibri" pitchFamily="34" charset="-122"/>
-                <a:cs typeface="Calibri" pitchFamily="34" charset="-120"/>
-              </a:rPr>
-              <a:t>B.P3 · B.M3 · B.D3</a:t>
-            </a:r>
-            <a:endParaRPr lang="en-US" sz="1200" dirty="0"/>
-          </a:p>
-        </p:txBody>
-      </p:sp>
-      <p:sp>
-        <p:nvSpPr>
-          <p:cNvPr id="5" name="Text 2"/>
-          <p:cNvSpPr/>
-          <p:nvPr/>
-        </p:nvSpPr>
-        <p:spPr>
-          <a:xfrm>
-            <a:off x="548640" y="320040"/>
-            <a:ext cx="8869680" cy="640080"/>
-          </a:xfrm>
-          <a:prstGeom prst="rect">
-            <a:avLst/>
-          </a:prstGeom>
-          <a:noFill/>
-          <a:ln/>
-        </p:spPr>
-        <p:txBody>
-          <a:bodyPr wrap="square" rtlCol="0" anchor="ctr"/>
-          <a:lstStyle/>
-          <a:p>
-            <a:pPr indent="0" marL="0">
-              <a:buNone/>
-            </a:pPr>
-            <a:r>
-              <a:rPr lang="en-US" sz="2500" b="1" dirty="0">
-                <a:solidFill>
-                  <a:srgbClr val="122952"/>
-                </a:solidFill>
-                <a:latin typeface="Calibri" pitchFamily="34" charset="0"/>
-                <a:ea typeface="Calibri" pitchFamily="34" charset="-122"/>
-                <a:cs typeface="Calibri" pitchFamily="34" charset="-120"/>
-              </a:rPr>
-              <a:t>Communication and Teamwork in Sport</a:t>
-            </a:r>
-            <a:endParaRPr lang="en-US" sz="2500" dirty="0"/>
-          </a:p>
-        </p:txBody>
-      </p:sp>
-      <p:sp>
-        <p:nvSpPr>
-          <p:cNvPr id="6" name="Text 3"/>
-          <p:cNvSpPr/>
-          <p:nvPr/>
-        </p:nvSpPr>
-        <p:spPr>
-          <a:xfrm>
-            <a:off x="548640" y="1097280"/>
-            <a:ext cx="5303520" cy="365760"/>
-          </a:xfrm>
-          <a:prstGeom prst="rect">
-            <a:avLst/>
-          </a:prstGeom>
-          <a:noFill/>
-          <a:ln/>
-        </p:spPr>
-        <p:txBody>
-          <a:bodyPr wrap="square" rtlCol="0" anchor="ctr"/>
-          <a:lstStyle/>
-          <a:p>
-            <a:pPr indent="0" marL="0">
-              <a:buNone/>
-            </a:pPr>
-            <a:r>
-              <a:rPr lang="en-US" sz="1600" b="1" dirty="0">
-                <a:solidFill>
-                  <a:srgbClr val="122952"/>
-                </a:solidFill>
-                <a:latin typeface="Calibri" pitchFamily="34" charset="0"/>
-                <a:ea typeface="Calibri" pitchFamily="34" charset="-122"/>
-                <a:cs typeface="Calibri" pitchFamily="34" charset="-120"/>
-              </a:rPr>
-              <a:t>Communication skills:</a:t>
-            </a:r>
-            <a:endParaRPr lang="en-US" sz="1600" dirty="0"/>
-          </a:p>
-        </p:txBody>
-      </p:sp>
-      <p:sp>
-        <p:nvSpPr>
-          <p:cNvPr id="7" name="Text 4"/>
-          <p:cNvSpPr/>
-          <p:nvPr/>
-        </p:nvSpPr>
-        <p:spPr>
-          <a:xfrm>
-            <a:off x="548640" y="1554480"/>
-            <a:ext cx="5303520" cy="548640"/>
-          </a:xfrm>
-          <a:prstGeom prst="rect">
-            <a:avLst/>
-          </a:prstGeom>
-          <a:noFill/>
-          <a:ln/>
-        </p:spPr>
-        <p:txBody>
-          <a:bodyPr wrap="square" rtlCol="0" anchor="ctr"/>
-          <a:lstStyle/>
-          <a:p>
-            <a:pPr marL="342900" indent="-342900">
-              <a:buSzPct val="100000"/>
-              <a:buChar char="▪"/>
-            </a:pPr>
-            <a:r>
-              <a:rPr lang="en-US" sz="1300" dirty="0">
-                <a:solidFill>
-                  <a:srgbClr val="2A2A2A"/>
-                </a:solidFill>
-                <a:latin typeface="Calibri" pitchFamily="34" charset="0"/>
-                <a:ea typeface="Calibri" pitchFamily="34" charset="-122"/>
-                <a:cs typeface="Calibri" pitchFamily="34" charset="-120"/>
-              </a:rPr>
-              <a:t>Non-verbal communication — hand signals, body language</a:t>
-            </a:r>
-            <a:endParaRPr lang="en-US" sz="1300" dirty="0"/>
-          </a:p>
-        </p:txBody>
-      </p:sp>
-      <p:sp>
-        <p:nvSpPr>
-          <p:cNvPr id="8" name="Text 5"/>
-          <p:cNvSpPr/>
-          <p:nvPr/>
-        </p:nvSpPr>
-        <p:spPr>
-          <a:xfrm>
-            <a:off x="548640" y="2148840"/>
-            <a:ext cx="5303520" cy="548640"/>
-          </a:xfrm>
-          <a:prstGeom prst="rect">
-            <a:avLst/>
-          </a:prstGeom>
-          <a:noFill/>
-          <a:ln/>
-        </p:spPr>
-        <p:txBody>
-          <a:bodyPr wrap="square" rtlCol="0" anchor="ctr"/>
-          <a:lstStyle/>
-          <a:p>
-            <a:pPr marL="342900" indent="-342900">
-              <a:buSzPct val="100000"/>
-              <a:buChar char="▪"/>
-            </a:pPr>
-            <a:r>
-              <a:rPr lang="en-US" sz="1300" dirty="0">
-                <a:solidFill>
-                  <a:srgbClr val="2A2A2A"/>
-                </a:solidFill>
-                <a:latin typeface="Calibri" pitchFamily="34" charset="0"/>
-                <a:ea typeface="Calibri" pitchFamily="34" charset="-122"/>
-                <a:cs typeface="Calibri" pitchFamily="34" charset="-120"/>
-              </a:rPr>
-              <a:t>Speaking clearly, giving instructions to team mates</a:t>
-            </a:r>
-            <a:endParaRPr lang="en-US" sz="1300" dirty="0"/>
-          </a:p>
-        </p:txBody>
-      </p:sp>
-      <p:sp>
-        <p:nvSpPr>
-          <p:cNvPr id="9" name="Text 6"/>
-          <p:cNvSpPr/>
-          <p:nvPr/>
-        </p:nvSpPr>
-        <p:spPr>
-          <a:xfrm>
-            <a:off x="548640" y="2743200"/>
-            <a:ext cx="5303520" cy="548640"/>
-          </a:xfrm>
-          <a:prstGeom prst="rect">
-            <a:avLst/>
-          </a:prstGeom>
-          <a:noFill/>
-          <a:ln/>
-        </p:spPr>
-        <p:txBody>
-          <a:bodyPr wrap="square" rtlCol="0" anchor="ctr"/>
-          <a:lstStyle/>
-          <a:p>
-            <a:pPr marL="342900" indent="-342900">
-              <a:buSzPct val="100000"/>
-              <a:buChar char="▪"/>
-            </a:pPr>
-            <a:r>
-              <a:rPr lang="en-US" sz="1300" dirty="0">
-                <a:solidFill>
-                  <a:srgbClr val="2A2A2A"/>
-                </a:solidFill>
-                <a:latin typeface="Calibri" pitchFamily="34" charset="0"/>
-                <a:ea typeface="Calibri" pitchFamily="34" charset="-122"/>
-                <a:cs typeface="Calibri" pitchFamily="34" charset="-120"/>
-              </a:rPr>
-              <a:t>Listening and discussing plans with others</a:t>
-            </a:r>
-            <a:endParaRPr lang="en-US" sz="1300" dirty="0"/>
-          </a:p>
-        </p:txBody>
-      </p:sp>
-      <p:sp>
-        <p:nvSpPr>
-          <p:cNvPr id="10" name="Shape 7"/>
-          <p:cNvSpPr/>
-          <p:nvPr/>
-        </p:nvSpPr>
-        <p:spPr>
-          <a:xfrm>
-            <a:off x="6172200" y="1097280"/>
-            <a:ext cx="5440680" cy="4343400"/>
-          </a:xfrm>
-          <a:prstGeom prst="roundRect">
-            <a:avLst>
-              <a:gd name="adj" fmla="val 1684"/>
-            </a:avLst>
-          </a:prstGeom>
-          <a:solidFill>
-            <a:srgbClr val="E8EEF7"/>
-          </a:solidFill>
-          <a:ln/>
-        </p:spPr>
-      </p:sp>
-      <p:sp>
-        <p:nvSpPr>
-          <p:cNvPr id="11" name="Text 8"/>
-          <p:cNvSpPr/>
-          <p:nvPr/>
-        </p:nvSpPr>
-        <p:spPr>
-          <a:xfrm>
-            <a:off x="6446520" y="1325880"/>
-            <a:ext cx="4937760" cy="365760"/>
-          </a:xfrm>
-          <a:prstGeom prst="rect">
-            <a:avLst/>
-          </a:prstGeom>
-          <a:noFill/>
-          <a:ln/>
-        </p:spPr>
-        <p:txBody>
-          <a:bodyPr wrap="square" rtlCol="0" anchor="ctr"/>
-          <a:lstStyle/>
-          <a:p>
-            <a:pPr indent="0" marL="0">
-              <a:buNone/>
-            </a:pPr>
-            <a:r>
-              <a:rPr lang="en-US" sz="1600" b="1" dirty="0">
-                <a:solidFill>
-                  <a:srgbClr val="122952"/>
-                </a:solidFill>
-                <a:latin typeface="Calibri" pitchFamily="34" charset="0"/>
-                <a:ea typeface="Calibri" pitchFamily="34" charset="-122"/>
-                <a:cs typeface="Calibri" pitchFamily="34" charset="-120"/>
-              </a:rPr>
-              <a:t>Teamwork means:</a:t>
-            </a:r>
-            <a:endParaRPr lang="en-US" sz="1600" dirty="0"/>
-          </a:p>
-        </p:txBody>
-      </p:sp>
-      <p:sp>
-        <p:nvSpPr>
-          <p:cNvPr id="12" name="Text 9"/>
-          <p:cNvSpPr/>
-          <p:nvPr/>
-        </p:nvSpPr>
-        <p:spPr>
-          <a:xfrm>
-            <a:off x="6446520" y="1874520"/>
-            <a:ext cx="4937760" cy="320040"/>
-          </a:xfrm>
-          <a:prstGeom prst="rect">
-            <a:avLst/>
-          </a:prstGeom>
-          <a:noFill/>
-          <a:ln/>
-        </p:spPr>
-        <p:txBody>
-          <a:bodyPr wrap="square" rtlCol="0" anchor="ctr"/>
-          <a:lstStyle/>
-          <a:p>
-            <a:pPr indent="0" marL="0">
-              <a:buNone/>
-            </a:pPr>
-            <a:r>
-              <a:rPr lang="en-US" sz="1300" b="1" dirty="0">
-                <a:solidFill>
-                  <a:srgbClr val="122952"/>
-                </a:solidFill>
-                <a:latin typeface="Calibri" pitchFamily="34" charset="0"/>
-                <a:ea typeface="Calibri" pitchFamily="34" charset="-122"/>
-                <a:cs typeface="Calibri" pitchFamily="34" charset="-120"/>
-              </a:rPr>
-              <a:t>Working together</a:t>
-            </a:r>
-            <a:endParaRPr lang="en-US" sz="1300" dirty="0"/>
-          </a:p>
-        </p:txBody>
-      </p:sp>
-      <p:sp>
-        <p:nvSpPr>
-          <p:cNvPr id="13" name="Text 10"/>
-          <p:cNvSpPr/>
-          <p:nvPr/>
-        </p:nvSpPr>
-        <p:spPr>
-          <a:xfrm>
-            <a:off x="6446520" y="2240280"/>
-            <a:ext cx="4937760" cy="640080"/>
-          </a:xfrm>
-          <a:prstGeom prst="rect">
-            <a:avLst/>
-          </a:prstGeom>
-          <a:noFill/>
-          <a:ln/>
-        </p:spPr>
-        <p:txBody>
-          <a:bodyPr wrap="square" rtlCol="0" anchor="ctr"/>
-          <a:lstStyle/>
-          <a:p>
-            <a:pPr indent="0" marL="0">
-              <a:buNone/>
-            </a:pPr>
-            <a:r>
-              <a:rPr lang="en-US" sz="1200" dirty="0">
-                <a:solidFill>
-                  <a:srgbClr val="2A2A2A"/>
-                </a:solidFill>
-                <a:latin typeface="Calibri" pitchFamily="34" charset="0"/>
-                <a:ea typeface="Calibri" pitchFamily="34" charset="-122"/>
-                <a:cs typeface="Calibri" pitchFamily="34" charset="-120"/>
-              </a:rPr>
-              <a:t>To take part in sport and adventurous activities</a:t>
-            </a:r>
-            <a:endParaRPr lang="en-US" sz="1200" dirty="0"/>
-          </a:p>
-        </p:txBody>
-      </p:sp>
-      <p:sp>
-        <p:nvSpPr>
-          <p:cNvPr id="14" name="Text 11"/>
-          <p:cNvSpPr/>
-          <p:nvPr/>
-        </p:nvSpPr>
-        <p:spPr>
-          <a:xfrm>
-            <a:off x="6446520" y="3017520"/>
-            <a:ext cx="4937760" cy="320040"/>
-          </a:xfrm>
-          <a:prstGeom prst="rect">
-            <a:avLst/>
-          </a:prstGeom>
-          <a:noFill/>
-          <a:ln/>
-        </p:spPr>
-        <p:txBody>
-          <a:bodyPr wrap="square" rtlCol="0" anchor="ctr"/>
-          <a:lstStyle/>
-          <a:p>
-            <a:pPr indent="0" marL="0">
-              <a:buNone/>
-            </a:pPr>
-            <a:r>
-              <a:rPr lang="en-US" sz="1300" b="1" dirty="0">
-                <a:solidFill>
-                  <a:srgbClr val="122952"/>
-                </a:solidFill>
-                <a:latin typeface="Calibri" pitchFamily="34" charset="0"/>
-                <a:ea typeface="Calibri" pitchFamily="34" charset="-122"/>
-                <a:cs typeface="Calibri" pitchFamily="34" charset="-120"/>
-              </a:rPr>
-              <a:t>Individual contribution</a:t>
-            </a:r>
-            <a:endParaRPr lang="en-US" sz="1300" dirty="0"/>
-          </a:p>
-        </p:txBody>
-      </p:sp>
-      <p:sp>
-        <p:nvSpPr>
-          <p:cNvPr id="15" name="Text 12"/>
-          <p:cNvSpPr/>
-          <p:nvPr/>
-        </p:nvSpPr>
-        <p:spPr>
-          <a:xfrm>
-            <a:off x="6446520" y="3383280"/>
-            <a:ext cx="4937760" cy="640080"/>
-          </a:xfrm>
-          <a:prstGeom prst="rect">
-            <a:avLst/>
-          </a:prstGeom>
-          <a:noFill/>
-          <a:ln/>
-        </p:spPr>
-        <p:txBody>
-          <a:bodyPr wrap="square" rtlCol="0" anchor="ctr"/>
-          <a:lstStyle/>
-          <a:p>
-            <a:pPr indent="0" marL="0">
-              <a:buNone/>
-            </a:pPr>
-            <a:r>
-              <a:rPr lang="en-US" sz="1200" dirty="0">
-                <a:solidFill>
-                  <a:srgbClr val="2A2A2A"/>
-                </a:solidFill>
-                <a:latin typeface="Calibri" pitchFamily="34" charset="0"/>
-                <a:ea typeface="Calibri" pitchFamily="34" charset="-122"/>
-                <a:cs typeface="Calibri" pitchFamily="34" charset="-120"/>
-              </a:rPr>
-              <a:t>Working individually to contribute to the team effort</a:t>
-            </a:r>
-            <a:endParaRPr lang="en-US" sz="1200" dirty="0"/>
-          </a:p>
-        </p:txBody>
-      </p:sp>
-      <p:sp>
-        <p:nvSpPr>
-          <p:cNvPr id="16" name="Text 13"/>
-          <p:cNvSpPr/>
-          <p:nvPr/>
-        </p:nvSpPr>
-        <p:spPr>
-          <a:xfrm>
-            <a:off x="6446520" y="4160520"/>
-            <a:ext cx="4937760" cy="320040"/>
-          </a:xfrm>
-          <a:prstGeom prst="rect">
-            <a:avLst/>
-          </a:prstGeom>
-          <a:noFill/>
-          <a:ln/>
-        </p:spPr>
-        <p:txBody>
-          <a:bodyPr wrap="square" rtlCol="0" anchor="ctr"/>
-          <a:lstStyle/>
-          <a:p>
-            <a:pPr indent="0" marL="0">
-              <a:buNone/>
-            </a:pPr>
-            <a:r>
-              <a:rPr lang="en-US" sz="1300" b="1" dirty="0">
-                <a:solidFill>
-                  <a:srgbClr val="122952"/>
-                </a:solidFill>
-                <a:latin typeface="Calibri" pitchFamily="34" charset="0"/>
-                <a:ea typeface="Calibri" pitchFamily="34" charset="-122"/>
-                <a:cs typeface="Calibri" pitchFamily="34" charset="-120"/>
-              </a:rPr>
-              <a:t>Respecting roles</a:t>
-            </a:r>
-            <a:endParaRPr lang="en-US" sz="1300" dirty="0"/>
-          </a:p>
-        </p:txBody>
-      </p:sp>
-      <p:sp>
-        <p:nvSpPr>
-          <p:cNvPr id="17" name="Text 14"/>
-          <p:cNvSpPr/>
-          <p:nvPr/>
-        </p:nvSpPr>
-        <p:spPr>
-          <a:xfrm>
-            <a:off x="6446520" y="4526280"/>
-            <a:ext cx="4937760" cy="640080"/>
-          </a:xfrm>
-          <a:prstGeom prst="rect">
-            <a:avLst/>
-          </a:prstGeom>
-          <a:noFill/>
-          <a:ln/>
-        </p:spPr>
-        <p:txBody>
-          <a:bodyPr wrap="square" rtlCol="0" anchor="ctr"/>
-          <a:lstStyle/>
-          <a:p>
-            <a:pPr indent="0" marL="0">
-              <a:buNone/>
-            </a:pPr>
-            <a:r>
-              <a:rPr lang="en-US" sz="1200" dirty="0">
-                <a:solidFill>
-                  <a:srgbClr val="2A2A2A"/>
-                </a:solidFill>
-                <a:latin typeface="Calibri" pitchFamily="34" charset="0"/>
-                <a:ea typeface="Calibri" pitchFamily="34" charset="-122"/>
-                <a:cs typeface="Calibri" pitchFamily="34" charset="-120"/>
-              </a:rPr>
-              <a:t>Respecting others' roles within the team</a:t>
-            </a:r>
-            <a:endParaRPr lang="en-US" sz="1200" dirty="0"/>
-          </a:p>
-        </p:txBody>
-      </p:sp>
-      <p:sp>
-        <p:nvSpPr>
-          <p:cNvPr id="18" name="Shape 15"/>
-          <p:cNvSpPr/>
-          <p:nvPr/>
-        </p:nvSpPr>
-        <p:spPr>
-          <a:xfrm>
-            <a:off x="0" y="6537960"/>
-            <a:ext cx="12188952" cy="320040"/>
-          </a:xfrm>
-          <a:prstGeom prst="rect">
-            <a:avLst/>
-          </a:prstGeom>
-          <a:solidFill>
-            <a:srgbClr val="1B3A6B"/>
-          </a:solidFill>
-          <a:ln/>
-        </p:spPr>
-      </p:sp>
-      <p:sp>
-        <p:nvSpPr>
-          <p:cNvPr id="19" name="Text 16"/>
-          <p:cNvSpPr/>
-          <p:nvPr/>
-        </p:nvSpPr>
-        <p:spPr>
-          <a:xfrm>
-            <a:off x="274320" y="6537960"/>
-            <a:ext cx="3657600" cy="320040"/>
-          </a:xfrm>
-          <a:prstGeom prst="rect">
-            <a:avLst/>
-          </a:prstGeom>
-          <a:noFill/>
-          <a:ln/>
-        </p:spPr>
-        <p:txBody>
-          <a:bodyPr wrap="square" rtlCol="0" anchor="ctr"/>
-          <a:lstStyle/>
-          <a:p>
-            <a:pPr indent="0" marL="0">
-              <a:buNone/>
-            </a:pPr>
-            <a:r>
-              <a:rPr lang="en-US" sz="1000" dirty="0">
+          <p:cNvPr id="3" name="Text 1"/>
+          <p:cNvSpPr/>
+          <p:nvPr/>
+        </p:nvSpPr>
+        <p:spPr>
+          <a:xfrm>
+            <a:off x="731520" y="1828800"/>
+            <a:ext cx="2743200" cy="2286000"/>
+          </a:xfrm>
+          <a:prstGeom prst="rect">
+            <a:avLst/>
+          </a:prstGeom>
+          <a:noFill/>
+          <a:ln/>
+        </p:spPr>
+        <p:txBody>
+          <a:bodyPr wrap="square" rtlCol="0" anchor="ctr"/>
+          <a:lstStyle/>
+          <a:p>
+            <a:pPr indent="0" marL="0">
+              <a:buNone/>
+            </a:pPr>
+            <a:r>
+              <a:rPr lang="en-US" sz="14000" b="1" dirty="0">
+                <a:solidFill>
+                  <a:srgbClr val="26538A"/>
+                </a:solidFill>
+                <a:latin typeface="Calibri" pitchFamily="34" charset="0"/>
+                <a:ea typeface="Calibri" pitchFamily="34" charset="-122"/>
+                <a:cs typeface="Calibri" pitchFamily="34" charset="-120"/>
+              </a:rPr>
+              <a:t>B</a:t>
+            </a:r>
+            <a:endParaRPr lang="en-US" sz="14000" dirty="0"/>
+          </a:p>
+        </p:txBody>
+      </p:sp>
+      <p:sp>
+        <p:nvSpPr>
+          <p:cNvPr id="4" name="Text 2"/>
+          <p:cNvSpPr/>
+          <p:nvPr/>
+        </p:nvSpPr>
+        <p:spPr>
+          <a:xfrm>
+            <a:off x="3840480" y="2377440"/>
+            <a:ext cx="7589520" cy="548640"/>
+          </a:xfrm>
+          <a:prstGeom prst="rect">
+            <a:avLst/>
+          </a:prstGeom>
+          <a:noFill/>
+          <a:ln/>
+        </p:spPr>
+        <p:txBody>
+          <a:bodyPr wrap="square" rtlCol="0" anchor="ctr"/>
+          <a:lstStyle/>
+          <a:p>
+            <a:pPr indent="0" marL="0">
+              <a:buNone/>
+            </a:pPr>
+            <a:r>
+              <a:rPr lang="en-US" sz="2000" b="1" dirty="0">
+                <a:solidFill>
+                  <a:srgbClr val="C8A951"/>
+                </a:solidFill>
+                <a:latin typeface="Calibri" pitchFamily="34" charset="0"/>
+                <a:ea typeface="Calibri" pitchFamily="34" charset="-122"/>
+                <a:cs typeface="Calibri" pitchFamily="34" charset="-120"/>
+              </a:rPr>
+              <a:t>Learning Aim B</a:t>
+            </a:r>
+            <a:endParaRPr lang="en-US" sz="2000" dirty="0"/>
+          </a:p>
+        </p:txBody>
+      </p:sp>
+      <p:sp>
+        <p:nvSpPr>
+          <p:cNvPr id="5" name="Text 3"/>
+          <p:cNvSpPr/>
+          <p:nvPr/>
+        </p:nvSpPr>
+        <p:spPr>
+          <a:xfrm>
+            <a:off x="3840480" y="2926080"/>
+            <a:ext cx="7589520" cy="1005840"/>
+          </a:xfrm>
+          <a:prstGeom prst="rect">
+            <a:avLst/>
+          </a:prstGeom>
+          <a:noFill/>
+          <a:ln/>
+        </p:spPr>
+        <p:txBody>
+          <a:bodyPr wrap="square" rtlCol="0" anchor="ctr"/>
+          <a:lstStyle/>
+          <a:p>
+            <a:pPr indent="0" marL="0">
+              <a:buNone/>
+            </a:pPr>
+            <a:r>
+              <a:rPr lang="en-US" sz="3000" b="1" dirty="0">
                 <a:solidFill>
                   <a:srgbClr val="FFFFFF"/>
                 </a:solidFill>
@@ -7667,48 +8973,48 @@
                 <a:ea typeface="Calibri" pitchFamily="34" charset="-122"/>
                 <a:cs typeface="Calibri" pitchFamily="34" charset="-120"/>
               </a:rPr>
-              <a:t>PS12</a:t>
-            </a:r>
-            <a:endParaRPr lang="en-US" sz="1000" dirty="0"/>
-          </a:p>
-        </p:txBody>
-      </p:sp>
-      <p:sp>
-        <p:nvSpPr>
-          <p:cNvPr id="20" name="Text 17"/>
-          <p:cNvSpPr/>
-          <p:nvPr/>
-        </p:nvSpPr>
-        <p:spPr>
-          <a:xfrm>
-            <a:off x="7772400" y="6537960"/>
-            <a:ext cx="4114800" cy="320040"/>
-          </a:xfrm>
-          <a:prstGeom prst="rect">
-            <a:avLst/>
-          </a:prstGeom>
-          <a:noFill/>
-          <a:ln/>
-        </p:spPr>
-        <p:txBody>
-          <a:bodyPr wrap="square" rtlCol="0" anchor="ctr"/>
-          <a:lstStyle/>
-          <a:p>
-            <a:pPr algn="r" indent="0" marL="0">
-              <a:buNone/>
-            </a:pPr>
-            <a:r>
-              <a:rPr lang="en-US" sz="1000" dirty="0">
-                <a:solidFill>
-                  <a:srgbClr val="FFFFFF"/>
-                </a:solidFill>
-                <a:latin typeface="Calibri" pitchFamily="34" charset="0"/>
-                <a:ea typeface="Calibri" pitchFamily="34" charset="-122"/>
-                <a:cs typeface="Calibri" pitchFamily="34" charset="-120"/>
-              </a:rPr>
-              <a:t>Knowledge Hub 5 — Communication and Teamwork in Sport</a:t>
-            </a:r>
-            <a:endParaRPr lang="en-US" sz="1000" dirty="0"/>
+              <a:t>Communication and Teamwork Skills</a:t>
+            </a:r>
+            <a:endParaRPr lang="en-US" sz="3000" dirty="0"/>
+          </a:p>
+        </p:txBody>
+      </p:sp>
+      <p:sp>
+        <p:nvSpPr>
+          <p:cNvPr id="6" name="Text 4"/>
+          <p:cNvSpPr/>
+          <p:nvPr/>
+        </p:nvSpPr>
+        <p:spPr>
+          <a:xfrm>
+            <a:off x="3840480" y="3977640"/>
+            <a:ext cx="7589520" cy="457200"/>
+          </a:xfrm>
+          <a:prstGeom prst="rect">
+            <a:avLst/>
+          </a:prstGeom>
+          <a:noFill/>
+          <a:ln/>
+        </p:spPr>
+        <p:txBody>
+          <a:bodyPr wrap="square" rtlCol="0" anchor="ctr"/>
+          <a:lstStyle/>
+          <a:p>
+            <a:pPr indent="0" marL="0">
+              <a:buNone/>
+            </a:pPr>
+            <a:r>
+              <a:rPr lang="en-US" sz="1400" dirty="0">
+                <a:solidFill>
+                  <a:srgbClr val="9FB3D9"/>
+                </a:solidFill>
+                <a:latin typeface="Calibri" pitchFamily="34" charset="0"/>
+                <a:ea typeface="Calibri" pitchFamily="34" charset="-122"/>
+                <a:cs typeface="Calibri" pitchFamily="34" charset="-120"/>
+              </a:rPr>
+              <a:t>Covers: B.P3  ·  B.M3  ·  B.D3</a:t>
+            </a:r>
+            <a:endParaRPr lang="en-US" sz="1400" dirty="0"/>
           </a:p>
         </p:txBody>
       </p:sp>
